--- a/pptx canvas/Lecture3.pptx
+++ b/pptx canvas/Lecture3.pptx
@@ -5,33 +5,31 @@
     <p:sldMasterId id="2147483648" r:id="rId1"/>
   </p:sldMasterIdLst>
   <p:notesMasterIdLst>
-    <p:notesMasterId r:id="rId26"/>
+    <p:notesMasterId r:id="rId24"/>
   </p:notesMasterIdLst>
   <p:sldIdLst>
     <p:sldId id="256" r:id="rId2"/>
-    <p:sldId id="302" r:id="rId3"/>
-    <p:sldId id="303" r:id="rId4"/>
-    <p:sldId id="304" r:id="rId5"/>
-    <p:sldId id="305" r:id="rId6"/>
-    <p:sldId id="306" r:id="rId7"/>
-    <p:sldId id="307" r:id="rId8"/>
-    <p:sldId id="308" r:id="rId9"/>
-    <p:sldId id="309" r:id="rId10"/>
-    <p:sldId id="310" r:id="rId11"/>
-    <p:sldId id="321" r:id="rId12"/>
-    <p:sldId id="311" r:id="rId13"/>
-    <p:sldId id="312" r:id="rId14"/>
-    <p:sldId id="313" r:id="rId15"/>
-    <p:sldId id="314" r:id="rId16"/>
-    <p:sldId id="315" r:id="rId17"/>
-    <p:sldId id="316" r:id="rId18"/>
-    <p:sldId id="323" r:id="rId19"/>
-    <p:sldId id="324" r:id="rId20"/>
-    <p:sldId id="317" r:id="rId21"/>
-    <p:sldId id="318" r:id="rId22"/>
-    <p:sldId id="319" r:id="rId23"/>
-    <p:sldId id="320" r:id="rId24"/>
-    <p:sldId id="301" r:id="rId25"/>
+    <p:sldId id="325" r:id="rId3"/>
+    <p:sldId id="313" r:id="rId4"/>
+    <p:sldId id="327" r:id="rId5"/>
+    <p:sldId id="316" r:id="rId6"/>
+    <p:sldId id="323" r:id="rId7"/>
+    <p:sldId id="314" r:id="rId8"/>
+    <p:sldId id="326" r:id="rId9"/>
+    <p:sldId id="303" r:id="rId10"/>
+    <p:sldId id="304" r:id="rId11"/>
+    <p:sldId id="305" r:id="rId12"/>
+    <p:sldId id="306" r:id="rId13"/>
+    <p:sldId id="307" r:id="rId14"/>
+    <p:sldId id="308" r:id="rId15"/>
+    <p:sldId id="309" r:id="rId16"/>
+    <p:sldId id="310" r:id="rId17"/>
+    <p:sldId id="321" r:id="rId18"/>
+    <p:sldId id="317" r:id="rId19"/>
+    <p:sldId id="315" r:id="rId20"/>
+    <p:sldId id="324" r:id="rId21"/>
+    <p:sldId id="319" r:id="rId22"/>
+    <p:sldId id="301" r:id="rId23"/>
   </p:sldIdLst>
   <p:sldSz cx="12192000" cy="6858000"/>
   <p:notesSz cx="6858000" cy="9144000"/>
@@ -220,7 +218,7 @@
           <a:p>
             <a:fld id="{4995A223-E7C9-A243-9A70-FE01E1A1DD65}" type="datetimeFigureOut">
               <a:rPr lang="en-US" smtClean="0"/>
-              <a:t>8/29/2026</a:t>
+              <a:t>9/3/26</a:t>
             </a:fld>
             <a:endParaRPr lang="en-US"/>
           </a:p>
@@ -532,37 +530,6 @@
           <a:bodyPr/>
           <a:lstStyle/>
           <a:p>
-            <a:pPr marL="0" marR="0" lvl="0" indent="0" algn="l" defTabSz="914400" rtl="0" eaLnBrk="1" fontAlgn="auto" latinLnBrk="0" hangingPunct="1">
-              <a:lnSpc>
-                <a:spcPct val="100000"/>
-              </a:lnSpc>
-              <a:spcBef>
-                <a:spcPts val="0"/>
-              </a:spcBef>
-              <a:spcAft>
-                <a:spcPts val="0"/>
-              </a:spcAft>
-              <a:buClrTx/>
-              <a:buSzTx/>
-              <a:buFontTx/>
-              <a:buNone/>
-              <a:tabLst/>
-              <a:defRPr/>
-            </a:pPr>
-            <a:r>
-              <a:rPr lang="en-GB" sz="1200" b="0" kern="1200" dirty="0">
-                <a:solidFill>
-                  <a:schemeClr val="tx1"/>
-                </a:solidFill>
-                <a:effectLst/>
-                <a:latin typeface="+mn-lt"/>
-                <a:ea typeface="+mn-ea"/>
-                <a:cs typeface="+mn-cs"/>
-              </a:rPr>
-              <a:t>Overview of the three domains (Tracking, Scouting, Strategy) and how data changes sports decisions.</a:t>
-            </a:r>
-          </a:p>
-          <a:p>
             <a:endParaRPr lang="en-US" dirty="0"/>
           </a:p>
         </p:txBody>
@@ -657,8 +624,13 @@
                 <a:ea typeface="+mn-ea"/>
                 <a:cs typeface="+mn-cs"/>
               </a:rPr>
-              <a:t>scope depends on the decision, available observations, and the level of confidence needed. Narrower is not automatically better.</a:t>
-            </a:r>
+              <a:t>Ask what remains unresolved. Possible answers include the definition of scoring efficiency, the definition of a close game, whether overtime is included, and what decision the analysis would inform. Emphasize that questions can be refined iteratively.</a:t>
+            </a:r>
+          </a:p>
+          <a:p>
+            <a:br>
+              <a:rPr lang="en-US" dirty="0"/>
+            </a:br>
             <a:endParaRPr lang="en-US" dirty="0"/>
           </a:p>
         </p:txBody>
@@ -680,7 +652,7 @@
           <a:p>
             <a:fld id="{117D17FD-8842-8E4F-8C3E-EC8B634B2D5A}" type="slidenum">
               <a:rPr lang="en-US" smtClean="0"/>
-              <a:t>10</a:t>
+              <a:t>15</a:t>
             </a:fld>
             <a:endParaRPr lang="en-US"/>
           </a:p>
@@ -689,7 +661,7 @@
     </p:spTree>
     <p:extLst>
       <p:ext uri="{BB962C8B-B14F-4D97-AF65-F5344CB8AC3E}">
-        <p14:creationId xmlns:p14="http://schemas.microsoft.com/office/powerpoint/2010/main" val="20703990"/>
+        <p14:creationId xmlns:p14="http://schemas.microsoft.com/office/powerpoint/2010/main" val="2692415501"/>
       </p:ext>
     </p:extLst>
   </p:cSld>
@@ -753,7 +725,7 @@
                 <a:ea typeface="+mn-ea"/>
                 <a:cs typeface="+mn-cs"/>
               </a:rPr>
-              <a:t>relationship, sequence, or group difference does not by itself establish causation. Keep the discussion conceptual; causal inference will be revisited later.</a:t>
+              <a:t>scope depends on the decision, available observations, and the level of confidence needed. Narrower is not automatically better.</a:t>
             </a:r>
             <a:endParaRPr lang="en-US" dirty="0"/>
           </a:p>
@@ -776,7 +748,7 @@
           <a:p>
             <a:fld id="{117D17FD-8842-8E4F-8C3E-EC8B634B2D5A}" type="slidenum">
               <a:rPr lang="en-US" smtClean="0"/>
-              <a:t>11</a:t>
+              <a:t>16</a:t>
             </a:fld>
             <a:endParaRPr lang="en-US"/>
           </a:p>
@@ -785,7 +757,7 @@
     </p:spTree>
     <p:extLst>
       <p:ext uri="{BB962C8B-B14F-4D97-AF65-F5344CB8AC3E}">
-        <p14:creationId xmlns:p14="http://schemas.microsoft.com/office/powerpoint/2010/main" val="3645635116"/>
+        <p14:creationId xmlns:p14="http://schemas.microsoft.com/office/powerpoint/2010/main" val="20703990"/>
       </p:ext>
     </p:extLst>
   </p:cSld>
@@ -849,37 +821,8 @@
                 <a:ea typeface="+mn-ea"/>
                 <a:cs typeface="+mn-cs"/>
               </a:rPr>
-              <a:t>Allow 3 minutes for group work and 2 minutes for discussion. Accept several defensible revisions. Listen for students treating </a:t>
-            </a:r>
-            <a:r>
-              <a:rPr lang="en-US" sz="1200" b="0" i="0" kern="1200" dirty="0" err="1">
-                <a:solidFill>
-                  <a:schemeClr val="tx1"/>
-                </a:solidFill>
-                <a:effectLst/>
-                <a:latin typeface="+mn-lt"/>
-                <a:ea typeface="+mn-ea"/>
-                <a:cs typeface="+mn-cs"/>
-              </a:rPr>
-              <a:t>PlayerLoad</a:t>
-            </a:r>
-            <a:r>
-              <a:rPr lang="en-US" sz="1200" b="0" i="0" kern="1200" dirty="0">
-                <a:solidFill>
-                  <a:schemeClr val="tx1"/>
-                </a:solidFill>
-                <a:effectLst/>
-                <a:latin typeface="+mn-lt"/>
-                <a:ea typeface="+mn-ea"/>
-                <a:cs typeface="+mn-cs"/>
-              </a:rPr>
-              <a:t> as both the construct and the measure, leaving performance undefined, or retaining causal language without a design that could support it.</a:t>
-            </a:r>
-          </a:p>
-          <a:p>
-            <a:br>
-              <a:rPr lang="en-US" dirty="0"/>
-            </a:br>
+              <a:t>relationship, sequence, or group difference does not by itself establish causation. Keep the discussion conceptual; causal inference will be revisited later.</a:t>
+            </a:r>
             <a:endParaRPr lang="en-US" dirty="0"/>
           </a:p>
         </p:txBody>
@@ -901,7 +844,7 @@
           <a:p>
             <a:fld id="{117D17FD-8842-8E4F-8C3E-EC8B634B2D5A}" type="slidenum">
               <a:rPr lang="en-US" smtClean="0"/>
-              <a:t>12</a:t>
+              <a:t>17</a:t>
             </a:fld>
             <a:endParaRPr lang="en-US"/>
           </a:p>
@@ -910,7 +853,7 @@
     </p:spTree>
     <p:extLst>
       <p:ext uri="{BB962C8B-B14F-4D97-AF65-F5344CB8AC3E}">
-        <p14:creationId xmlns:p14="http://schemas.microsoft.com/office/powerpoint/2010/main" val="142248071"/>
+        <p14:creationId xmlns:p14="http://schemas.microsoft.com/office/powerpoint/2010/main" val="3645635116"/>
       </p:ext>
     </p:extLst>
   </p:cSld>
@@ -964,6 +907,7 @@
           <a:bodyPr/>
           <a:lstStyle/>
           <a:p>
+            <a:pPr fontAlgn="ctr"/>
             <a:r>
               <a:rPr lang="en-US" sz="1200" b="0" i="0" kern="1200" dirty="0">
                 <a:solidFill>
@@ -974,13 +918,8 @@
                 <a:ea typeface="+mn-ea"/>
                 <a:cs typeface="+mn-cs"/>
               </a:rPr>
-              <a:t>Briefly tell the streetlight story: someone searches for lost keys under a streetlight because the light is better there, even though the keys were lost elsewhere. Connect the metaphor to convenient sport datasets.</a:t>
-            </a:r>
-          </a:p>
-          <a:p>
-            <a:br>
-              <a:rPr lang="en-US" dirty="0"/>
-            </a:br>
+              <a:t> analysts cannot ignore feasibility. The problem is when when convenience becomes the rationale for the analysis.</a:t>
+            </a:r>
             <a:endParaRPr lang="en-US" dirty="0"/>
           </a:p>
         </p:txBody>
@@ -1002,7 +941,7 @@
           <a:p>
             <a:fld id="{117D17FD-8842-8E4F-8C3E-EC8B634B2D5A}" type="slidenum">
               <a:rPr lang="en-US" smtClean="0"/>
-              <a:t>14</a:t>
+              <a:t>19</a:t>
             </a:fld>
             <a:endParaRPr lang="en-US"/>
           </a:p>
@@ -1011,7 +950,7 @@
     </p:spTree>
     <p:extLst>
       <p:ext uri="{BB962C8B-B14F-4D97-AF65-F5344CB8AC3E}">
-        <p14:creationId xmlns:p14="http://schemas.microsoft.com/office/powerpoint/2010/main" val="2864692811"/>
+        <p14:creationId xmlns:p14="http://schemas.microsoft.com/office/powerpoint/2010/main" val="2415367151"/>
       </p:ext>
     </p:extLst>
   </p:cSld>
@@ -1066,60 +1005,17 @@
           <a:lstStyle/>
           <a:p>
             <a:r>
-              <a:rPr lang="en-US" sz="1200" b="1" i="0" kern="1200" dirty="0">
-                <a:solidFill>
-                  <a:schemeClr val="tx1"/>
-                </a:solidFill>
-                <a:effectLst/>
-                <a:latin typeface="+mn-lt"/>
-                <a:ea typeface="+mn-ea"/>
-                <a:cs typeface="+mn-cs"/>
-              </a:rPr>
-              <a:t>Ask </a:t>
-            </a:r>
-            <a:r>
-              <a:rPr lang="en-US" sz="1200" b="0" i="0" kern="1200" dirty="0">
-                <a:solidFill>
-                  <a:schemeClr val="tx1"/>
-                </a:solidFill>
-                <a:effectLst/>
-                <a:latin typeface="+mn-lt"/>
-                <a:ea typeface="+mn-ea"/>
-                <a:cs typeface="+mn-cs"/>
-              </a:rPr>
-              <a:t>what information might be more relevant: possession type, shot location, defensive alignment, ball movement, video, or play-by-play sequence. </a:t>
-            </a:r>
-          </a:p>
-          <a:p>
-            <a:endParaRPr lang="en-US" sz="1200" b="0" i="0" kern="1200" dirty="0">
-              <a:solidFill>
-                <a:schemeClr val="tx1"/>
-              </a:solidFill>
-              <a:effectLst/>
-              <a:latin typeface="+mn-lt"/>
-              <a:ea typeface="+mn-ea"/>
-              <a:cs typeface="+mn-cs"/>
-            </a:endParaRPr>
-          </a:p>
-          <a:p>
-            <a:r>
-              <a:rPr lang="en-US" sz="1200" b="0" i="0" kern="1200" dirty="0">
-                <a:solidFill>
-                  <a:schemeClr val="tx1"/>
-                </a:solidFill>
-                <a:effectLst/>
-                <a:latin typeface="+mn-lt"/>
-                <a:ea typeface="+mn-ea"/>
-                <a:cs typeface="+mn-cs"/>
-              </a:rPr>
-              <a:t>The appropriate response may be to collect different data, narrow the claim, or admit the current data cannot answer the question.</a:t>
-            </a:r>
-          </a:p>
-          <a:p>
-            <a:br>
-              <a:rPr lang="en-US" dirty="0"/>
-            </a:br>
-            <a:endParaRPr lang="en-US" dirty="0"/>
+              <a:rPr lang="en-US" dirty="0"/>
+              <a:t>Open up </a:t>
+            </a:r>
+            <a:r>
+              <a:rPr lang="en-US" dirty="0" err="1"/>
+              <a:t>cas</a:t>
+            </a:r>
+            <a:r>
+              <a:rPr lang="en-US" dirty="0"/>
+              <a:t> study instructions</a:t>
+            </a:r>
           </a:p>
         </p:txBody>
       </p:sp>
@@ -1140,7 +1036,7 @@
           <a:p>
             <a:fld id="{117D17FD-8842-8E4F-8C3E-EC8B634B2D5A}" type="slidenum">
               <a:rPr lang="en-US" smtClean="0"/>
-              <a:t>15</a:t>
+              <a:t>21</a:t>
             </a:fld>
             <a:endParaRPr lang="en-US"/>
           </a:p>
@@ -1149,104 +1045,7 @@
     </p:spTree>
     <p:extLst>
       <p:ext uri="{BB962C8B-B14F-4D97-AF65-F5344CB8AC3E}">
-        <p14:creationId xmlns:p14="http://schemas.microsoft.com/office/powerpoint/2010/main" val="1485131233"/>
-      </p:ext>
-    </p:extLst>
-  </p:cSld>
-  <p:clrMapOvr>
-    <a:masterClrMapping/>
-  </p:clrMapOvr>
-</p:notes>
-</file>
-
-<file path=ppt/notesSlides/notesSlide15.xml><?xml version="1.0" encoding="utf-8"?>
-<p:notes xmlns:a="http://schemas.openxmlformats.org/drawingml/2006/main" xmlns:r="http://schemas.openxmlformats.org/officeDocument/2006/relationships" xmlns:p="http://schemas.openxmlformats.org/presentationml/2006/main">
-  <p:cSld>
-    <p:spTree>
-      <p:nvGrpSpPr>
-        <p:cNvPr id="1" name=""/>
-        <p:cNvGrpSpPr/>
-        <p:nvPr/>
-      </p:nvGrpSpPr>
-      <p:grpSpPr>
-        <a:xfrm>
-          <a:off x="0" y="0"/>
-          <a:ext cx="0" cy="0"/>
-          <a:chOff x="0" y="0"/>
-          <a:chExt cx="0" cy="0"/>
-        </a:xfrm>
-      </p:grpSpPr>
-      <p:sp>
-        <p:nvSpPr>
-          <p:cNvPr id="2" name="Slide Image Placeholder 1"/>
-          <p:cNvSpPr>
-            <a:spLocks noGrp="1" noRot="1" noChangeAspect="1"/>
-          </p:cNvSpPr>
-          <p:nvPr>
-            <p:ph type="sldImg"/>
-          </p:nvPr>
-        </p:nvSpPr>
-        <p:spPr/>
-      </p:sp>
-      <p:sp>
-        <p:nvSpPr>
-          <p:cNvPr id="3" name="Notes Placeholder 2"/>
-          <p:cNvSpPr>
-            <a:spLocks noGrp="1"/>
-          </p:cNvSpPr>
-          <p:nvPr>
-            <p:ph type="body" idx="1"/>
-          </p:nvPr>
-        </p:nvSpPr>
-        <p:spPr/>
-        <p:txBody>
-          <a:bodyPr/>
-          <a:lstStyle/>
-          <a:p>
-            <a:pPr fontAlgn="ctr"/>
-            <a:r>
-              <a:rPr lang="en-US" sz="1200" b="0" i="0" kern="1200" dirty="0">
-                <a:solidFill>
-                  <a:schemeClr val="tx1"/>
-                </a:solidFill>
-                <a:effectLst/>
-                <a:latin typeface="+mn-lt"/>
-                <a:ea typeface="+mn-ea"/>
-                <a:cs typeface="+mn-cs"/>
-              </a:rPr>
-              <a:t> analysts cannot ignore feasibility. The problem is when when convenience becomes the rationale for the analysis.</a:t>
-            </a:r>
-            <a:endParaRPr lang="en-US" dirty="0"/>
-          </a:p>
-        </p:txBody>
-      </p:sp>
-      <p:sp>
-        <p:nvSpPr>
-          <p:cNvPr id="4" name="Slide Number Placeholder 3"/>
-          <p:cNvSpPr>
-            <a:spLocks noGrp="1"/>
-          </p:cNvSpPr>
-          <p:nvPr>
-            <p:ph type="sldNum" sz="quarter" idx="5"/>
-          </p:nvPr>
-        </p:nvSpPr>
-        <p:spPr/>
-        <p:txBody>
-          <a:bodyPr/>
-          <a:lstStyle/>
-          <a:p>
-            <a:fld id="{117D17FD-8842-8E4F-8C3E-EC8B634B2D5A}" type="slidenum">
-              <a:rPr lang="en-US" smtClean="0"/>
-              <a:t>16</a:t>
-            </a:fld>
-            <a:endParaRPr lang="en-US"/>
-          </a:p>
-        </p:txBody>
-      </p:sp>
-    </p:spTree>
-    <p:extLst>
-      <p:ext uri="{BB962C8B-B14F-4D97-AF65-F5344CB8AC3E}">
-        <p14:creationId xmlns:p14="http://schemas.microsoft.com/office/powerpoint/2010/main" val="2415367151"/>
+        <p14:creationId xmlns:p14="http://schemas.microsoft.com/office/powerpoint/2010/main" val="1182775948"/>
       </p:ext>
     </p:extLst>
   </p:cSld>
@@ -1310,7 +1109,7 @@
                 <a:ea typeface="+mn-ea"/>
                 <a:cs typeface="+mn-cs"/>
               </a:rPr>
-              <a:t>Give students 90 seconds to write independently, then ask them to share with a partner. Collect two or three examples for use later in the lecture. The purpose is to begin with their sports thinking rather than analytical terminology.</a:t>
+              <a:t>Briefly tell the streetlight story: someone searches for lost keys under a streetlight because the light is better there, even though the keys were lost elsewhere. Connect the metaphor to convenient sport datasets.</a:t>
             </a:r>
           </a:p>
           <a:p>
@@ -1338,7 +1137,7 @@
           <a:p>
             <a:fld id="{117D17FD-8842-8E4F-8C3E-EC8B634B2D5A}" type="slidenum">
               <a:rPr lang="en-US" smtClean="0"/>
-              <a:t>2</a:t>
+              <a:t>3</a:t>
             </a:fld>
             <a:endParaRPr lang="en-US"/>
           </a:p>
@@ -1347,7 +1146,7 @@
     </p:spTree>
     <p:extLst>
       <p:ext uri="{BB962C8B-B14F-4D97-AF65-F5344CB8AC3E}">
-        <p14:creationId xmlns:p14="http://schemas.microsoft.com/office/powerpoint/2010/main" val="405138125"/>
+        <p14:creationId xmlns:p14="http://schemas.microsoft.com/office/powerpoint/2010/main" val="2864692811"/>
       </p:ext>
     </p:extLst>
   </p:cSld>
@@ -1402,6 +1201,18 @@
           <a:lstStyle/>
           <a:p>
             <a:r>
+              <a:rPr lang="en-US" sz="1200" b="1" i="0" kern="1200" dirty="0">
+                <a:solidFill>
+                  <a:schemeClr val="tx1"/>
+                </a:solidFill>
+                <a:effectLst/>
+                <a:latin typeface="+mn-lt"/>
+                <a:ea typeface="+mn-ea"/>
+                <a:cs typeface="+mn-cs"/>
+              </a:rPr>
+              <a:t>Ask </a:t>
+            </a:r>
+            <a:r>
               <a:rPr lang="en-US" sz="1200" b="0" i="0" kern="1200" dirty="0">
                 <a:solidFill>
                   <a:schemeClr val="tx1"/>
@@ -1411,7 +1222,32 @@
                 <a:ea typeface="+mn-ea"/>
                 <a:cs typeface="+mn-cs"/>
               </a:rPr>
-              <a:t>Do not frame the original statement as bad. It is useful practitioner knowledge, but it is not yet precise enough to guide data collection or analysis.</a:t>
+              <a:t>what information might be more relevant: possession type, shot location, defensive alignment, ball movement, video, or play-by-play sequence. </a:t>
+            </a:r>
+          </a:p>
+          <a:p>
+            <a:endParaRPr lang="en-US" sz="1200" b="0" i="0" kern="1200" dirty="0">
+              <a:solidFill>
+                <a:schemeClr val="tx1"/>
+              </a:solidFill>
+              <a:effectLst/>
+              <a:latin typeface="+mn-lt"/>
+              <a:ea typeface="+mn-ea"/>
+              <a:cs typeface="+mn-cs"/>
+            </a:endParaRPr>
+          </a:p>
+          <a:p>
+            <a:r>
+              <a:rPr lang="en-US" sz="1200" b="0" i="0" kern="1200" dirty="0">
+                <a:solidFill>
+                  <a:schemeClr val="tx1"/>
+                </a:solidFill>
+                <a:effectLst/>
+                <a:latin typeface="+mn-lt"/>
+                <a:ea typeface="+mn-ea"/>
+                <a:cs typeface="+mn-cs"/>
+              </a:rPr>
+              <a:t>The appropriate response may be to collect different data, narrow the claim, or admit the current data cannot answer the question.</a:t>
             </a:r>
           </a:p>
           <a:p>
@@ -1439,7 +1275,7 @@
           <a:p>
             <a:fld id="{117D17FD-8842-8E4F-8C3E-EC8B634B2D5A}" type="slidenum">
               <a:rPr lang="en-US" smtClean="0"/>
-              <a:t>3</a:t>
+              <a:t>7</a:t>
             </a:fld>
             <a:endParaRPr lang="en-US"/>
           </a:p>
@@ -1448,7 +1284,7 @@
     </p:spTree>
     <p:extLst>
       <p:ext uri="{BB962C8B-B14F-4D97-AF65-F5344CB8AC3E}">
-        <p14:creationId xmlns:p14="http://schemas.microsoft.com/office/powerpoint/2010/main" val="2536853171"/>
+        <p14:creationId xmlns:p14="http://schemas.microsoft.com/office/powerpoint/2010/main" val="1485131233"/>
       </p:ext>
     </p:extLst>
   </p:cSld>
@@ -1512,7 +1348,7 @@
                 <a:ea typeface="+mn-ea"/>
                 <a:cs typeface="+mn-cs"/>
               </a:rPr>
-              <a:t>Briefly connect this to the prior class: the domain tells us where the problem lives, and the analytical purpose tells us what kind of answer is needed. Today focuses on making the question answerable.</a:t>
+              <a:t>Do not frame the original statement as bad. It is useful practitioner knowledge, but it is not yet precise enough to guide data collection or analysis.</a:t>
             </a:r>
           </a:p>
           <a:p>
@@ -1540,7 +1376,7 @@
           <a:p>
             <a:fld id="{117D17FD-8842-8E4F-8C3E-EC8B634B2D5A}" type="slidenum">
               <a:rPr lang="en-US" smtClean="0"/>
-              <a:t>4</a:t>
+              <a:t>9</a:t>
             </a:fld>
             <a:endParaRPr lang="en-US"/>
           </a:p>
@@ -1549,7 +1385,7 @@
     </p:spTree>
     <p:extLst>
       <p:ext uri="{BB962C8B-B14F-4D97-AF65-F5344CB8AC3E}">
-        <p14:creationId xmlns:p14="http://schemas.microsoft.com/office/powerpoint/2010/main" val="3608129823"/>
+        <p14:creationId xmlns:p14="http://schemas.microsoft.com/office/powerpoint/2010/main" val="2536853171"/>
       </p:ext>
     </p:extLst>
   </p:cSld>
@@ -1613,7 +1449,7 @@
                 <a:ea typeface="+mn-ea"/>
                 <a:cs typeface="+mn-cs"/>
               </a:rPr>
-              <a:t>Ask students what information would matter for each decision. Highlight how timeframe, comparison, and acceptable uncertainty change with the decision.</a:t>
+              <a:t>Briefly connect this to the prior class: the domain tells us where the problem lives, and the analytical purpose tells us what kind of answer is needed. Today focuses on making the question answerable.</a:t>
             </a:r>
           </a:p>
           <a:p>
@@ -1641,7 +1477,7 @@
           <a:p>
             <a:fld id="{117D17FD-8842-8E4F-8C3E-EC8B634B2D5A}" type="slidenum">
               <a:rPr lang="en-US" smtClean="0"/>
-              <a:t>5</a:t>
+              <a:t>10</a:t>
             </a:fld>
             <a:endParaRPr lang="en-US"/>
           </a:p>
@@ -1650,7 +1486,7 @@
     </p:spTree>
     <p:extLst>
       <p:ext uri="{BB962C8B-B14F-4D97-AF65-F5344CB8AC3E}">
-        <p14:creationId xmlns:p14="http://schemas.microsoft.com/office/powerpoint/2010/main" val="22851240"/>
+        <p14:creationId xmlns:p14="http://schemas.microsoft.com/office/powerpoint/2010/main" val="3608129823"/>
       </p:ext>
     </p:extLst>
   </p:cSld>
@@ -1714,14 +1550,14 @@
                 <a:ea typeface="+mn-ea"/>
                 <a:cs typeface="+mn-cs"/>
               </a:rPr>
-              <a:t>Use this to introduce operationalization without relying heavily on the term. A countermovement-jump metric, wellness score, or heart-rate response may provide evidence about fatigue, but none is a universal fatigue detector.</a:t>
+              <a:t>Ask students what information would matter for each decision. Highlight how timeframe, comparison, and acceptable uncertainty change with the decision.</a:t>
             </a:r>
           </a:p>
           <a:p>
             <a:br>
               <a:rPr lang="en-US" dirty="0"/>
             </a:br>
-            <a:endParaRPr lang="en-US" b="1" dirty="0"/>
+            <a:endParaRPr lang="en-US" dirty="0"/>
           </a:p>
         </p:txBody>
       </p:sp>
@@ -1742,7 +1578,7 @@
           <a:p>
             <a:fld id="{117D17FD-8842-8E4F-8C3E-EC8B634B2D5A}" type="slidenum">
               <a:rPr lang="en-US" smtClean="0"/>
-              <a:t>6</a:t>
+              <a:t>11</a:t>
             </a:fld>
             <a:endParaRPr lang="en-US"/>
           </a:p>
@@ -1751,7 +1587,7 @@
     </p:spTree>
     <p:extLst>
       <p:ext uri="{BB962C8B-B14F-4D97-AF65-F5344CB8AC3E}">
-        <p14:creationId xmlns:p14="http://schemas.microsoft.com/office/powerpoint/2010/main" val="686014722"/>
+        <p14:creationId xmlns:p14="http://schemas.microsoft.com/office/powerpoint/2010/main" val="22851240"/>
       </p:ext>
     </p:extLst>
   </p:cSld>
@@ -1815,7 +1651,7 @@
                 <a:ea typeface="+mn-ea"/>
                 <a:cs typeface="+mn-cs"/>
               </a:rPr>
-              <a:t>Ask which comparison would be most appropriate if the decision is whether to modify tomorrow's training. There may be more than one defensible answer; require students to connect their choice to the decision.</a:t>
+              <a:t>Use this to introduce operationalization without relying heavily on the term. A countermovement-jump metric, wellness score, or heart-rate response may provide evidence about fatigue, but none is a universal fatigue detector.</a:t>
             </a:r>
           </a:p>
           <a:p>
@@ -1843,7 +1679,7 @@
           <a:p>
             <a:fld id="{117D17FD-8842-8E4F-8C3E-EC8B634B2D5A}" type="slidenum">
               <a:rPr lang="en-US" smtClean="0"/>
-              <a:t>7</a:t>
+              <a:t>12</a:t>
             </a:fld>
             <a:endParaRPr lang="en-US"/>
           </a:p>
@@ -1852,7 +1688,7 @@
     </p:spTree>
     <p:extLst>
       <p:ext uri="{BB962C8B-B14F-4D97-AF65-F5344CB8AC3E}">
-        <p14:creationId xmlns:p14="http://schemas.microsoft.com/office/powerpoint/2010/main" val="1843091341"/>
+        <p14:creationId xmlns:p14="http://schemas.microsoft.com/office/powerpoint/2010/main" val="686014722"/>
       </p:ext>
     </p:extLst>
   </p:cSld>
@@ -1916,7 +1752,7 @@
                 <a:ea typeface="+mn-ea"/>
                 <a:cs typeface="+mn-cs"/>
               </a:rPr>
-              <a:t>Avoid turning this into a demand to include every possible variable. The goal is to identify context that is material to the question.</a:t>
+              <a:t>Ask which comparison would be most appropriate if the decision is whether to modify tomorrow's training. There may be more than one defensible answer; require students to connect their choice to the decision.</a:t>
             </a:r>
           </a:p>
           <a:p>
@@ -1944,7 +1780,7 @@
           <a:p>
             <a:fld id="{117D17FD-8842-8E4F-8C3E-EC8B634B2D5A}" type="slidenum">
               <a:rPr lang="en-US" smtClean="0"/>
-              <a:t>8</a:t>
+              <a:t>13</a:t>
             </a:fld>
             <a:endParaRPr lang="en-US"/>
           </a:p>
@@ -1953,7 +1789,7 @@
     </p:spTree>
     <p:extLst>
       <p:ext uri="{BB962C8B-B14F-4D97-AF65-F5344CB8AC3E}">
-        <p14:creationId xmlns:p14="http://schemas.microsoft.com/office/powerpoint/2010/main" val="1669870936"/>
+        <p14:creationId xmlns:p14="http://schemas.microsoft.com/office/powerpoint/2010/main" val="1843091341"/>
       </p:ext>
     </p:extLst>
   </p:cSld>
@@ -2017,14 +1853,14 @@
                 <a:ea typeface="+mn-ea"/>
                 <a:cs typeface="+mn-cs"/>
               </a:rPr>
-              <a:t>Ask what remains unresolved. Possible answers include the definition of scoring efficiency, the definition of a close game, whether overtime is included, and what decision the analysis would inform. Emphasize that questions can be refined iteratively.</a:t>
+              <a:t>Avoid turning this into a demand to include every possible variable. The goal is to identify context that is material to the question.</a:t>
             </a:r>
           </a:p>
           <a:p>
             <a:br>
               <a:rPr lang="en-US" dirty="0"/>
             </a:br>
-            <a:endParaRPr lang="en-US" dirty="0"/>
+            <a:endParaRPr lang="en-US" b="1" dirty="0"/>
           </a:p>
         </p:txBody>
       </p:sp>
@@ -2045,7 +1881,7 @@
           <a:p>
             <a:fld id="{117D17FD-8842-8E4F-8C3E-EC8B634B2D5A}" type="slidenum">
               <a:rPr lang="en-US" smtClean="0"/>
-              <a:t>9</a:t>
+              <a:t>14</a:t>
             </a:fld>
             <a:endParaRPr lang="en-US"/>
           </a:p>
@@ -2054,7 +1890,7 @@
     </p:spTree>
     <p:extLst>
       <p:ext uri="{BB962C8B-B14F-4D97-AF65-F5344CB8AC3E}">
-        <p14:creationId xmlns:p14="http://schemas.microsoft.com/office/powerpoint/2010/main" val="2692415501"/>
+        <p14:creationId xmlns:p14="http://schemas.microsoft.com/office/powerpoint/2010/main" val="1669870936"/>
       </p:ext>
     </p:extLst>
   </p:cSld>
@@ -2221,7 +2057,7 @@
           <a:p>
             <a:fld id="{1BF61C71-767E-B84C-BFB3-7B18856D27F4}" type="datetimeFigureOut">
               <a:rPr lang="en-US" smtClean="0"/>
-              <a:t>8/29/2026</a:t>
+              <a:t>9/3/26</a:t>
             </a:fld>
             <a:endParaRPr lang="en-US"/>
           </a:p>
@@ -2429,7 +2265,7 @@
           <a:p>
             <a:fld id="{1BF61C71-767E-B84C-BFB3-7B18856D27F4}" type="datetimeFigureOut">
               <a:rPr lang="en-US" smtClean="0"/>
-              <a:t>8/29/2026</a:t>
+              <a:t>9/3/26</a:t>
             </a:fld>
             <a:endParaRPr lang="en-US"/>
           </a:p>
@@ -2647,7 +2483,7 @@
           <a:p>
             <a:fld id="{1BF61C71-767E-B84C-BFB3-7B18856D27F4}" type="datetimeFigureOut">
               <a:rPr lang="en-US" smtClean="0"/>
-              <a:t>8/29/2026</a:t>
+              <a:t>9/3/26</a:t>
             </a:fld>
             <a:endParaRPr lang="en-US"/>
           </a:p>
@@ -2855,7 +2691,7 @@
           <a:p>
             <a:fld id="{1BF61C71-767E-B84C-BFB3-7B18856D27F4}" type="datetimeFigureOut">
               <a:rPr lang="en-US" smtClean="0"/>
-              <a:t>8/29/2026</a:t>
+              <a:t>9/3/26</a:t>
             </a:fld>
             <a:endParaRPr lang="en-US"/>
           </a:p>
@@ -3139,7 +2975,7 @@
           <a:p>
             <a:fld id="{1BF61C71-767E-B84C-BFB3-7B18856D27F4}" type="datetimeFigureOut">
               <a:rPr lang="en-US" smtClean="0"/>
-              <a:t>8/29/2026</a:t>
+              <a:t>9/3/26</a:t>
             </a:fld>
             <a:endParaRPr lang="en-US"/>
           </a:p>
@@ -3415,7 +3251,7 @@
           <a:p>
             <a:fld id="{1BF61C71-767E-B84C-BFB3-7B18856D27F4}" type="datetimeFigureOut">
               <a:rPr lang="en-US" smtClean="0"/>
-              <a:t>8/29/2026</a:t>
+              <a:t>9/3/26</a:t>
             </a:fld>
             <a:endParaRPr lang="en-US"/>
           </a:p>
@@ -3838,7 +3674,7 @@
           <a:p>
             <a:fld id="{1BF61C71-767E-B84C-BFB3-7B18856D27F4}" type="datetimeFigureOut">
               <a:rPr lang="en-US" smtClean="0"/>
-              <a:t>8/29/2026</a:t>
+              <a:t>9/3/26</a:t>
             </a:fld>
             <a:endParaRPr lang="en-US"/>
           </a:p>
@@ -3988,7 +3824,7 @@
           <a:p>
             <a:fld id="{1BF61C71-767E-B84C-BFB3-7B18856D27F4}" type="datetimeFigureOut">
               <a:rPr lang="en-US" smtClean="0"/>
-              <a:t>8/29/2026</a:t>
+              <a:t>9/3/26</a:t>
             </a:fld>
             <a:endParaRPr lang="en-US"/>
           </a:p>
@@ -4109,7 +3945,7 @@
           <a:p>
             <a:fld id="{1BF61C71-767E-B84C-BFB3-7B18856D27F4}" type="datetimeFigureOut">
               <a:rPr lang="en-US" smtClean="0"/>
-              <a:t>8/29/2026</a:t>
+              <a:t>9/3/26</a:t>
             </a:fld>
             <a:endParaRPr lang="en-US"/>
           </a:p>
@@ -4430,7 +4266,7 @@
           <a:p>
             <a:fld id="{1BF61C71-767E-B84C-BFB3-7B18856D27F4}" type="datetimeFigureOut">
               <a:rPr lang="en-US" smtClean="0"/>
-              <a:t>8/29/2026</a:t>
+              <a:t>9/3/26</a:t>
             </a:fld>
             <a:endParaRPr lang="en-US"/>
           </a:p>
@@ -4727,7 +4563,7 @@
           <a:p>
             <a:fld id="{1BF61C71-767E-B84C-BFB3-7B18856D27F4}" type="datetimeFigureOut">
               <a:rPr lang="en-US" smtClean="0"/>
-              <a:t>8/29/2026</a:t>
+              <a:t>9/3/26</a:t>
             </a:fld>
             <a:endParaRPr lang="en-US"/>
           </a:p>
@@ -4981,7 +4817,7 @@
           <a:p>
             <a:fld id="{1BF61C71-767E-B84C-BFB3-7B18856D27F4}" type="datetimeFigureOut">
               <a:rPr lang="en-US" smtClean="0"/>
-              <a:t>8/29/2026</a:t>
+              <a:t>9/3/26</a:t>
             </a:fld>
             <a:endParaRPr lang="en-US"/>
           </a:p>
@@ -5431,7 +5267,7 @@
           <a:p>
             <a:r>
               <a:rPr lang="en-GB" sz="5400" dirty="0"/>
-              <a:t>Asking Testable Analytical Question</a:t>
+              <a:t>Asking Testable Analytical Questions</a:t>
             </a:r>
           </a:p>
         </p:txBody>
@@ -5505,7 +5341,7 @@
           <p:cNvPr id="2" name="Title 1">
             <a:extLst>
               <a:ext uri="{FF2B5EF4-FFF2-40B4-BE49-F238E27FC236}">
-                <a16:creationId xmlns:a16="http://schemas.microsoft.com/office/drawing/2014/main" id="{5FE02FD9-116D-5C6D-B58D-09569F2019F8}"/>
+                <a16:creationId xmlns:a16="http://schemas.microsoft.com/office/drawing/2014/main" id="{9BD22145-F8D5-2136-BED8-BC1F86BC54DC}"/>
               </a:ext>
             </a:extLst>
           </p:cNvPr>
@@ -5519,13 +5355,13 @@
         <p:spPr/>
         <p:txBody>
           <a:bodyPr>
-            <a:normAutofit/>
+            <a:normAutofit fontScale="90000"/>
           </a:bodyPr>
           <a:lstStyle/>
           <a:p>
             <a:r>
               <a:rPr lang="en-US" dirty="0"/>
-              <a:t>Precision Does Not Mean Small Questions</a:t>
+              <a:t>Good Questions Connect Curiosity to a Decision</a:t>
             </a:r>
           </a:p>
         </p:txBody>
@@ -5535,7 +5371,7 @@
           <p:cNvPr id="3" name="Content Placeholder 2">
             <a:extLst>
               <a:ext uri="{FF2B5EF4-FFF2-40B4-BE49-F238E27FC236}">
-                <a16:creationId xmlns:a16="http://schemas.microsoft.com/office/drawing/2014/main" id="{96282F93-8C44-8190-0B6F-584F2C6418E8}"/>
+                <a16:creationId xmlns:a16="http://schemas.microsoft.com/office/drawing/2014/main" id="{A880A4C1-BEE3-46D2-3142-B0C840C0C3C9}"/>
               </a:ext>
             </a:extLst>
           </p:cNvPr>
@@ -5546,282 +5382,99 @@
             <p:ph idx="1"/>
           </p:nvPr>
         </p:nvSpPr>
-        <p:spPr>
-          <a:xfrm>
-            <a:off x="5928360" y="1441938"/>
-            <a:ext cx="5425440" cy="4735025"/>
-          </a:xfrm>
-        </p:spPr>
-        <p:txBody>
-          <a:bodyPr/>
-          <a:lstStyle/>
-          <a:p>
-            <a:r>
-              <a:rPr lang="en-US" dirty="0"/>
-              <a:t>What makes a basketball team successful?</a:t>
-            </a:r>
-          </a:p>
-          <a:p>
-            <a:r>
-              <a:rPr lang="en-US" dirty="0"/>
-              <a:t>How does turnover rate relate to offensive efficiency across conference games?</a:t>
-            </a:r>
-          </a:p>
-          <a:p>
-            <a:r>
-              <a:rPr lang="en-US" dirty="0"/>
-              <a:t>Did the turnover with 1:12 remaining in Q3 cause Tuesday's loss?</a:t>
-            </a:r>
-          </a:p>
-        </p:txBody>
-      </p:sp>
-      <p:sp>
-        <p:nvSpPr>
-          <p:cNvPr id="4" name="Isosceles Triangle 3">
-            <a:extLst>
-              <a:ext uri="{FF2B5EF4-FFF2-40B4-BE49-F238E27FC236}">
-                <a16:creationId xmlns:a16="http://schemas.microsoft.com/office/drawing/2014/main" id="{85A78DD3-2BF7-FA16-4547-07628C82FFBD}"/>
-              </a:ext>
-            </a:extLst>
-          </p:cNvPr>
-          <p:cNvSpPr/>
-          <p:nvPr/>
-        </p:nvSpPr>
-        <p:spPr>
-          <a:xfrm flipV="1">
-            <a:off x="1341120" y="2307102"/>
-            <a:ext cx="3322320" cy="2773680"/>
-          </a:xfrm>
-          <a:prstGeom prst="triangle">
-            <a:avLst/>
-          </a:prstGeom>
-        </p:spPr>
-        <p:style>
-          <a:lnRef idx="1">
-            <a:schemeClr val="accent2"/>
-          </a:lnRef>
-          <a:fillRef idx="2">
-            <a:schemeClr val="accent2"/>
-          </a:fillRef>
-          <a:effectRef idx="1">
-            <a:schemeClr val="accent2"/>
-          </a:effectRef>
-          <a:fontRef idx="minor">
-            <a:schemeClr val="dk1"/>
-          </a:fontRef>
-        </p:style>
-        <p:txBody>
-          <a:bodyPr rtlCol="0" anchor="ctr"/>
-          <a:lstStyle/>
-          <a:p>
-            <a:pPr algn="ctr"/>
-            <a:endParaRPr lang="en-US" dirty="0"/>
-          </a:p>
-        </p:txBody>
-      </p:sp>
-      <p:sp>
-        <p:nvSpPr>
-          <p:cNvPr id="5" name="TextBox 4">
-            <a:extLst>
-              <a:ext uri="{FF2B5EF4-FFF2-40B4-BE49-F238E27FC236}">
-                <a16:creationId xmlns:a16="http://schemas.microsoft.com/office/drawing/2014/main" id="{B63C8B32-C548-7F03-2F4F-E3E743B62C9A}"/>
-              </a:ext>
-            </a:extLst>
-          </p:cNvPr>
-          <p:cNvSpPr txBox="1"/>
-          <p:nvPr/>
-        </p:nvSpPr>
-        <p:spPr>
-          <a:xfrm>
-            <a:off x="2417408" y="2355902"/>
-            <a:ext cx="1169744" cy="369332"/>
-          </a:xfrm>
-          <a:prstGeom prst="rect">
-            <a:avLst/>
-          </a:prstGeom>
-          <a:noFill/>
-        </p:spPr>
-        <p:txBody>
-          <a:bodyPr wrap="none" rtlCol="0">
-            <a:spAutoFit/>
-          </a:bodyPr>
-          <a:lstStyle/>
-          <a:p>
-            <a:r>
-              <a:rPr lang="en-US" dirty="0"/>
-              <a:t>Too Broad</a:t>
-            </a:r>
-          </a:p>
-        </p:txBody>
-      </p:sp>
-      <p:sp>
-        <p:nvSpPr>
-          <p:cNvPr id="7" name="TextBox 6">
-            <a:extLst>
-              <a:ext uri="{FF2B5EF4-FFF2-40B4-BE49-F238E27FC236}">
-                <a16:creationId xmlns:a16="http://schemas.microsoft.com/office/drawing/2014/main" id="{DF00C63F-853C-63B9-5662-996A6EC9A4F9}"/>
-              </a:ext>
-            </a:extLst>
-          </p:cNvPr>
-          <p:cNvSpPr txBox="1"/>
-          <p:nvPr/>
-        </p:nvSpPr>
-        <p:spPr>
-          <a:xfrm>
-            <a:off x="2518381" y="4319786"/>
-            <a:ext cx="967798" cy="646331"/>
-          </a:xfrm>
-          <a:prstGeom prst="rect">
-            <a:avLst/>
-          </a:prstGeom>
-          <a:noFill/>
-        </p:spPr>
-        <p:txBody>
-          <a:bodyPr wrap="square" rtlCol="0">
-            <a:spAutoFit/>
-          </a:bodyPr>
-          <a:lstStyle/>
-          <a:p>
-            <a:pPr algn="ctr"/>
-            <a:r>
-              <a:rPr lang="en-US" dirty="0"/>
-              <a:t>Too Narrow</a:t>
-            </a:r>
-          </a:p>
-        </p:txBody>
-      </p:sp>
-      <p:sp>
-        <p:nvSpPr>
-          <p:cNvPr id="10" name="TextBox 9">
-            <a:extLst>
-              <a:ext uri="{FF2B5EF4-FFF2-40B4-BE49-F238E27FC236}">
-                <a16:creationId xmlns:a16="http://schemas.microsoft.com/office/drawing/2014/main" id="{5FFA8024-07D0-B535-AB65-730AF51A7FEB}"/>
-              </a:ext>
-            </a:extLst>
-          </p:cNvPr>
-          <p:cNvSpPr txBox="1"/>
-          <p:nvPr/>
-        </p:nvSpPr>
-        <p:spPr>
-          <a:xfrm>
-            <a:off x="2286000" y="3429000"/>
-            <a:ext cx="1434486" cy="461665"/>
-          </a:xfrm>
-          <a:prstGeom prst="rect">
-            <a:avLst/>
-          </a:prstGeom>
-          <a:noFill/>
-        </p:spPr>
-        <p:txBody>
-          <a:bodyPr wrap="square" rtlCol="0">
-            <a:spAutoFit/>
-          </a:bodyPr>
-          <a:lstStyle/>
-          <a:p>
-            <a:pPr algn="ctr"/>
-            <a:r>
-              <a:rPr lang="en-US" sz="2400" b="1" dirty="0"/>
-              <a:t>Focused</a:t>
-            </a:r>
-          </a:p>
-        </p:txBody>
-      </p:sp>
-      <p:sp>
-        <p:nvSpPr>
-          <p:cNvPr id="13" name="TextBox 12">
-            <a:extLst>
-              <a:ext uri="{FF2B5EF4-FFF2-40B4-BE49-F238E27FC236}">
-                <a16:creationId xmlns:a16="http://schemas.microsoft.com/office/drawing/2014/main" id="{82955CE5-31A7-78DD-44B7-D0FB6DF892BB}"/>
-              </a:ext>
-            </a:extLst>
-          </p:cNvPr>
-          <p:cNvSpPr txBox="1"/>
-          <p:nvPr/>
-        </p:nvSpPr>
-        <p:spPr>
-          <a:xfrm>
-            <a:off x="571500" y="6018014"/>
-            <a:ext cx="11049000" cy="415498"/>
-          </a:xfrm>
-          <a:prstGeom prst="rect">
-            <a:avLst/>
-          </a:prstGeom>
-          <a:noFill/>
-        </p:spPr>
-        <p:txBody>
-          <a:bodyPr wrap="square">
-            <a:spAutoFit/>
-          </a:bodyPr>
-          <a:lstStyle/>
-          <a:p>
-            <a:r>
-              <a:rPr lang="en-US" sz="2100" i="0" dirty="0">
-                <a:solidFill>
-                  <a:srgbClr val="841617"/>
-                </a:solidFill>
-                <a:effectLst/>
-                <a:latin typeface="Fira Sans" panose="020B0503050000020004" pitchFamily="34" charset="0"/>
-              </a:rPr>
-              <a:t>A useful scope is narrow enough to </a:t>
-            </a:r>
-            <a:r>
-              <a:rPr lang="en-US" sz="2100" b="1" i="0" dirty="0">
-                <a:solidFill>
-                  <a:srgbClr val="841617"/>
-                </a:solidFill>
-                <a:effectLst/>
-                <a:latin typeface="Fira Sans" panose="020B0503050000020004" pitchFamily="34" charset="0"/>
-              </a:rPr>
-              <a:t>investigate </a:t>
-            </a:r>
-            <a:r>
-              <a:rPr lang="en-US" sz="2100" b="1" dirty="0">
-                <a:solidFill>
-                  <a:srgbClr val="841617"/>
-                </a:solidFill>
-                <a:latin typeface="Fira Sans" panose="020B0503050000020004" pitchFamily="34" charset="0"/>
-              </a:rPr>
-              <a:t>reasonably</a:t>
-            </a:r>
-            <a:r>
-              <a:rPr lang="en-US" sz="2100" dirty="0">
-                <a:solidFill>
-                  <a:srgbClr val="841617"/>
-                </a:solidFill>
-                <a:latin typeface="Fira Sans" panose="020B0503050000020004" pitchFamily="34" charset="0"/>
-              </a:rPr>
-              <a:t> </a:t>
-            </a:r>
-            <a:r>
-              <a:rPr lang="en-US" sz="2100" i="0" dirty="0">
-                <a:solidFill>
-                  <a:srgbClr val="841617"/>
-                </a:solidFill>
-                <a:effectLst/>
-                <a:latin typeface="Fira Sans" panose="020B0503050000020004" pitchFamily="34" charset="0"/>
-              </a:rPr>
-              <a:t>and broad enough to </a:t>
-            </a:r>
-            <a:r>
-              <a:rPr lang="en-US" sz="2100" b="1" i="0" dirty="0">
-                <a:solidFill>
-                  <a:srgbClr val="841617"/>
-                </a:solidFill>
-                <a:effectLst/>
-                <a:latin typeface="Fira Sans" panose="020B0503050000020004" pitchFamily="34" charset="0"/>
-              </a:rPr>
-              <a:t>matter</a:t>
-            </a:r>
-            <a:r>
-              <a:rPr lang="en-US" sz="2100" i="0" dirty="0">
-                <a:solidFill>
-                  <a:srgbClr val="841617"/>
-                </a:solidFill>
-                <a:effectLst/>
-                <a:latin typeface="Fira Sans" panose="020B0503050000020004" pitchFamily="34" charset="0"/>
-              </a:rPr>
-              <a:t>.</a:t>
-            </a:r>
+        <p:spPr/>
+        <p:txBody>
+          <a:bodyPr/>
+          <a:lstStyle/>
+          <a:p>
+            <a:pPr marL="0" indent="0">
+              <a:buNone/>
+            </a:pPr>
+            <a:r>
+              <a:rPr lang="en-US" dirty="0"/>
+              <a:t>A useful analytical question identifies:</a:t>
+            </a:r>
+          </a:p>
+          <a:p>
+            <a:pPr marL="914400" lvl="1" indent="-457200">
+              <a:buFont typeface="+mj-lt"/>
+              <a:buAutoNum type="arabicPeriod"/>
+            </a:pPr>
+            <a:r>
+              <a:rPr lang="en-US" b="1" dirty="0"/>
+              <a:t>The decision or purpose</a:t>
+            </a:r>
+            <a:r>
+              <a:rPr lang="en-US" dirty="0"/>
+              <a:t> : Why do we need the answer?</a:t>
+            </a:r>
+          </a:p>
+          <a:p>
+            <a:pPr marL="914400" lvl="1" indent="-457200">
+              <a:buFont typeface="+mj-lt"/>
+              <a:buAutoNum type="arabicPeriod"/>
+            </a:pPr>
+            <a:r>
+              <a:rPr lang="en-US" b="1" dirty="0"/>
+              <a:t>The outcome</a:t>
+            </a:r>
+            <a:r>
+              <a:rPr lang="en-US" dirty="0"/>
+              <a:t> : What are we trying to understand?</a:t>
+            </a:r>
+          </a:p>
+          <a:p>
+            <a:pPr marL="914400" lvl="1" indent="-457200">
+              <a:buFont typeface="+mj-lt"/>
+              <a:buAutoNum type="arabicPeriod"/>
+            </a:pPr>
+            <a:r>
+              <a:rPr lang="en-US" b="1" dirty="0"/>
+              <a:t>The comparison</a:t>
+            </a:r>
+            <a:r>
+              <a:rPr lang="en-US" dirty="0"/>
+              <a:t> : Relative to whom, what, or when?</a:t>
+            </a:r>
+          </a:p>
+          <a:p>
+            <a:pPr marL="914400" lvl="1" indent="-457200">
+              <a:buFont typeface="+mj-lt"/>
+              <a:buAutoNum type="arabicPeriod"/>
+            </a:pPr>
+            <a:r>
+              <a:rPr lang="en-US" b="1" dirty="0"/>
+              <a:t>The context</a:t>
+            </a:r>
+            <a:r>
+              <a:rPr lang="en-US" dirty="0"/>
+              <a:t> : Under which conditions?</a:t>
+            </a:r>
+          </a:p>
+          <a:p>
+            <a:pPr marL="914400" lvl="1" indent="-457200">
+              <a:buFont typeface="+mj-lt"/>
+              <a:buAutoNum type="arabicPeriod"/>
+            </a:pPr>
+            <a:r>
+              <a:rPr lang="en-US" b="1" dirty="0"/>
+              <a:t>The evidence</a:t>
+            </a:r>
+            <a:r>
+              <a:rPr lang="en-US" dirty="0"/>
+              <a:t> : What observations could answer it?</a:t>
+            </a:r>
+          </a:p>
+          <a:p>
+            <a:pPr marL="0" indent="0">
+              <a:buNone/>
+            </a:pPr>
+            <a:r>
+              <a:rPr lang="en-US" dirty="0"/>
+              <a:t>The question is the bridge between the sport problem and the analysis.</a:t>
+            </a:r>
+          </a:p>
+          <a:p>
             <a:endParaRPr lang="en-US" dirty="0"/>
           </a:p>
         </p:txBody>
@@ -5829,7 +5482,7 @@
     </p:spTree>
     <p:extLst>
       <p:ext uri="{BB962C8B-B14F-4D97-AF65-F5344CB8AC3E}">
-        <p14:creationId xmlns:p14="http://schemas.microsoft.com/office/powerpoint/2010/main" val="3463741294"/>
+        <p14:creationId xmlns:p14="http://schemas.microsoft.com/office/powerpoint/2010/main" val="4230780932"/>
       </p:ext>
     </p:extLst>
   </p:cSld>
@@ -5861,7 +5514,7 @@
           <p:cNvPr id="2" name="Title 1">
             <a:extLst>
               <a:ext uri="{FF2B5EF4-FFF2-40B4-BE49-F238E27FC236}">
-                <a16:creationId xmlns:a16="http://schemas.microsoft.com/office/drawing/2014/main" id="{EDDCB969-C776-A185-D710-DC8531A33A27}"/>
+                <a16:creationId xmlns:a16="http://schemas.microsoft.com/office/drawing/2014/main" id="{0973FFE0-3F73-4DAD-28C2-3F471720CC7C}"/>
               </a:ext>
             </a:extLst>
           </p:cNvPr>
@@ -5874,12 +5527,18 @@
         </p:nvSpPr>
         <p:spPr/>
         <p:txBody>
-          <a:bodyPr/>
-          <a:lstStyle/>
-          <a:p>
-            <a:r>
-              <a:rPr lang="en-US" dirty="0"/>
-              <a:t>Warning on Causal Language</a:t>
+          <a:bodyPr>
+            <a:normAutofit/>
+          </a:bodyPr>
+          <a:lstStyle/>
+          <a:p>
+            <a:r>
+              <a:rPr lang="en-US" dirty="0"/>
+              <a:t>Begin With the </a:t>
+            </a:r>
+            <a:r>
+              <a:rPr lang="en-US" b="1" dirty="0"/>
+              <a:t>Decision</a:t>
             </a:r>
           </a:p>
         </p:txBody>
@@ -5889,7 +5548,7 @@
           <p:cNvPr id="3" name="Content Placeholder 2">
             <a:extLst>
               <a:ext uri="{FF2B5EF4-FFF2-40B4-BE49-F238E27FC236}">
-                <a16:creationId xmlns:a16="http://schemas.microsoft.com/office/drawing/2014/main" id="{0449031A-6397-FA6B-A13F-CEBBC30704F0}"/>
+                <a16:creationId xmlns:a16="http://schemas.microsoft.com/office/drawing/2014/main" id="{FE201081-4CD5-A2F9-3C62-30D07A96C2BD}"/>
               </a:ext>
             </a:extLst>
           </p:cNvPr>
@@ -5905,377 +5564,108 @@
           <a:bodyPr/>
           <a:lstStyle/>
           <a:p>
+            <a:pPr marL="0" indent="0" algn="ctr">
+              <a:buNone/>
+            </a:pPr>
+            <a:r>
+              <a:rPr lang="en-US" dirty="0"/>
+              <a:t>“I want to know whether our players are tired.”</a:t>
+            </a:r>
+          </a:p>
+          <a:p>
+            <a:pPr marL="0" indent="0" algn="ctr">
+              <a:buNone/>
+            </a:pPr>
+            <a:endParaRPr lang="en-US" dirty="0"/>
+          </a:p>
+          <a:p>
             <a:pPr marL="0" indent="0">
               <a:buNone/>
             </a:pPr>
             <a:r>
               <a:rPr lang="en-US" dirty="0"/>
-              <a:t>The wording of the question should match what the evidence can support.</a:t>
+              <a:t>Possible decisions include:</a:t>
+            </a:r>
+          </a:p>
+          <a:p>
+            <a:pPr lvl="1"/>
+            <a:r>
+              <a:rPr lang="en-US" dirty="0"/>
+              <a:t>Should today's practice be modified?</a:t>
+            </a:r>
+          </a:p>
+          <a:p>
+            <a:pPr lvl="1"/>
+            <a:r>
+              <a:rPr lang="en-US" dirty="0"/>
+              <a:t>Should a player's minutes be restricted tomorrow?</a:t>
+            </a:r>
+          </a:p>
+          <a:p>
+            <a:pPr lvl="1"/>
+            <a:r>
+              <a:rPr lang="en-US" dirty="0"/>
+              <a:t>Should the weekly training plan change?</a:t>
+            </a:r>
+          </a:p>
+          <a:p>
+            <a:pPr lvl="1"/>
+            <a:r>
+              <a:rPr lang="en-US" dirty="0"/>
+              <a:t>Should the team adopt a new recovery strategy?</a:t>
             </a:r>
           </a:p>
           <a:p>
             <a:endParaRPr lang="en-US" dirty="0"/>
           </a:p>
-          <a:p>
-            <a:endParaRPr lang="en-US" dirty="0"/>
-          </a:p>
-        </p:txBody>
-      </p:sp>
-      <p:sp>
-        <p:nvSpPr>
-          <p:cNvPr id="5" name="Rectangle: Rounded Corners 4">
-            <a:extLst>
-              <a:ext uri="{FF2B5EF4-FFF2-40B4-BE49-F238E27FC236}">
-                <a16:creationId xmlns:a16="http://schemas.microsoft.com/office/drawing/2014/main" id="{15AB17EE-1C8D-2274-6614-0BF0F7BE423D}"/>
-              </a:ext>
-            </a:extLst>
-          </p:cNvPr>
-          <p:cNvSpPr/>
+        </p:txBody>
+      </p:sp>
+      <p:sp>
+        <p:nvSpPr>
+          <p:cNvPr id="5" name="TextBox 4">
+            <a:extLst>
+              <a:ext uri="{FF2B5EF4-FFF2-40B4-BE49-F238E27FC236}">
+                <a16:creationId xmlns:a16="http://schemas.microsoft.com/office/drawing/2014/main" id="{2E320C23-378C-A641-D4E3-E4BBB9449F4E}"/>
+              </a:ext>
+            </a:extLst>
+          </p:cNvPr>
+          <p:cNvSpPr txBox="1"/>
           <p:nvPr/>
         </p:nvSpPr>
         <p:spPr>
           <a:xfrm>
-            <a:off x="838200" y="4014329"/>
-            <a:ext cx="3886200" cy="914400"/>
+            <a:off x="754380" y="5046730"/>
+            <a:ext cx="10683240" cy="415498"/>
           </a:xfrm>
-          <a:prstGeom prst="roundRect">
+          <a:prstGeom prst="rect">
             <a:avLst/>
           </a:prstGeom>
+          <a:noFill/>
         </p:spPr>
-        <p:style>
-          <a:lnRef idx="1">
-            <a:schemeClr val="accent2"/>
-          </a:lnRef>
-          <a:fillRef idx="2">
-            <a:schemeClr val="accent2"/>
-          </a:fillRef>
-          <a:effectRef idx="1">
-            <a:schemeClr val="accent2"/>
-          </a:effectRef>
-          <a:fontRef idx="minor">
-            <a:schemeClr val="dk1"/>
-          </a:fontRef>
-        </p:style>
-        <p:txBody>
-          <a:bodyPr rtlCol="0" anchor="ctr"/>
-          <a:lstStyle/>
-          <a:p>
-            <a:r>
-              <a:rPr lang="en-US" dirty="0"/>
-              <a:t>Did greater workload </a:t>
-            </a:r>
-            <a:r>
-              <a:rPr lang="en-US" b="1" dirty="0"/>
-              <a:t>cause</a:t>
-            </a:r>
-            <a:r>
-              <a:rPr lang="en-US" dirty="0"/>
-              <a:t> poorer shooting?</a:t>
-            </a:r>
-          </a:p>
-        </p:txBody>
-      </p:sp>
-      <p:sp>
-        <p:nvSpPr>
-          <p:cNvPr id="7" name="Rectangle: Rounded Corners 6">
-            <a:extLst>
-              <a:ext uri="{FF2B5EF4-FFF2-40B4-BE49-F238E27FC236}">
-                <a16:creationId xmlns:a16="http://schemas.microsoft.com/office/drawing/2014/main" id="{DD35E15B-C06C-3BED-8074-D929866F1D3D}"/>
-              </a:ext>
-            </a:extLst>
-          </p:cNvPr>
-          <p:cNvSpPr/>
-          <p:nvPr/>
-        </p:nvSpPr>
-        <p:spPr>
-          <a:xfrm>
-            <a:off x="7025640" y="2475089"/>
-            <a:ext cx="3886200" cy="914400"/>
-          </a:xfrm>
-          <a:prstGeom prst="roundRect">
-            <a:avLst/>
-          </a:prstGeom>
-        </p:spPr>
-        <p:style>
-          <a:lnRef idx="1">
-            <a:schemeClr val="accent6"/>
-          </a:lnRef>
-          <a:fillRef idx="2">
-            <a:schemeClr val="accent6"/>
-          </a:fillRef>
-          <a:effectRef idx="1">
-            <a:schemeClr val="accent6"/>
-          </a:effectRef>
-          <a:fontRef idx="minor">
-            <a:schemeClr val="dk1"/>
-          </a:fontRef>
-        </p:style>
-        <p:txBody>
-          <a:bodyPr rtlCol="0" anchor="ctr"/>
-          <a:lstStyle/>
-          <a:p>
-            <a:pPr lvl="0"/>
-            <a:r>
-              <a:rPr lang="en-US" dirty="0"/>
-              <a:t>Was greater workload </a:t>
-            </a:r>
-            <a:r>
-              <a:rPr lang="en-US" b="1" dirty="0"/>
-              <a:t>associated with</a:t>
-            </a:r>
-            <a:r>
-              <a:rPr lang="en-US" dirty="0"/>
-              <a:t> poorer shooting?</a:t>
-            </a:r>
-          </a:p>
-        </p:txBody>
-      </p:sp>
-      <p:sp>
-        <p:nvSpPr>
-          <p:cNvPr id="9" name="Rectangle: Rounded Corners 8">
-            <a:extLst>
-              <a:ext uri="{FF2B5EF4-FFF2-40B4-BE49-F238E27FC236}">
-                <a16:creationId xmlns:a16="http://schemas.microsoft.com/office/drawing/2014/main" id="{6E3F528D-537A-E0B0-6E17-4554442C41D7}"/>
-              </a:ext>
-            </a:extLst>
-          </p:cNvPr>
-          <p:cNvSpPr/>
-          <p:nvPr/>
-        </p:nvSpPr>
-        <p:spPr>
-          <a:xfrm>
-            <a:off x="7025640" y="4014329"/>
-            <a:ext cx="3886200" cy="914400"/>
-          </a:xfrm>
-          <a:prstGeom prst="roundRect">
-            <a:avLst/>
-          </a:prstGeom>
-        </p:spPr>
-        <p:style>
-          <a:lnRef idx="1">
-            <a:schemeClr val="accent6"/>
-          </a:lnRef>
-          <a:fillRef idx="2">
-            <a:schemeClr val="accent6"/>
-          </a:fillRef>
-          <a:effectRef idx="1">
-            <a:schemeClr val="accent6"/>
-          </a:effectRef>
-          <a:fontRef idx="minor">
-            <a:schemeClr val="dk1"/>
-          </a:fontRef>
-        </p:style>
-        <p:txBody>
-          <a:bodyPr rtlCol="0" anchor="ctr"/>
-          <a:lstStyle/>
-          <a:p>
-            <a:pPr lvl="0"/>
-            <a:r>
-              <a:rPr lang="en-US" dirty="0"/>
-              <a:t>Did poorer shooting occur </a:t>
-            </a:r>
-            <a:r>
-              <a:rPr lang="en-US" b="1" dirty="0"/>
-              <a:t>after</a:t>
-            </a:r>
-            <a:r>
-              <a:rPr lang="en-US" dirty="0"/>
-              <a:t> periods of greater workload?</a:t>
-            </a:r>
-          </a:p>
-        </p:txBody>
-      </p:sp>
-      <p:sp>
-        <p:nvSpPr>
-          <p:cNvPr id="11" name="Rectangle: Rounded Corners 10">
-            <a:extLst>
-              <a:ext uri="{FF2B5EF4-FFF2-40B4-BE49-F238E27FC236}">
-                <a16:creationId xmlns:a16="http://schemas.microsoft.com/office/drawing/2014/main" id="{F45CBF18-896D-373A-62FC-37A7FB13F6E2}"/>
-              </a:ext>
-            </a:extLst>
-          </p:cNvPr>
-          <p:cNvSpPr/>
-          <p:nvPr/>
-        </p:nvSpPr>
-        <p:spPr>
-          <a:xfrm>
-            <a:off x="7025640" y="5426685"/>
-            <a:ext cx="3886200" cy="914400"/>
-          </a:xfrm>
-          <a:prstGeom prst="roundRect">
-            <a:avLst/>
-          </a:prstGeom>
-        </p:spPr>
-        <p:style>
-          <a:lnRef idx="1">
-            <a:schemeClr val="accent6"/>
-          </a:lnRef>
-          <a:fillRef idx="2">
-            <a:schemeClr val="accent6"/>
-          </a:fillRef>
-          <a:effectRef idx="1">
-            <a:schemeClr val="accent6"/>
-          </a:effectRef>
-          <a:fontRef idx="minor">
-            <a:schemeClr val="dk1"/>
-          </a:fontRef>
-        </p:style>
-        <p:txBody>
-          <a:bodyPr rtlCol="0" anchor="ctr"/>
-          <a:lstStyle/>
-          <a:p>
-            <a:pPr lvl="0"/>
-            <a:r>
-              <a:rPr lang="en-US" dirty="0"/>
-              <a:t>Do players with greater workload </a:t>
-            </a:r>
-            <a:r>
-              <a:rPr lang="en-US" b="1" dirty="0"/>
-              <a:t>tend to</a:t>
-            </a:r>
-            <a:r>
-              <a:rPr lang="en-US" dirty="0"/>
-              <a:t> shoot worse?</a:t>
-            </a:r>
-          </a:p>
-        </p:txBody>
-      </p:sp>
-      <p:sp>
-        <p:nvSpPr>
-          <p:cNvPr id="13" name="Arrow: Right 12">
-            <a:extLst>
-              <a:ext uri="{FF2B5EF4-FFF2-40B4-BE49-F238E27FC236}">
-                <a16:creationId xmlns:a16="http://schemas.microsoft.com/office/drawing/2014/main" id="{A39209B1-5695-EACE-CC19-D1ECA99D3403}"/>
-              </a:ext>
-            </a:extLst>
-          </p:cNvPr>
-          <p:cNvSpPr/>
-          <p:nvPr/>
-        </p:nvSpPr>
-        <p:spPr>
-          <a:xfrm rot="19698657">
-            <a:off x="4922521" y="3439276"/>
-            <a:ext cx="1722120" cy="410930"/>
-          </a:xfrm>
-          <a:prstGeom prst="rightArrow">
-            <a:avLst/>
-          </a:prstGeom>
-        </p:spPr>
-        <p:style>
-          <a:lnRef idx="1">
-            <a:schemeClr val="dk1"/>
-          </a:lnRef>
-          <a:fillRef idx="2">
-            <a:schemeClr val="dk1"/>
-          </a:fillRef>
-          <a:effectRef idx="1">
-            <a:schemeClr val="dk1"/>
-          </a:effectRef>
-          <a:fontRef idx="minor">
-            <a:schemeClr val="dk1"/>
-          </a:fontRef>
-        </p:style>
-        <p:txBody>
-          <a:bodyPr rtlCol="0" anchor="ctr"/>
-          <a:lstStyle/>
-          <a:p>
-            <a:pPr algn="ctr"/>
-            <a:endParaRPr lang="en-US"/>
-          </a:p>
-        </p:txBody>
-      </p:sp>
-      <p:sp>
-        <p:nvSpPr>
-          <p:cNvPr id="15" name="Arrow: Right 14">
-            <a:extLst>
-              <a:ext uri="{FF2B5EF4-FFF2-40B4-BE49-F238E27FC236}">
-                <a16:creationId xmlns:a16="http://schemas.microsoft.com/office/drawing/2014/main" id="{5D439A93-EA20-9FD7-812D-79CADF738495}"/>
-              </a:ext>
-            </a:extLst>
-          </p:cNvPr>
-          <p:cNvSpPr/>
-          <p:nvPr/>
-        </p:nvSpPr>
-        <p:spPr>
-          <a:xfrm rot="1575899">
-            <a:off x="4915880" y="5221220"/>
-            <a:ext cx="1722120" cy="410930"/>
-          </a:xfrm>
-          <a:prstGeom prst="rightArrow">
-            <a:avLst/>
-          </a:prstGeom>
-        </p:spPr>
-        <p:style>
-          <a:lnRef idx="1">
-            <a:schemeClr val="dk1"/>
-          </a:lnRef>
-          <a:fillRef idx="2">
-            <a:schemeClr val="dk1"/>
-          </a:fillRef>
-          <a:effectRef idx="1">
-            <a:schemeClr val="dk1"/>
-          </a:effectRef>
-          <a:fontRef idx="minor">
-            <a:schemeClr val="dk1"/>
-          </a:fontRef>
-        </p:style>
-        <p:txBody>
-          <a:bodyPr rtlCol="0" anchor="ctr"/>
-          <a:lstStyle/>
-          <a:p>
-            <a:pPr algn="ctr"/>
-            <a:endParaRPr lang="en-US"/>
-          </a:p>
-        </p:txBody>
-      </p:sp>
-      <p:sp>
-        <p:nvSpPr>
-          <p:cNvPr id="17" name="Arrow: Right 16">
-            <a:extLst>
-              <a:ext uri="{FF2B5EF4-FFF2-40B4-BE49-F238E27FC236}">
-                <a16:creationId xmlns:a16="http://schemas.microsoft.com/office/drawing/2014/main" id="{25FCCFEF-9E47-557B-6BA0-C86392F3931D}"/>
-              </a:ext>
-            </a:extLst>
-          </p:cNvPr>
-          <p:cNvSpPr/>
-          <p:nvPr/>
-        </p:nvSpPr>
-        <p:spPr>
-          <a:xfrm>
-            <a:off x="5090160" y="4284499"/>
-            <a:ext cx="1722120" cy="410930"/>
-          </a:xfrm>
-          <a:prstGeom prst="rightArrow">
-            <a:avLst/>
-          </a:prstGeom>
-        </p:spPr>
-        <p:style>
-          <a:lnRef idx="1">
-            <a:schemeClr val="dk1"/>
-          </a:lnRef>
-          <a:fillRef idx="2">
-            <a:schemeClr val="dk1"/>
-          </a:fillRef>
-          <a:effectRef idx="1">
-            <a:schemeClr val="dk1"/>
-          </a:effectRef>
-          <a:fontRef idx="minor">
-            <a:schemeClr val="dk1"/>
-          </a:fontRef>
-        </p:style>
-        <p:txBody>
-          <a:bodyPr rtlCol="0" anchor="ctr"/>
-          <a:lstStyle/>
-          <a:p>
-            <a:pPr algn="ctr"/>
-            <a:endParaRPr lang="en-US"/>
+        <p:txBody>
+          <a:bodyPr wrap="square">
+            <a:spAutoFit/>
+          </a:bodyPr>
+          <a:lstStyle/>
+          <a:p>
+            <a:r>
+              <a:rPr lang="en-US" sz="2100" i="0" dirty="0">
+                <a:solidFill>
+                  <a:srgbClr val="841617"/>
+                </a:solidFill>
+                <a:effectLst/>
+                <a:latin typeface="Fira Sans" panose="020B0503050000020004" pitchFamily="34" charset="0"/>
+              </a:rPr>
+              <a:t>The same concern can lead to different questions because the decisions are different.</a:t>
+            </a:r>
+            <a:endParaRPr lang="en-US" dirty="0"/>
           </a:p>
         </p:txBody>
       </p:sp>
     </p:spTree>
     <p:extLst>
       <p:ext uri="{BB962C8B-B14F-4D97-AF65-F5344CB8AC3E}">
-        <p14:creationId xmlns:p14="http://schemas.microsoft.com/office/powerpoint/2010/main" val="2742973380"/>
+        <p14:creationId xmlns:p14="http://schemas.microsoft.com/office/powerpoint/2010/main" val="24542910"/>
       </p:ext>
     </p:extLst>
   </p:cSld>
@@ -6307,7 +5697,7 @@
           <p:cNvPr id="2" name="Title 1">
             <a:extLst>
               <a:ext uri="{FF2B5EF4-FFF2-40B4-BE49-F238E27FC236}">
-                <a16:creationId xmlns:a16="http://schemas.microsoft.com/office/drawing/2014/main" id="{6BD759E2-1C1A-7CE5-CB2C-221AD9773C76}"/>
+                <a16:creationId xmlns:a16="http://schemas.microsoft.com/office/drawing/2014/main" id="{4D05AEA7-0403-0FF7-91A1-54F5E0B80A94}"/>
               </a:ext>
             </a:extLst>
           </p:cNvPr>
@@ -6321,13 +5711,21 @@
         <p:spPr/>
         <p:txBody>
           <a:bodyPr>
-            <a:normAutofit/>
+            <a:normAutofit fontScale="90000"/>
           </a:bodyPr>
           <a:lstStyle/>
           <a:p>
             <a:r>
               <a:rPr lang="en-US" dirty="0"/>
-              <a:t>Activity: Diagnose the Question</a:t>
+              <a:t>Define the </a:t>
+            </a:r>
+            <a:r>
+              <a:rPr lang="en-US" b="1" dirty="0"/>
+              <a:t>Outcome</a:t>
+            </a:r>
+            <a:r>
+              <a:rPr lang="en-US" dirty="0"/>
+              <a:t> Before Choosing the Metric</a:t>
             </a:r>
           </a:p>
         </p:txBody>
@@ -6337,7 +5735,7 @@
           <p:cNvPr id="3" name="Content Placeholder 2">
             <a:extLst>
               <a:ext uri="{FF2B5EF4-FFF2-40B4-BE49-F238E27FC236}">
-                <a16:creationId xmlns:a16="http://schemas.microsoft.com/office/drawing/2014/main" id="{3DE7B0D1-46A1-5634-D6AD-7D3096FA9020}"/>
+                <a16:creationId xmlns:a16="http://schemas.microsoft.com/office/drawing/2014/main" id="{4F6B34BB-FE70-8861-5C13-19E254D4CD80}"/>
               </a:ext>
             </a:extLst>
           </p:cNvPr>
@@ -6353,16 +5751,58 @@
           <a:bodyPr/>
           <a:lstStyle/>
           <a:p>
-            <a:pPr marL="0" indent="0" algn="ctr">
+            <a:pPr marL="0" indent="0">
               <a:buNone/>
             </a:pPr>
             <a:r>
               <a:rPr lang="en-US" dirty="0"/>
-              <a:t>“Does time spent training affect performance?”</a:t>
-            </a:r>
-          </a:p>
-          <a:p>
-            <a:pPr marL="0" indent="0" algn="ctr">
+              <a:t>How do we want to measure how “tired” an athlete is? </a:t>
+            </a:r>
+          </a:p>
+          <a:p>
+            <a:r>
+              <a:rPr lang="en-US" dirty="0"/>
+              <a:t>“tired” could refer to </a:t>
+            </a:r>
+            <a:r>
+              <a:rPr lang="en-US" i="1" dirty="0"/>
+              <a:t>fatigue</a:t>
+            </a:r>
+            <a:r>
+              <a:rPr lang="en-US" dirty="0"/>
+              <a:t>, which could mean:</a:t>
+            </a:r>
+          </a:p>
+          <a:p>
+            <a:pPr lvl="1"/>
+            <a:r>
+              <a:rPr lang="en-US" dirty="0"/>
+              <a:t>Reduced physical performance</a:t>
+            </a:r>
+          </a:p>
+          <a:p>
+            <a:pPr lvl="1"/>
+            <a:r>
+              <a:rPr lang="en-US" dirty="0"/>
+              <a:t>Increased perceived effort</a:t>
+            </a:r>
+          </a:p>
+          <a:p>
+            <a:pPr lvl="1"/>
+            <a:r>
+              <a:rPr lang="en-US" dirty="0"/>
+              <a:t>Muscle soreness</a:t>
+            </a:r>
+          </a:p>
+          <a:p>
+            <a:pPr lvl="1"/>
+            <a:r>
+              <a:rPr lang="en-US" dirty="0"/>
+              <a:t>Lower motivation or alertness</a:t>
+            </a:r>
+          </a:p>
+          <a:p>
+            <a:pPr marL="0" indent="0">
               <a:buNone/>
             </a:pPr>
             <a:endParaRPr lang="en-US" dirty="0"/>
@@ -6373,57 +5813,7 @@
             </a:pPr>
             <a:r>
               <a:rPr lang="en-US" dirty="0"/>
-              <a:t>With your group, identify what is missing or ambiguous:</a:t>
-            </a:r>
-          </a:p>
-          <a:p>
-            <a:pPr lvl="1"/>
-            <a:r>
-              <a:rPr lang="en-US" dirty="0"/>
-              <a:t>What decision or purpose?</a:t>
-            </a:r>
-          </a:p>
-          <a:p>
-            <a:pPr lvl="1"/>
-            <a:r>
-              <a:rPr lang="en-US" dirty="0"/>
-              <a:t>What outcome?</a:t>
-            </a:r>
-          </a:p>
-          <a:p>
-            <a:pPr lvl="1"/>
-            <a:r>
-              <a:rPr lang="en-US" dirty="0"/>
-              <a:t>What comparison?</a:t>
-            </a:r>
-          </a:p>
-          <a:p>
-            <a:pPr lvl="1"/>
-            <a:r>
-              <a:rPr lang="en-US" dirty="0"/>
-              <a:t>Which athletes and timeframe?</a:t>
-            </a:r>
-          </a:p>
-          <a:p>
-            <a:pPr lvl="1"/>
-            <a:r>
-              <a:rPr lang="en-US" dirty="0"/>
-              <a:t>What does “affect” claim?</a:t>
-            </a:r>
-          </a:p>
-          <a:p>
-            <a:pPr marL="0" indent="0">
-              <a:buNone/>
-            </a:pPr>
-            <a:endParaRPr lang="en-US" dirty="0"/>
-          </a:p>
-          <a:p>
-            <a:pPr marL="0" indent="0">
-              <a:buNone/>
-            </a:pPr>
-            <a:r>
-              <a:rPr lang="en-US" dirty="0"/>
-              <a:t>Then rewrite the question.</a:t>
+              <a:t>A metric represents one part of a concept; it is not automatically the concept itself.</a:t>
             </a:r>
           </a:p>
           <a:p>
@@ -6434,7 +5824,7 @@
     </p:spTree>
     <p:extLst>
       <p:ext uri="{BB962C8B-B14F-4D97-AF65-F5344CB8AC3E}">
-        <p14:creationId xmlns:p14="http://schemas.microsoft.com/office/powerpoint/2010/main" val="3989916987"/>
+        <p14:creationId xmlns:p14="http://schemas.microsoft.com/office/powerpoint/2010/main" val="3389484207"/>
       </p:ext>
     </p:extLst>
   </p:cSld>
@@ -6466,7 +5856,7 @@
           <p:cNvPr id="2" name="Title 1">
             <a:extLst>
               <a:ext uri="{FF2B5EF4-FFF2-40B4-BE49-F238E27FC236}">
-                <a16:creationId xmlns:a16="http://schemas.microsoft.com/office/drawing/2014/main" id="{02688DA3-B815-721E-25F1-04BC40E26E65}"/>
+                <a16:creationId xmlns:a16="http://schemas.microsoft.com/office/drawing/2014/main" id="{101646C3-AF44-3C6D-1692-3FAFEF5BE3B4}"/>
               </a:ext>
             </a:extLst>
           </p:cNvPr>
@@ -6479,12 +5869,18 @@
         </p:nvSpPr>
         <p:spPr/>
         <p:txBody>
-          <a:bodyPr/>
-          <a:lstStyle/>
-          <a:p>
-            <a:r>
-              <a:rPr lang="en-US" dirty="0"/>
-              <a:t>EXAMPLE solution</a:t>
+          <a:bodyPr>
+            <a:normAutofit/>
+          </a:bodyPr>
+          <a:lstStyle/>
+          <a:p>
+            <a:r>
+              <a:rPr lang="en-US" b="1" dirty="0"/>
+              <a:t>Comparisons</a:t>
+            </a:r>
+            <a:r>
+              <a:rPr lang="en-US" dirty="0"/>
+              <a:t> Give Numbers Meaning</a:t>
             </a:r>
           </a:p>
         </p:txBody>
@@ -6494,7 +5890,7 @@
           <p:cNvPr id="3" name="Content Placeholder 2">
             <a:extLst>
               <a:ext uri="{FF2B5EF4-FFF2-40B4-BE49-F238E27FC236}">
-                <a16:creationId xmlns:a16="http://schemas.microsoft.com/office/drawing/2014/main" id="{75544C5A-C549-20B6-95D0-05FBC22BCC0D}"/>
+                <a16:creationId xmlns:a16="http://schemas.microsoft.com/office/drawing/2014/main" id="{DCDBF179-4A40-A093-5620-24AEA1086655}"/>
               </a:ext>
             </a:extLst>
           </p:cNvPr>
@@ -6507,87 +5903,110 @@
         </p:nvSpPr>
         <p:spPr/>
         <p:txBody>
-          <a:bodyPr>
-            <a:normAutofit lnSpcReduction="10000"/>
+          <a:bodyPr/>
+          <a:lstStyle/>
+          <a:p>
+            <a:pPr marL="0" indent="0" algn="ctr">
+              <a:buNone/>
+            </a:pPr>
+            <a:r>
+              <a:rPr lang="en-US" dirty="0"/>
+              <a:t>“Did the athlete complete a high workload?”</a:t>
+            </a:r>
+          </a:p>
+          <a:p>
+            <a:pPr marL="0" indent="0">
+              <a:buNone/>
+            </a:pPr>
+            <a:endParaRPr lang="en-US" dirty="0"/>
+          </a:p>
+          <a:p>
+            <a:pPr marL="0" indent="0">
+              <a:buNone/>
+            </a:pPr>
+            <a:r>
+              <a:rPr lang="en-US" dirty="0"/>
+              <a:t>High compared with:</a:t>
+            </a:r>
+          </a:p>
+          <a:p>
+            <a:pPr lvl="1"/>
+            <a:r>
+              <a:rPr lang="en-US" dirty="0"/>
+              <a:t>The athlete's usual workload?</a:t>
+            </a:r>
+          </a:p>
+          <a:p>
+            <a:pPr lvl="1"/>
+            <a:r>
+              <a:rPr lang="en-US" dirty="0"/>
+              <a:t>The planned workload?</a:t>
+            </a:r>
+          </a:p>
+          <a:p>
+            <a:pPr lvl="1"/>
+            <a:r>
+              <a:rPr lang="en-US" dirty="0"/>
+              <a:t>Teammates at the same position?</a:t>
+            </a:r>
+          </a:p>
+          <a:p>
+            <a:pPr lvl="1"/>
+            <a:r>
+              <a:rPr lang="en-US" dirty="0"/>
+              <a:t>Competition demands?</a:t>
+            </a:r>
+          </a:p>
+          <a:p>
+            <a:pPr lvl="1"/>
+            <a:r>
+              <a:rPr lang="en-US" dirty="0"/>
+              <a:t>A threshold associated with a particular goal?</a:t>
+            </a:r>
+          </a:p>
+          <a:p>
+            <a:endParaRPr lang="en-US" dirty="0"/>
+          </a:p>
+        </p:txBody>
+      </p:sp>
+      <p:sp>
+        <p:nvSpPr>
+          <p:cNvPr id="5" name="TextBox 4">
+            <a:extLst>
+              <a:ext uri="{FF2B5EF4-FFF2-40B4-BE49-F238E27FC236}">
+                <a16:creationId xmlns:a16="http://schemas.microsoft.com/office/drawing/2014/main" id="{045F6952-0339-ADBA-CB7B-070B43D34BA1}"/>
+              </a:ext>
+            </a:extLst>
+          </p:cNvPr>
+          <p:cNvSpPr txBox="1"/>
+          <p:nvPr/>
+        </p:nvSpPr>
+        <p:spPr>
+          <a:xfrm>
+            <a:off x="838200" y="5574268"/>
+            <a:ext cx="10835640" cy="415498"/>
+          </a:xfrm>
+          <a:prstGeom prst="rect">
+            <a:avLst/>
+          </a:prstGeom>
+          <a:noFill/>
+        </p:spPr>
+        <p:txBody>
+          <a:bodyPr wrap="square">
+            <a:spAutoFit/>
           </a:bodyPr>
           <a:lstStyle/>
           <a:p>
-            <a:pPr marL="0" indent="0">
-              <a:buNone/>
-            </a:pPr>
-            <a:r>
-              <a:rPr lang="en-US" dirty="0"/>
-              <a:t>Decision</a:t>
-            </a:r>
-          </a:p>
-          <a:p>
-            <a:r>
-              <a:rPr lang="en-US" dirty="0"/>
-              <a:t>Should the coaching staff modify practice volume before games?</a:t>
-            </a:r>
-          </a:p>
-          <a:p>
-            <a:pPr marL="0" indent="0">
-              <a:buNone/>
-            </a:pPr>
-            <a:r>
-              <a:rPr lang="en-US" dirty="0"/>
-              <a:t>Question</a:t>
-            </a:r>
-          </a:p>
-          <a:p>
-            <a:r>
-              <a:rPr lang="en-US" dirty="0"/>
-              <a:t>“Among players who appear in at least 15 minutes, is </a:t>
-            </a:r>
-            <a:r>
-              <a:rPr lang="en-US" dirty="0" err="1"/>
-              <a:t>PlayerLoad</a:t>
-            </a:r>
-            <a:r>
-              <a:rPr lang="en-US" dirty="0"/>
-              <a:t> accumulated during the two days before a game associated with fourth-quarter shooting efficiency?”</a:t>
-            </a:r>
-          </a:p>
-          <a:p>
-            <a:pPr marL="0" indent="0">
-              <a:buNone/>
-            </a:pPr>
-            <a:r>
-              <a:rPr lang="en-US" dirty="0"/>
-              <a:t>Still open for refinement</a:t>
-            </a:r>
-          </a:p>
-          <a:p>
-            <a:pPr lvl="0"/>
-            <a:r>
-              <a:rPr lang="en-US" dirty="0"/>
-              <a:t>Is </a:t>
-            </a:r>
-            <a:r>
-              <a:rPr lang="en-US" dirty="0" err="1"/>
-              <a:t>PlayerLoad</a:t>
-            </a:r>
-            <a:r>
-              <a:rPr lang="en-US" dirty="0"/>
-              <a:t> the most relevant measure?</a:t>
-            </a:r>
-          </a:p>
-          <a:p>
-            <a:pPr lvl="0"/>
-            <a:r>
-              <a:rPr lang="en-US" dirty="0"/>
-              <a:t>Is shooting efficiency the right outcome?</a:t>
-            </a:r>
-          </a:p>
-          <a:p>
-            <a:pPr lvl="0"/>
-            <a:r>
-              <a:rPr lang="en-US" dirty="0"/>
-              <a:t>What other context might explain the relationship?</a:t>
-            </a:r>
-          </a:p>
-          <a:p>
+            <a:r>
+              <a:rPr lang="en-US" sz="2100" b="1" i="0" dirty="0">
+                <a:solidFill>
+                  <a:srgbClr val="841617"/>
+                </a:solidFill>
+                <a:effectLst/>
+                <a:latin typeface="Fira Sans" panose="020B0503050000020004" pitchFamily="34" charset="0"/>
+              </a:rPr>
+              <a:t>Without a reference point, “high,” “low,” “good,” and “poor” are usually empty labels.</a:t>
+            </a:r>
             <a:endParaRPr lang="en-US" dirty="0"/>
           </a:p>
         </p:txBody>
@@ -6595,7 +6014,7 @@
     </p:spTree>
     <p:extLst>
       <p:ext uri="{BB962C8B-B14F-4D97-AF65-F5344CB8AC3E}">
-        <p14:creationId xmlns:p14="http://schemas.microsoft.com/office/powerpoint/2010/main" val="4232202602"/>
+        <p14:creationId xmlns:p14="http://schemas.microsoft.com/office/powerpoint/2010/main" val="2299613256"/>
       </p:ext>
     </p:extLst>
   </p:cSld>
@@ -6606,6 +6025,2240 @@
 </file>
 
 <file path=ppt/slides/slide14.xml><?xml version="1.0" encoding="utf-8"?>
+<p:sld xmlns:a="http://schemas.openxmlformats.org/drawingml/2006/main" xmlns:r="http://schemas.openxmlformats.org/officeDocument/2006/relationships" xmlns:p="http://schemas.openxmlformats.org/presentationml/2006/main">
+  <p:cSld>
+    <p:spTree>
+      <p:nvGrpSpPr>
+        <p:cNvPr id="1" name=""/>
+        <p:cNvGrpSpPr/>
+        <p:nvPr/>
+      </p:nvGrpSpPr>
+      <p:grpSpPr>
+        <a:xfrm>
+          <a:off x="0" y="0"/>
+          <a:ext cx="0" cy="0"/>
+          <a:chOff x="0" y="0"/>
+          <a:chExt cx="0" cy="0"/>
+        </a:xfrm>
+      </p:grpSpPr>
+      <p:sp>
+        <p:nvSpPr>
+          <p:cNvPr id="2" name="Title 1">
+            <a:extLst>
+              <a:ext uri="{FF2B5EF4-FFF2-40B4-BE49-F238E27FC236}">
+                <a16:creationId xmlns:a16="http://schemas.microsoft.com/office/drawing/2014/main" id="{DFE34839-DE9B-1266-7846-B6B88AAA034A}"/>
+              </a:ext>
+            </a:extLst>
+          </p:cNvPr>
+          <p:cNvSpPr>
+            <a:spLocks noGrp="1"/>
+          </p:cNvSpPr>
+          <p:nvPr>
+            <p:ph type="title"/>
+          </p:nvPr>
+        </p:nvSpPr>
+        <p:spPr/>
+        <p:txBody>
+          <a:bodyPr>
+            <a:normAutofit fontScale="90000"/>
+          </a:bodyPr>
+          <a:lstStyle/>
+          <a:p>
+            <a:r>
+              <a:rPr lang="en-US" b="1" dirty="0"/>
+              <a:t>Context</a:t>
+            </a:r>
+            <a:r>
+              <a:rPr lang="en-US" dirty="0"/>
+              <a:t> Determines What the Comparison Means</a:t>
+            </a:r>
+          </a:p>
+        </p:txBody>
+      </p:sp>
+      <p:sp>
+        <p:nvSpPr>
+          <p:cNvPr id="3" name="Content Placeholder 2">
+            <a:extLst>
+              <a:ext uri="{FF2B5EF4-FFF2-40B4-BE49-F238E27FC236}">
+                <a16:creationId xmlns:a16="http://schemas.microsoft.com/office/drawing/2014/main" id="{4CA6E9D4-BF0E-C498-64FA-DDD94CEC2325}"/>
+              </a:ext>
+            </a:extLst>
+          </p:cNvPr>
+          <p:cNvSpPr>
+            <a:spLocks noGrp="1"/>
+          </p:cNvSpPr>
+          <p:nvPr>
+            <p:ph idx="1"/>
+          </p:nvPr>
+        </p:nvSpPr>
+        <p:spPr/>
+        <p:txBody>
+          <a:bodyPr>
+            <a:normAutofit/>
+          </a:bodyPr>
+          <a:lstStyle/>
+          <a:p>
+            <a:pPr marL="0" indent="0">
+              <a:buNone/>
+            </a:pPr>
+            <a:r>
+              <a:rPr lang="en-US" dirty="0"/>
+              <a:t>The same performance value may mean something different depending on:</a:t>
+            </a:r>
+          </a:p>
+          <a:p>
+            <a:pPr lvl="1"/>
+            <a:r>
+              <a:rPr lang="en-US" dirty="0"/>
+              <a:t>Position or role</a:t>
+            </a:r>
+          </a:p>
+          <a:p>
+            <a:pPr lvl="1"/>
+            <a:r>
+              <a:rPr lang="en-US" dirty="0"/>
+              <a:t>Opponent quality</a:t>
+            </a:r>
+          </a:p>
+          <a:p>
+            <a:pPr lvl="1"/>
+            <a:r>
+              <a:rPr lang="en-US" dirty="0"/>
+              <a:t>Game state</a:t>
+            </a:r>
+          </a:p>
+          <a:p>
+            <a:pPr lvl="1"/>
+            <a:r>
+              <a:rPr lang="en-US" dirty="0"/>
+              <a:t>Training phase</a:t>
+            </a:r>
+          </a:p>
+          <a:p>
+            <a:pPr lvl="1"/>
+            <a:r>
+              <a:rPr lang="en-US" dirty="0"/>
+              <a:t>Injury or return-to-play status</a:t>
+            </a:r>
+          </a:p>
+          <a:p>
+            <a:pPr lvl="1"/>
+            <a:r>
+              <a:rPr lang="en-US" dirty="0"/>
+              <a:t>Age and competition level</a:t>
+            </a:r>
+          </a:p>
+          <a:p>
+            <a:pPr marL="0" indent="0">
+              <a:buNone/>
+            </a:pPr>
+            <a:r>
+              <a:rPr lang="en-US" dirty="0"/>
+              <a:t>Useful questions define </a:t>
+            </a:r>
+            <a:r>
+              <a:rPr lang="en-US" u="sng" dirty="0"/>
+              <a:t>just enough</a:t>
+            </a:r>
+            <a:r>
+              <a:rPr lang="en-US" dirty="0"/>
+              <a:t> context to make the answer interpretable.</a:t>
+            </a:r>
+          </a:p>
+        </p:txBody>
+      </p:sp>
+    </p:spTree>
+    <p:extLst>
+      <p:ext uri="{BB962C8B-B14F-4D97-AF65-F5344CB8AC3E}">
+        <p14:creationId xmlns:p14="http://schemas.microsoft.com/office/powerpoint/2010/main" val="3385852351"/>
+      </p:ext>
+    </p:extLst>
+  </p:cSld>
+  <p:clrMapOvr>
+    <a:masterClrMapping/>
+  </p:clrMapOvr>
+</p:sld>
+</file>
+
+<file path=ppt/slides/slide15.xml><?xml version="1.0" encoding="utf-8"?>
+<p:sld xmlns:a="http://schemas.openxmlformats.org/drawingml/2006/main" xmlns:r="http://schemas.openxmlformats.org/officeDocument/2006/relationships" xmlns:p="http://schemas.openxmlformats.org/presentationml/2006/main">
+  <p:cSld>
+    <p:spTree>
+      <p:nvGrpSpPr>
+        <p:cNvPr id="1" name=""/>
+        <p:cNvGrpSpPr/>
+        <p:nvPr/>
+      </p:nvGrpSpPr>
+      <p:grpSpPr>
+        <a:xfrm>
+          <a:off x="0" y="0"/>
+          <a:ext cx="0" cy="0"/>
+          <a:chOff x="0" y="0"/>
+          <a:chExt cx="0" cy="0"/>
+        </a:xfrm>
+      </p:grpSpPr>
+      <p:sp>
+        <p:nvSpPr>
+          <p:cNvPr id="2" name="Title 1">
+            <a:extLst>
+              <a:ext uri="{FF2B5EF4-FFF2-40B4-BE49-F238E27FC236}">
+                <a16:creationId xmlns:a16="http://schemas.microsoft.com/office/drawing/2014/main" id="{ABF7BC53-667C-6DE7-3C82-9D521CC74AD4}"/>
+              </a:ext>
+            </a:extLst>
+          </p:cNvPr>
+          <p:cNvSpPr>
+            <a:spLocks noGrp="1"/>
+          </p:cNvSpPr>
+          <p:nvPr>
+            <p:ph type="title"/>
+          </p:nvPr>
+        </p:nvSpPr>
+        <p:spPr/>
+        <p:txBody>
+          <a:bodyPr/>
+          <a:lstStyle/>
+          <a:p>
+            <a:r>
+              <a:rPr lang="en-US" dirty="0"/>
+              <a:t>From Concern to Question</a:t>
+            </a:r>
+          </a:p>
+        </p:txBody>
+      </p:sp>
+      <p:sp>
+        <p:nvSpPr>
+          <p:cNvPr id="3" name="Content Placeholder 2">
+            <a:extLst>
+              <a:ext uri="{FF2B5EF4-FFF2-40B4-BE49-F238E27FC236}">
+                <a16:creationId xmlns:a16="http://schemas.microsoft.com/office/drawing/2014/main" id="{5F1EB17A-3D99-67B8-4BB6-BED4E2F941B6}"/>
+              </a:ext>
+            </a:extLst>
+          </p:cNvPr>
+          <p:cNvSpPr>
+            <a:spLocks noGrp="1"/>
+          </p:cNvSpPr>
+          <p:nvPr>
+            <p:ph idx="1"/>
+          </p:nvPr>
+        </p:nvSpPr>
+        <p:spPr/>
+        <p:txBody>
+          <a:bodyPr>
+            <a:normAutofit/>
+          </a:bodyPr>
+          <a:lstStyle/>
+          <a:p>
+            <a:pPr marL="0" indent="0">
+              <a:buNone/>
+            </a:pPr>
+            <a:endParaRPr lang="en-US" dirty="0"/>
+          </a:p>
+          <a:p>
+            <a:pPr marL="0" indent="0">
+              <a:buNone/>
+            </a:pPr>
+            <a:endParaRPr lang="en-US" dirty="0"/>
+          </a:p>
+          <a:p>
+            <a:pPr marL="0" indent="0">
+              <a:buNone/>
+            </a:pPr>
+            <a:endParaRPr lang="en-US" dirty="0"/>
+          </a:p>
+          <a:p>
+            <a:pPr marL="0" indent="0">
+              <a:buNone/>
+            </a:pPr>
+            <a:endParaRPr lang="en-US" dirty="0"/>
+          </a:p>
+          <a:p>
+            <a:pPr marL="0" indent="0">
+              <a:buNone/>
+            </a:pPr>
+            <a:endParaRPr lang="en-US" dirty="0"/>
+          </a:p>
+          <a:p>
+            <a:pPr marL="0" indent="0">
+              <a:buNone/>
+            </a:pPr>
+            <a:r>
+              <a:rPr lang="en-US" dirty="0"/>
+              <a:t>This revision defines:</a:t>
+            </a:r>
+          </a:p>
+          <a:p>
+            <a:pPr lvl="1"/>
+            <a:r>
+              <a:rPr lang="en-US" dirty="0"/>
+              <a:t>Outcome = scoring efficiency</a:t>
+            </a:r>
+          </a:p>
+          <a:p>
+            <a:pPr lvl="1"/>
+            <a:r>
+              <a:rPr lang="en-US" dirty="0"/>
+              <a:t>Comparison = fourth quarter versus earlier quarters</a:t>
+            </a:r>
+          </a:p>
+          <a:p>
+            <a:pPr lvl="1"/>
+            <a:r>
+              <a:rPr lang="en-US" dirty="0"/>
+              <a:t>Context = conference games</a:t>
+            </a:r>
+          </a:p>
+        </p:txBody>
+      </p:sp>
+      <p:sp>
+        <p:nvSpPr>
+          <p:cNvPr id="4" name="Thought Bubble: Cloud 3">
+            <a:extLst>
+              <a:ext uri="{FF2B5EF4-FFF2-40B4-BE49-F238E27FC236}">
+                <a16:creationId xmlns:a16="http://schemas.microsoft.com/office/drawing/2014/main" id="{F92C28F5-A378-9EE0-050F-A1A4731C3553}"/>
+              </a:ext>
+            </a:extLst>
+          </p:cNvPr>
+          <p:cNvSpPr/>
+          <p:nvPr/>
+        </p:nvSpPr>
+        <p:spPr>
+          <a:xfrm>
+            <a:off x="441960" y="1819457"/>
+            <a:ext cx="4023360" cy="1356361"/>
+          </a:xfrm>
+          <a:prstGeom prst="cloudCallout">
+            <a:avLst>
+              <a:gd name="adj1" fmla="val -46212"/>
+              <a:gd name="adj2" fmla="val 46770"/>
+            </a:avLst>
+          </a:prstGeom>
+        </p:spPr>
+        <p:style>
+          <a:lnRef idx="1">
+            <a:schemeClr val="accent1"/>
+          </a:lnRef>
+          <a:fillRef idx="2">
+            <a:schemeClr val="accent1"/>
+          </a:fillRef>
+          <a:effectRef idx="1">
+            <a:schemeClr val="accent1"/>
+          </a:effectRef>
+          <a:fontRef idx="minor">
+            <a:schemeClr val="dk1"/>
+          </a:fontRef>
+        </p:style>
+        <p:txBody>
+          <a:bodyPr rtlCol="0" anchor="ctr"/>
+          <a:lstStyle/>
+          <a:p>
+            <a:pPr algn="ctr"/>
+            <a:r>
+              <a:rPr lang="en-US" dirty="0"/>
+              <a:t>“Our team fades late in games.”</a:t>
+            </a:r>
+          </a:p>
+        </p:txBody>
+      </p:sp>
+      <p:sp>
+        <p:nvSpPr>
+          <p:cNvPr id="5" name="Oval 4">
+            <a:extLst>
+              <a:ext uri="{FF2B5EF4-FFF2-40B4-BE49-F238E27FC236}">
+                <a16:creationId xmlns:a16="http://schemas.microsoft.com/office/drawing/2014/main" id="{2C0324FF-737E-AC90-87B9-4D767153D842}"/>
+              </a:ext>
+            </a:extLst>
+          </p:cNvPr>
+          <p:cNvSpPr/>
+          <p:nvPr/>
+        </p:nvSpPr>
+        <p:spPr>
+          <a:xfrm>
+            <a:off x="5715002" y="1277817"/>
+            <a:ext cx="4998718" cy="2151184"/>
+          </a:xfrm>
+          <a:prstGeom prst="ellipse">
+            <a:avLst/>
+          </a:prstGeom>
+        </p:spPr>
+        <p:style>
+          <a:lnRef idx="2">
+            <a:schemeClr val="accent1"/>
+          </a:lnRef>
+          <a:fillRef idx="1">
+            <a:schemeClr val="lt1"/>
+          </a:fillRef>
+          <a:effectRef idx="0">
+            <a:schemeClr val="accent1"/>
+          </a:effectRef>
+          <a:fontRef idx="minor">
+            <a:schemeClr val="dk1"/>
+          </a:fontRef>
+        </p:style>
+        <p:txBody>
+          <a:bodyPr rtlCol="0" anchor="ctr"/>
+          <a:lstStyle/>
+          <a:p>
+            <a:pPr algn="ctr"/>
+            <a:r>
+              <a:rPr lang="en-US" dirty="0"/>
+              <a:t>During conference games this season, did our team's scoring efficiency decline in the fourth quarter compared with the first three quarters?</a:t>
+            </a:r>
+          </a:p>
+        </p:txBody>
+      </p:sp>
+      <p:sp>
+        <p:nvSpPr>
+          <p:cNvPr id="6" name="Arrow: Right 5">
+            <a:extLst>
+              <a:ext uri="{FF2B5EF4-FFF2-40B4-BE49-F238E27FC236}">
+                <a16:creationId xmlns:a16="http://schemas.microsoft.com/office/drawing/2014/main" id="{95CF244B-ED44-7D25-C303-99AFA9A11AA6}"/>
+              </a:ext>
+            </a:extLst>
+          </p:cNvPr>
+          <p:cNvSpPr/>
+          <p:nvPr/>
+        </p:nvSpPr>
+        <p:spPr>
+          <a:xfrm>
+            <a:off x="4600957" y="2255321"/>
+            <a:ext cx="978408" cy="484632"/>
+          </a:xfrm>
+          <a:prstGeom prst="rightArrow">
+            <a:avLst/>
+          </a:prstGeom>
+        </p:spPr>
+        <p:style>
+          <a:lnRef idx="2">
+            <a:schemeClr val="accent1">
+              <a:shade val="15000"/>
+            </a:schemeClr>
+          </a:lnRef>
+          <a:fillRef idx="1">
+            <a:schemeClr val="accent1"/>
+          </a:fillRef>
+          <a:effectRef idx="0">
+            <a:schemeClr val="accent1"/>
+          </a:effectRef>
+          <a:fontRef idx="minor">
+            <a:schemeClr val="lt1"/>
+          </a:fontRef>
+        </p:style>
+        <p:txBody>
+          <a:bodyPr rtlCol="0" anchor="ctr"/>
+          <a:lstStyle/>
+          <a:p>
+            <a:pPr algn="ctr"/>
+            <a:endParaRPr lang="en-US"/>
+          </a:p>
+        </p:txBody>
+      </p:sp>
+      <p:sp>
+        <p:nvSpPr>
+          <p:cNvPr id="7" name="Speech Bubble: Oval 6">
+            <a:extLst>
+              <a:ext uri="{FF2B5EF4-FFF2-40B4-BE49-F238E27FC236}">
+                <a16:creationId xmlns:a16="http://schemas.microsoft.com/office/drawing/2014/main" id="{1C754BFF-6052-9A8F-D252-D338DCB41697}"/>
+              </a:ext>
+            </a:extLst>
+          </p:cNvPr>
+          <p:cNvSpPr/>
+          <p:nvPr/>
+        </p:nvSpPr>
+        <p:spPr>
+          <a:xfrm>
+            <a:off x="9433560" y="3593122"/>
+            <a:ext cx="2606040" cy="1375118"/>
+          </a:xfrm>
+          <a:prstGeom prst="wedgeEllipseCallout">
+            <a:avLst>
+              <a:gd name="adj1" fmla="val -44210"/>
+              <a:gd name="adj2" fmla="val -58301"/>
+            </a:avLst>
+          </a:prstGeom>
+        </p:spPr>
+        <p:style>
+          <a:lnRef idx="2">
+            <a:schemeClr val="accent1"/>
+          </a:lnRef>
+          <a:fillRef idx="1">
+            <a:schemeClr val="lt1"/>
+          </a:fillRef>
+          <a:effectRef idx="0">
+            <a:schemeClr val="accent1"/>
+          </a:effectRef>
+          <a:fontRef idx="minor">
+            <a:schemeClr val="dk1"/>
+          </a:fontRef>
+        </p:style>
+        <p:txBody>
+          <a:bodyPr rtlCol="0" anchor="ctr"/>
+          <a:lstStyle/>
+          <a:p>
+            <a:pPr algn="ctr"/>
+            <a:r>
+              <a:rPr lang="en-US" dirty="0"/>
+              <a:t>and is the pattern different in close games?</a:t>
+            </a:r>
+          </a:p>
+        </p:txBody>
+      </p:sp>
+      <p:sp>
+        <p:nvSpPr>
+          <p:cNvPr id="9" name="TextBox 8">
+            <a:extLst>
+              <a:ext uri="{FF2B5EF4-FFF2-40B4-BE49-F238E27FC236}">
+                <a16:creationId xmlns:a16="http://schemas.microsoft.com/office/drawing/2014/main" id="{BEFD210B-0F34-EF90-47BA-D523E2F06334}"/>
+              </a:ext>
+            </a:extLst>
+          </p:cNvPr>
+          <p:cNvSpPr txBox="1"/>
+          <p:nvPr/>
+        </p:nvSpPr>
+        <p:spPr>
+          <a:xfrm>
+            <a:off x="571500" y="6018014"/>
+            <a:ext cx="11049000" cy="415498"/>
+          </a:xfrm>
+          <a:prstGeom prst="rect">
+            <a:avLst/>
+          </a:prstGeom>
+          <a:noFill/>
+        </p:spPr>
+        <p:txBody>
+          <a:bodyPr wrap="square">
+            <a:spAutoFit/>
+          </a:bodyPr>
+          <a:lstStyle/>
+          <a:p>
+            <a:pPr algn="ctr"/>
+            <a:r>
+              <a:rPr lang="en-US" sz="2100" i="0" dirty="0">
+                <a:solidFill>
+                  <a:srgbClr val="841617"/>
+                </a:solidFill>
+                <a:effectLst/>
+                <a:latin typeface="Fira Sans" panose="020B0503050000020004" pitchFamily="34" charset="0"/>
+              </a:rPr>
+              <a:t>What else needs to be resolved?</a:t>
+            </a:r>
+            <a:endParaRPr lang="en-US" dirty="0"/>
+          </a:p>
+        </p:txBody>
+      </p:sp>
+    </p:spTree>
+    <p:extLst>
+      <p:ext uri="{BB962C8B-B14F-4D97-AF65-F5344CB8AC3E}">
+        <p14:creationId xmlns:p14="http://schemas.microsoft.com/office/powerpoint/2010/main" val="1760325861"/>
+      </p:ext>
+    </p:extLst>
+  </p:cSld>
+  <p:clrMapOvr>
+    <a:masterClrMapping/>
+  </p:clrMapOvr>
+</p:sld>
+</file>
+
+<file path=ppt/slides/slide16.xml><?xml version="1.0" encoding="utf-8"?>
+<p:sld xmlns:a="http://schemas.openxmlformats.org/drawingml/2006/main" xmlns:r="http://schemas.openxmlformats.org/officeDocument/2006/relationships" xmlns:p="http://schemas.openxmlformats.org/presentationml/2006/main">
+  <p:cSld>
+    <p:spTree>
+      <p:nvGrpSpPr>
+        <p:cNvPr id="1" name=""/>
+        <p:cNvGrpSpPr/>
+        <p:nvPr/>
+      </p:nvGrpSpPr>
+      <p:grpSpPr>
+        <a:xfrm>
+          <a:off x="0" y="0"/>
+          <a:ext cx="0" cy="0"/>
+          <a:chOff x="0" y="0"/>
+          <a:chExt cx="0" cy="0"/>
+        </a:xfrm>
+      </p:grpSpPr>
+      <p:sp>
+        <p:nvSpPr>
+          <p:cNvPr id="2" name="Title 1">
+            <a:extLst>
+              <a:ext uri="{FF2B5EF4-FFF2-40B4-BE49-F238E27FC236}">
+                <a16:creationId xmlns:a16="http://schemas.microsoft.com/office/drawing/2014/main" id="{5FE02FD9-116D-5C6D-B58D-09569F2019F8}"/>
+              </a:ext>
+            </a:extLst>
+          </p:cNvPr>
+          <p:cNvSpPr>
+            <a:spLocks noGrp="1"/>
+          </p:cNvSpPr>
+          <p:nvPr>
+            <p:ph type="title"/>
+          </p:nvPr>
+        </p:nvSpPr>
+        <p:spPr/>
+        <p:txBody>
+          <a:bodyPr>
+            <a:normAutofit/>
+          </a:bodyPr>
+          <a:lstStyle/>
+          <a:p>
+            <a:r>
+              <a:rPr lang="en-US" dirty="0"/>
+              <a:t>Precision Does Not Mean Small Questions</a:t>
+            </a:r>
+          </a:p>
+        </p:txBody>
+      </p:sp>
+      <p:sp>
+        <p:nvSpPr>
+          <p:cNvPr id="3" name="Content Placeholder 2">
+            <a:extLst>
+              <a:ext uri="{FF2B5EF4-FFF2-40B4-BE49-F238E27FC236}">
+                <a16:creationId xmlns:a16="http://schemas.microsoft.com/office/drawing/2014/main" id="{96282F93-8C44-8190-0B6F-584F2C6418E8}"/>
+              </a:ext>
+            </a:extLst>
+          </p:cNvPr>
+          <p:cNvSpPr>
+            <a:spLocks noGrp="1"/>
+          </p:cNvSpPr>
+          <p:nvPr>
+            <p:ph idx="1"/>
+          </p:nvPr>
+        </p:nvSpPr>
+        <p:spPr>
+          <a:xfrm>
+            <a:off x="5928360" y="2355902"/>
+            <a:ext cx="5425440" cy="2773681"/>
+          </a:xfrm>
+        </p:spPr>
+        <p:txBody>
+          <a:bodyPr>
+            <a:normAutofit/>
+          </a:bodyPr>
+          <a:lstStyle/>
+          <a:p>
+            <a:r>
+              <a:rPr lang="en-US" sz="2000" dirty="0"/>
+              <a:t>What makes a basketball team successful?</a:t>
+            </a:r>
+          </a:p>
+          <a:p>
+            <a:endParaRPr lang="en-US" sz="2000" dirty="0"/>
+          </a:p>
+          <a:p>
+            <a:r>
+              <a:rPr lang="en-US" sz="2000" dirty="0"/>
+              <a:t>How does turnover rate relate to offensive efficiency across conference games?</a:t>
+            </a:r>
+          </a:p>
+          <a:p>
+            <a:endParaRPr lang="en-US" sz="2000" dirty="0"/>
+          </a:p>
+          <a:p>
+            <a:r>
+              <a:rPr lang="en-US" sz="2000" dirty="0"/>
+              <a:t>Did the turnover with 72 seconds remaining in Q3 cause Tuesday's loss?</a:t>
+            </a:r>
+          </a:p>
+        </p:txBody>
+      </p:sp>
+      <p:sp>
+        <p:nvSpPr>
+          <p:cNvPr id="4" name="Isosceles Triangle 3">
+            <a:extLst>
+              <a:ext uri="{FF2B5EF4-FFF2-40B4-BE49-F238E27FC236}">
+                <a16:creationId xmlns:a16="http://schemas.microsoft.com/office/drawing/2014/main" id="{85A78DD3-2BF7-FA16-4547-07628C82FFBD}"/>
+              </a:ext>
+            </a:extLst>
+          </p:cNvPr>
+          <p:cNvSpPr/>
+          <p:nvPr/>
+        </p:nvSpPr>
+        <p:spPr>
+          <a:xfrm flipV="1">
+            <a:off x="1341120" y="2307102"/>
+            <a:ext cx="3322320" cy="2773680"/>
+          </a:xfrm>
+          <a:prstGeom prst="triangle">
+            <a:avLst/>
+          </a:prstGeom>
+        </p:spPr>
+        <p:style>
+          <a:lnRef idx="1">
+            <a:schemeClr val="accent2"/>
+          </a:lnRef>
+          <a:fillRef idx="2">
+            <a:schemeClr val="accent2"/>
+          </a:fillRef>
+          <a:effectRef idx="1">
+            <a:schemeClr val="accent2"/>
+          </a:effectRef>
+          <a:fontRef idx="minor">
+            <a:schemeClr val="dk1"/>
+          </a:fontRef>
+        </p:style>
+        <p:txBody>
+          <a:bodyPr rtlCol="0" anchor="ctr"/>
+          <a:lstStyle/>
+          <a:p>
+            <a:pPr algn="ctr"/>
+            <a:endParaRPr lang="en-US" dirty="0"/>
+          </a:p>
+        </p:txBody>
+      </p:sp>
+      <p:sp>
+        <p:nvSpPr>
+          <p:cNvPr id="5" name="TextBox 4">
+            <a:extLst>
+              <a:ext uri="{FF2B5EF4-FFF2-40B4-BE49-F238E27FC236}">
+                <a16:creationId xmlns:a16="http://schemas.microsoft.com/office/drawing/2014/main" id="{B63C8B32-C548-7F03-2F4F-E3E743B62C9A}"/>
+              </a:ext>
+            </a:extLst>
+          </p:cNvPr>
+          <p:cNvSpPr txBox="1"/>
+          <p:nvPr/>
+        </p:nvSpPr>
+        <p:spPr>
+          <a:xfrm>
+            <a:off x="2417408" y="2355902"/>
+            <a:ext cx="1169744" cy="369332"/>
+          </a:xfrm>
+          <a:prstGeom prst="rect">
+            <a:avLst/>
+          </a:prstGeom>
+          <a:noFill/>
+        </p:spPr>
+        <p:txBody>
+          <a:bodyPr wrap="none" rtlCol="0">
+            <a:spAutoFit/>
+          </a:bodyPr>
+          <a:lstStyle/>
+          <a:p>
+            <a:r>
+              <a:rPr lang="en-US" dirty="0"/>
+              <a:t>Too Broad</a:t>
+            </a:r>
+          </a:p>
+        </p:txBody>
+      </p:sp>
+      <p:sp>
+        <p:nvSpPr>
+          <p:cNvPr id="7" name="TextBox 6">
+            <a:extLst>
+              <a:ext uri="{FF2B5EF4-FFF2-40B4-BE49-F238E27FC236}">
+                <a16:creationId xmlns:a16="http://schemas.microsoft.com/office/drawing/2014/main" id="{DF00C63F-853C-63B9-5662-996A6EC9A4F9}"/>
+              </a:ext>
+            </a:extLst>
+          </p:cNvPr>
+          <p:cNvSpPr txBox="1"/>
+          <p:nvPr/>
+        </p:nvSpPr>
+        <p:spPr>
+          <a:xfrm>
+            <a:off x="2518381" y="4319786"/>
+            <a:ext cx="967798" cy="646331"/>
+          </a:xfrm>
+          <a:prstGeom prst="rect">
+            <a:avLst/>
+          </a:prstGeom>
+          <a:noFill/>
+        </p:spPr>
+        <p:txBody>
+          <a:bodyPr wrap="square" rtlCol="0">
+            <a:spAutoFit/>
+          </a:bodyPr>
+          <a:lstStyle/>
+          <a:p>
+            <a:pPr algn="ctr"/>
+            <a:r>
+              <a:rPr lang="en-US" dirty="0"/>
+              <a:t>Too Narrow</a:t>
+            </a:r>
+          </a:p>
+        </p:txBody>
+      </p:sp>
+      <p:sp>
+        <p:nvSpPr>
+          <p:cNvPr id="10" name="TextBox 9">
+            <a:extLst>
+              <a:ext uri="{FF2B5EF4-FFF2-40B4-BE49-F238E27FC236}">
+                <a16:creationId xmlns:a16="http://schemas.microsoft.com/office/drawing/2014/main" id="{5FFA8024-07D0-B535-AB65-730AF51A7FEB}"/>
+              </a:ext>
+            </a:extLst>
+          </p:cNvPr>
+          <p:cNvSpPr txBox="1"/>
+          <p:nvPr/>
+        </p:nvSpPr>
+        <p:spPr>
+          <a:xfrm>
+            <a:off x="2286000" y="3429000"/>
+            <a:ext cx="1434486" cy="461665"/>
+          </a:xfrm>
+          <a:prstGeom prst="rect">
+            <a:avLst/>
+          </a:prstGeom>
+          <a:noFill/>
+        </p:spPr>
+        <p:txBody>
+          <a:bodyPr wrap="square" rtlCol="0">
+            <a:spAutoFit/>
+          </a:bodyPr>
+          <a:lstStyle/>
+          <a:p>
+            <a:pPr algn="ctr"/>
+            <a:r>
+              <a:rPr lang="en-US" sz="2400" b="1" dirty="0"/>
+              <a:t>Focused</a:t>
+            </a:r>
+          </a:p>
+        </p:txBody>
+      </p:sp>
+      <p:sp>
+        <p:nvSpPr>
+          <p:cNvPr id="13" name="TextBox 12">
+            <a:extLst>
+              <a:ext uri="{FF2B5EF4-FFF2-40B4-BE49-F238E27FC236}">
+                <a16:creationId xmlns:a16="http://schemas.microsoft.com/office/drawing/2014/main" id="{82955CE5-31A7-78DD-44B7-D0FB6DF892BB}"/>
+              </a:ext>
+            </a:extLst>
+          </p:cNvPr>
+          <p:cNvSpPr txBox="1"/>
+          <p:nvPr/>
+        </p:nvSpPr>
+        <p:spPr>
+          <a:xfrm>
+            <a:off x="571500" y="6018014"/>
+            <a:ext cx="11049000" cy="415498"/>
+          </a:xfrm>
+          <a:prstGeom prst="rect">
+            <a:avLst/>
+          </a:prstGeom>
+          <a:noFill/>
+        </p:spPr>
+        <p:txBody>
+          <a:bodyPr wrap="square">
+            <a:spAutoFit/>
+          </a:bodyPr>
+          <a:lstStyle/>
+          <a:p>
+            <a:r>
+              <a:rPr lang="en-US" sz="2100" i="0" dirty="0">
+                <a:solidFill>
+                  <a:srgbClr val="841617"/>
+                </a:solidFill>
+                <a:effectLst/>
+                <a:latin typeface="Fira Sans" panose="020B0503050000020004" pitchFamily="34" charset="0"/>
+              </a:rPr>
+              <a:t>A useful scope is narrow enough to </a:t>
+            </a:r>
+            <a:r>
+              <a:rPr lang="en-US" sz="2100" b="1" i="0" dirty="0">
+                <a:solidFill>
+                  <a:srgbClr val="841617"/>
+                </a:solidFill>
+                <a:effectLst/>
+                <a:latin typeface="Fira Sans" panose="020B0503050000020004" pitchFamily="34" charset="0"/>
+              </a:rPr>
+              <a:t>investigate </a:t>
+            </a:r>
+            <a:r>
+              <a:rPr lang="en-US" sz="2100" b="1" dirty="0">
+                <a:solidFill>
+                  <a:srgbClr val="841617"/>
+                </a:solidFill>
+                <a:latin typeface="Fira Sans" panose="020B0503050000020004" pitchFamily="34" charset="0"/>
+              </a:rPr>
+              <a:t>reasonably</a:t>
+            </a:r>
+            <a:r>
+              <a:rPr lang="en-US" sz="2100" dirty="0">
+                <a:solidFill>
+                  <a:srgbClr val="841617"/>
+                </a:solidFill>
+                <a:latin typeface="Fira Sans" panose="020B0503050000020004" pitchFamily="34" charset="0"/>
+              </a:rPr>
+              <a:t> </a:t>
+            </a:r>
+            <a:r>
+              <a:rPr lang="en-US" sz="2100" i="0" dirty="0">
+                <a:solidFill>
+                  <a:srgbClr val="841617"/>
+                </a:solidFill>
+                <a:effectLst/>
+                <a:latin typeface="Fira Sans" panose="020B0503050000020004" pitchFamily="34" charset="0"/>
+              </a:rPr>
+              <a:t>and broad enough to </a:t>
+            </a:r>
+            <a:r>
+              <a:rPr lang="en-US" sz="2100" b="1" i="0" dirty="0">
+                <a:solidFill>
+                  <a:srgbClr val="841617"/>
+                </a:solidFill>
+                <a:effectLst/>
+                <a:latin typeface="Fira Sans" panose="020B0503050000020004" pitchFamily="34" charset="0"/>
+              </a:rPr>
+              <a:t>matter</a:t>
+            </a:r>
+            <a:r>
+              <a:rPr lang="en-US" sz="2100" i="0" dirty="0">
+                <a:solidFill>
+                  <a:srgbClr val="841617"/>
+                </a:solidFill>
+                <a:effectLst/>
+                <a:latin typeface="Fira Sans" panose="020B0503050000020004" pitchFamily="34" charset="0"/>
+              </a:rPr>
+              <a:t>.</a:t>
+            </a:r>
+            <a:endParaRPr lang="en-US" dirty="0"/>
+          </a:p>
+        </p:txBody>
+      </p:sp>
+    </p:spTree>
+    <p:extLst>
+      <p:ext uri="{BB962C8B-B14F-4D97-AF65-F5344CB8AC3E}">
+        <p14:creationId xmlns:p14="http://schemas.microsoft.com/office/powerpoint/2010/main" val="3463741294"/>
+      </p:ext>
+    </p:extLst>
+  </p:cSld>
+  <p:clrMapOvr>
+    <a:masterClrMapping/>
+  </p:clrMapOvr>
+</p:sld>
+</file>
+
+<file path=ppt/slides/slide17.xml><?xml version="1.0" encoding="utf-8"?>
+<p:sld xmlns:a="http://schemas.openxmlformats.org/drawingml/2006/main" xmlns:r="http://schemas.openxmlformats.org/officeDocument/2006/relationships" xmlns:p="http://schemas.openxmlformats.org/presentationml/2006/main">
+  <p:cSld>
+    <p:spTree>
+      <p:nvGrpSpPr>
+        <p:cNvPr id="1" name=""/>
+        <p:cNvGrpSpPr/>
+        <p:nvPr/>
+      </p:nvGrpSpPr>
+      <p:grpSpPr>
+        <a:xfrm>
+          <a:off x="0" y="0"/>
+          <a:ext cx="0" cy="0"/>
+          <a:chOff x="0" y="0"/>
+          <a:chExt cx="0" cy="0"/>
+        </a:xfrm>
+      </p:grpSpPr>
+      <p:sp>
+        <p:nvSpPr>
+          <p:cNvPr id="2" name="Title 1">
+            <a:extLst>
+              <a:ext uri="{FF2B5EF4-FFF2-40B4-BE49-F238E27FC236}">
+                <a16:creationId xmlns:a16="http://schemas.microsoft.com/office/drawing/2014/main" id="{EDDCB969-C776-A185-D710-DC8531A33A27}"/>
+              </a:ext>
+            </a:extLst>
+          </p:cNvPr>
+          <p:cNvSpPr>
+            <a:spLocks noGrp="1"/>
+          </p:cNvSpPr>
+          <p:nvPr>
+            <p:ph type="title"/>
+          </p:nvPr>
+        </p:nvSpPr>
+        <p:spPr/>
+        <p:txBody>
+          <a:bodyPr/>
+          <a:lstStyle/>
+          <a:p>
+            <a:r>
+              <a:rPr lang="en-US" dirty="0"/>
+              <a:t>Warning on Causal Language</a:t>
+            </a:r>
+          </a:p>
+        </p:txBody>
+      </p:sp>
+      <p:sp>
+        <p:nvSpPr>
+          <p:cNvPr id="3" name="Content Placeholder 2">
+            <a:extLst>
+              <a:ext uri="{FF2B5EF4-FFF2-40B4-BE49-F238E27FC236}">
+                <a16:creationId xmlns:a16="http://schemas.microsoft.com/office/drawing/2014/main" id="{0449031A-6397-FA6B-A13F-CEBBC30704F0}"/>
+              </a:ext>
+            </a:extLst>
+          </p:cNvPr>
+          <p:cNvSpPr>
+            <a:spLocks noGrp="1"/>
+          </p:cNvSpPr>
+          <p:nvPr>
+            <p:ph idx="1"/>
+          </p:nvPr>
+        </p:nvSpPr>
+        <p:spPr/>
+        <p:txBody>
+          <a:bodyPr/>
+          <a:lstStyle/>
+          <a:p>
+            <a:pPr marL="0" indent="0">
+              <a:buNone/>
+            </a:pPr>
+            <a:r>
+              <a:rPr lang="en-US" dirty="0"/>
+              <a:t>The wording of the question should match what the evidence can support.</a:t>
+            </a:r>
+          </a:p>
+          <a:p>
+            <a:endParaRPr lang="en-US" dirty="0"/>
+          </a:p>
+          <a:p>
+            <a:endParaRPr lang="en-US" dirty="0"/>
+          </a:p>
+        </p:txBody>
+      </p:sp>
+      <p:sp>
+        <p:nvSpPr>
+          <p:cNvPr id="5" name="Rectangle: Rounded Corners 4">
+            <a:extLst>
+              <a:ext uri="{FF2B5EF4-FFF2-40B4-BE49-F238E27FC236}">
+                <a16:creationId xmlns:a16="http://schemas.microsoft.com/office/drawing/2014/main" id="{15AB17EE-1C8D-2274-6614-0BF0F7BE423D}"/>
+              </a:ext>
+            </a:extLst>
+          </p:cNvPr>
+          <p:cNvSpPr/>
+          <p:nvPr/>
+        </p:nvSpPr>
+        <p:spPr>
+          <a:xfrm>
+            <a:off x="838200" y="4014329"/>
+            <a:ext cx="3886200" cy="914400"/>
+          </a:xfrm>
+          <a:prstGeom prst="roundRect">
+            <a:avLst/>
+          </a:prstGeom>
+        </p:spPr>
+        <p:style>
+          <a:lnRef idx="1">
+            <a:schemeClr val="accent2"/>
+          </a:lnRef>
+          <a:fillRef idx="2">
+            <a:schemeClr val="accent2"/>
+          </a:fillRef>
+          <a:effectRef idx="1">
+            <a:schemeClr val="accent2"/>
+          </a:effectRef>
+          <a:fontRef idx="minor">
+            <a:schemeClr val="dk1"/>
+          </a:fontRef>
+        </p:style>
+        <p:txBody>
+          <a:bodyPr rtlCol="0" anchor="ctr"/>
+          <a:lstStyle/>
+          <a:p>
+            <a:r>
+              <a:rPr lang="en-US" dirty="0"/>
+              <a:t>Did greater workload </a:t>
+            </a:r>
+            <a:r>
+              <a:rPr lang="en-US" b="1" dirty="0"/>
+              <a:t>cause</a:t>
+            </a:r>
+            <a:r>
+              <a:rPr lang="en-US" dirty="0"/>
+              <a:t> poorer shooting?</a:t>
+            </a:r>
+          </a:p>
+        </p:txBody>
+      </p:sp>
+      <p:sp>
+        <p:nvSpPr>
+          <p:cNvPr id="7" name="Rectangle: Rounded Corners 6">
+            <a:extLst>
+              <a:ext uri="{FF2B5EF4-FFF2-40B4-BE49-F238E27FC236}">
+                <a16:creationId xmlns:a16="http://schemas.microsoft.com/office/drawing/2014/main" id="{DD35E15B-C06C-3BED-8074-D929866F1D3D}"/>
+              </a:ext>
+            </a:extLst>
+          </p:cNvPr>
+          <p:cNvSpPr/>
+          <p:nvPr/>
+        </p:nvSpPr>
+        <p:spPr>
+          <a:xfrm>
+            <a:off x="7025640" y="2475089"/>
+            <a:ext cx="3886200" cy="914400"/>
+          </a:xfrm>
+          <a:prstGeom prst="roundRect">
+            <a:avLst/>
+          </a:prstGeom>
+        </p:spPr>
+        <p:style>
+          <a:lnRef idx="1">
+            <a:schemeClr val="accent6"/>
+          </a:lnRef>
+          <a:fillRef idx="2">
+            <a:schemeClr val="accent6"/>
+          </a:fillRef>
+          <a:effectRef idx="1">
+            <a:schemeClr val="accent6"/>
+          </a:effectRef>
+          <a:fontRef idx="minor">
+            <a:schemeClr val="dk1"/>
+          </a:fontRef>
+        </p:style>
+        <p:txBody>
+          <a:bodyPr rtlCol="0" anchor="ctr"/>
+          <a:lstStyle/>
+          <a:p>
+            <a:pPr lvl="0"/>
+            <a:r>
+              <a:rPr lang="en-US" dirty="0"/>
+              <a:t>Was greater workload </a:t>
+            </a:r>
+            <a:r>
+              <a:rPr lang="en-US" b="1" dirty="0"/>
+              <a:t>associated with</a:t>
+            </a:r>
+            <a:r>
+              <a:rPr lang="en-US" dirty="0"/>
+              <a:t> poorer shooting?</a:t>
+            </a:r>
+          </a:p>
+        </p:txBody>
+      </p:sp>
+      <p:sp>
+        <p:nvSpPr>
+          <p:cNvPr id="9" name="Rectangle: Rounded Corners 8">
+            <a:extLst>
+              <a:ext uri="{FF2B5EF4-FFF2-40B4-BE49-F238E27FC236}">
+                <a16:creationId xmlns:a16="http://schemas.microsoft.com/office/drawing/2014/main" id="{6E3F528D-537A-E0B0-6E17-4554442C41D7}"/>
+              </a:ext>
+            </a:extLst>
+          </p:cNvPr>
+          <p:cNvSpPr/>
+          <p:nvPr/>
+        </p:nvSpPr>
+        <p:spPr>
+          <a:xfrm>
+            <a:off x="7025640" y="4014329"/>
+            <a:ext cx="3886200" cy="914400"/>
+          </a:xfrm>
+          <a:prstGeom prst="roundRect">
+            <a:avLst/>
+          </a:prstGeom>
+        </p:spPr>
+        <p:style>
+          <a:lnRef idx="1">
+            <a:schemeClr val="accent6"/>
+          </a:lnRef>
+          <a:fillRef idx="2">
+            <a:schemeClr val="accent6"/>
+          </a:fillRef>
+          <a:effectRef idx="1">
+            <a:schemeClr val="accent6"/>
+          </a:effectRef>
+          <a:fontRef idx="minor">
+            <a:schemeClr val="dk1"/>
+          </a:fontRef>
+        </p:style>
+        <p:txBody>
+          <a:bodyPr rtlCol="0" anchor="ctr"/>
+          <a:lstStyle/>
+          <a:p>
+            <a:pPr lvl="0"/>
+            <a:r>
+              <a:rPr lang="en-US" dirty="0"/>
+              <a:t>Did poorer shooting occur </a:t>
+            </a:r>
+            <a:r>
+              <a:rPr lang="en-US" b="1" dirty="0"/>
+              <a:t>after</a:t>
+            </a:r>
+            <a:r>
+              <a:rPr lang="en-US" dirty="0"/>
+              <a:t> periods of greater workload?</a:t>
+            </a:r>
+          </a:p>
+        </p:txBody>
+      </p:sp>
+      <p:sp>
+        <p:nvSpPr>
+          <p:cNvPr id="11" name="Rectangle: Rounded Corners 10">
+            <a:extLst>
+              <a:ext uri="{FF2B5EF4-FFF2-40B4-BE49-F238E27FC236}">
+                <a16:creationId xmlns:a16="http://schemas.microsoft.com/office/drawing/2014/main" id="{F45CBF18-896D-373A-62FC-37A7FB13F6E2}"/>
+              </a:ext>
+            </a:extLst>
+          </p:cNvPr>
+          <p:cNvSpPr/>
+          <p:nvPr/>
+        </p:nvSpPr>
+        <p:spPr>
+          <a:xfrm>
+            <a:off x="7025640" y="5426685"/>
+            <a:ext cx="3886200" cy="914400"/>
+          </a:xfrm>
+          <a:prstGeom prst="roundRect">
+            <a:avLst/>
+          </a:prstGeom>
+        </p:spPr>
+        <p:style>
+          <a:lnRef idx="1">
+            <a:schemeClr val="accent6"/>
+          </a:lnRef>
+          <a:fillRef idx="2">
+            <a:schemeClr val="accent6"/>
+          </a:fillRef>
+          <a:effectRef idx="1">
+            <a:schemeClr val="accent6"/>
+          </a:effectRef>
+          <a:fontRef idx="minor">
+            <a:schemeClr val="dk1"/>
+          </a:fontRef>
+        </p:style>
+        <p:txBody>
+          <a:bodyPr rtlCol="0" anchor="ctr"/>
+          <a:lstStyle/>
+          <a:p>
+            <a:pPr lvl="0"/>
+            <a:r>
+              <a:rPr lang="en-US" dirty="0"/>
+              <a:t>Do players with greater workload </a:t>
+            </a:r>
+            <a:r>
+              <a:rPr lang="en-US" b="1" dirty="0"/>
+              <a:t>tend to</a:t>
+            </a:r>
+            <a:r>
+              <a:rPr lang="en-US" dirty="0"/>
+              <a:t> shoot worse?</a:t>
+            </a:r>
+          </a:p>
+        </p:txBody>
+      </p:sp>
+      <p:sp>
+        <p:nvSpPr>
+          <p:cNvPr id="13" name="Arrow: Right 12">
+            <a:extLst>
+              <a:ext uri="{FF2B5EF4-FFF2-40B4-BE49-F238E27FC236}">
+                <a16:creationId xmlns:a16="http://schemas.microsoft.com/office/drawing/2014/main" id="{A39209B1-5695-EACE-CC19-D1ECA99D3403}"/>
+              </a:ext>
+            </a:extLst>
+          </p:cNvPr>
+          <p:cNvSpPr/>
+          <p:nvPr/>
+        </p:nvSpPr>
+        <p:spPr>
+          <a:xfrm rot="19698657">
+            <a:off x="4922521" y="3439276"/>
+            <a:ext cx="1722120" cy="410930"/>
+          </a:xfrm>
+          <a:prstGeom prst="rightArrow">
+            <a:avLst/>
+          </a:prstGeom>
+        </p:spPr>
+        <p:style>
+          <a:lnRef idx="1">
+            <a:schemeClr val="dk1"/>
+          </a:lnRef>
+          <a:fillRef idx="2">
+            <a:schemeClr val="dk1"/>
+          </a:fillRef>
+          <a:effectRef idx="1">
+            <a:schemeClr val="dk1"/>
+          </a:effectRef>
+          <a:fontRef idx="minor">
+            <a:schemeClr val="dk1"/>
+          </a:fontRef>
+        </p:style>
+        <p:txBody>
+          <a:bodyPr rtlCol="0" anchor="ctr"/>
+          <a:lstStyle/>
+          <a:p>
+            <a:pPr algn="ctr"/>
+            <a:endParaRPr lang="en-US"/>
+          </a:p>
+        </p:txBody>
+      </p:sp>
+      <p:sp>
+        <p:nvSpPr>
+          <p:cNvPr id="15" name="Arrow: Right 14">
+            <a:extLst>
+              <a:ext uri="{FF2B5EF4-FFF2-40B4-BE49-F238E27FC236}">
+                <a16:creationId xmlns:a16="http://schemas.microsoft.com/office/drawing/2014/main" id="{5D439A93-EA20-9FD7-812D-79CADF738495}"/>
+              </a:ext>
+            </a:extLst>
+          </p:cNvPr>
+          <p:cNvSpPr/>
+          <p:nvPr/>
+        </p:nvSpPr>
+        <p:spPr>
+          <a:xfrm rot="1575899">
+            <a:off x="4915880" y="5221220"/>
+            <a:ext cx="1722120" cy="410930"/>
+          </a:xfrm>
+          <a:prstGeom prst="rightArrow">
+            <a:avLst/>
+          </a:prstGeom>
+        </p:spPr>
+        <p:style>
+          <a:lnRef idx="1">
+            <a:schemeClr val="dk1"/>
+          </a:lnRef>
+          <a:fillRef idx="2">
+            <a:schemeClr val="dk1"/>
+          </a:fillRef>
+          <a:effectRef idx="1">
+            <a:schemeClr val="dk1"/>
+          </a:effectRef>
+          <a:fontRef idx="minor">
+            <a:schemeClr val="dk1"/>
+          </a:fontRef>
+        </p:style>
+        <p:txBody>
+          <a:bodyPr rtlCol="0" anchor="ctr"/>
+          <a:lstStyle/>
+          <a:p>
+            <a:pPr algn="ctr"/>
+            <a:endParaRPr lang="en-US"/>
+          </a:p>
+        </p:txBody>
+      </p:sp>
+      <p:sp>
+        <p:nvSpPr>
+          <p:cNvPr id="17" name="Arrow: Right 16">
+            <a:extLst>
+              <a:ext uri="{FF2B5EF4-FFF2-40B4-BE49-F238E27FC236}">
+                <a16:creationId xmlns:a16="http://schemas.microsoft.com/office/drawing/2014/main" id="{25FCCFEF-9E47-557B-6BA0-C86392F3931D}"/>
+              </a:ext>
+            </a:extLst>
+          </p:cNvPr>
+          <p:cNvSpPr/>
+          <p:nvPr/>
+        </p:nvSpPr>
+        <p:spPr>
+          <a:xfrm>
+            <a:off x="5090160" y="4284499"/>
+            <a:ext cx="1722120" cy="410930"/>
+          </a:xfrm>
+          <a:prstGeom prst="rightArrow">
+            <a:avLst/>
+          </a:prstGeom>
+        </p:spPr>
+        <p:style>
+          <a:lnRef idx="1">
+            <a:schemeClr val="dk1"/>
+          </a:lnRef>
+          <a:fillRef idx="2">
+            <a:schemeClr val="dk1"/>
+          </a:fillRef>
+          <a:effectRef idx="1">
+            <a:schemeClr val="dk1"/>
+          </a:effectRef>
+          <a:fontRef idx="minor">
+            <a:schemeClr val="dk1"/>
+          </a:fontRef>
+        </p:style>
+        <p:txBody>
+          <a:bodyPr rtlCol="0" anchor="ctr"/>
+          <a:lstStyle/>
+          <a:p>
+            <a:pPr algn="ctr"/>
+            <a:endParaRPr lang="en-US"/>
+          </a:p>
+        </p:txBody>
+      </p:sp>
+    </p:spTree>
+    <p:extLst>
+      <p:ext uri="{BB962C8B-B14F-4D97-AF65-F5344CB8AC3E}">
+        <p14:creationId xmlns:p14="http://schemas.microsoft.com/office/powerpoint/2010/main" val="2742973380"/>
+      </p:ext>
+    </p:extLst>
+  </p:cSld>
+  <p:clrMapOvr>
+    <a:masterClrMapping/>
+  </p:clrMapOvr>
+</p:sld>
+</file>
+
+<file path=ppt/slides/slide18.xml><?xml version="1.0" encoding="utf-8"?>
+<p:sld xmlns:a="http://schemas.openxmlformats.org/drawingml/2006/main" xmlns:r="http://schemas.openxmlformats.org/officeDocument/2006/relationships" xmlns:p="http://schemas.openxmlformats.org/presentationml/2006/main">
+  <p:cSld>
+    <p:spTree>
+      <p:nvGrpSpPr>
+        <p:cNvPr id="1" name=""/>
+        <p:cNvGrpSpPr/>
+        <p:nvPr/>
+      </p:nvGrpSpPr>
+      <p:grpSpPr>
+        <a:xfrm>
+          <a:off x="0" y="0"/>
+          <a:ext cx="0" cy="0"/>
+          <a:chOff x="0" y="0"/>
+          <a:chExt cx="0" cy="0"/>
+        </a:xfrm>
+      </p:grpSpPr>
+      <p:sp>
+        <p:nvSpPr>
+          <p:cNvPr id="2" name="Title 1">
+            <a:extLst>
+              <a:ext uri="{FF2B5EF4-FFF2-40B4-BE49-F238E27FC236}">
+                <a16:creationId xmlns:a16="http://schemas.microsoft.com/office/drawing/2014/main" id="{434618C8-5DDD-8308-9F68-BE35F62AD1FC}"/>
+              </a:ext>
+            </a:extLst>
+          </p:cNvPr>
+          <p:cNvSpPr>
+            <a:spLocks noGrp="1"/>
+          </p:cNvSpPr>
+          <p:nvPr>
+            <p:ph type="title"/>
+          </p:nvPr>
+        </p:nvSpPr>
+        <p:spPr>
+          <a:xfrm>
+            <a:off x="838200" y="365126"/>
+            <a:ext cx="10515600" cy="1298782"/>
+          </a:xfrm>
+        </p:spPr>
+        <p:txBody>
+          <a:bodyPr>
+            <a:normAutofit fontScale="90000"/>
+          </a:bodyPr>
+          <a:lstStyle/>
+          <a:p>
+            <a:r>
+              <a:rPr lang="en-US" dirty="0"/>
+              <a:t>A Question Can Be Useful Even If the Answer Is “We Cannot Tell”</a:t>
+            </a:r>
+          </a:p>
+        </p:txBody>
+      </p:sp>
+      <p:sp>
+        <p:nvSpPr>
+          <p:cNvPr id="3" name="Content Placeholder 2">
+            <a:extLst>
+              <a:ext uri="{FF2B5EF4-FFF2-40B4-BE49-F238E27FC236}">
+                <a16:creationId xmlns:a16="http://schemas.microsoft.com/office/drawing/2014/main" id="{13FC7AC4-24AA-9BBC-8F3D-7792C17C8BAE}"/>
+              </a:ext>
+            </a:extLst>
+          </p:cNvPr>
+          <p:cNvSpPr>
+            <a:spLocks noGrp="1"/>
+          </p:cNvSpPr>
+          <p:nvPr>
+            <p:ph idx="1"/>
+          </p:nvPr>
+        </p:nvSpPr>
+        <p:spPr>
+          <a:xfrm>
+            <a:off x="838200" y="1858780"/>
+            <a:ext cx="10515600" cy="4318183"/>
+          </a:xfrm>
+        </p:spPr>
+        <p:txBody>
+          <a:bodyPr/>
+          <a:lstStyle/>
+          <a:p>
+            <a:pPr marL="0" indent="0">
+              <a:buNone/>
+            </a:pPr>
+            <a:r>
+              <a:rPr lang="en-US" dirty="0"/>
+              <a:t>Sometimes the conclusion of an investigation may be:</a:t>
+            </a:r>
+          </a:p>
+          <a:p>
+            <a:pPr lvl="1"/>
+            <a:r>
+              <a:rPr lang="en-US" dirty="0"/>
+              <a:t>The required variable was not measured.</a:t>
+            </a:r>
+          </a:p>
+          <a:p>
+            <a:pPr lvl="1"/>
+            <a:r>
+              <a:rPr lang="en-US" dirty="0"/>
+              <a:t>The comparison group is inappropriate.</a:t>
+            </a:r>
+          </a:p>
+          <a:p>
+            <a:pPr lvl="1"/>
+            <a:r>
+              <a:rPr lang="en-US" dirty="0"/>
+              <a:t>The sample is too limited.</a:t>
+            </a:r>
+          </a:p>
+          <a:p>
+            <a:pPr lvl="1"/>
+            <a:r>
+              <a:rPr lang="en-US" dirty="0"/>
+              <a:t>The measurement does not represent the intended concept.</a:t>
+            </a:r>
+          </a:p>
+          <a:p>
+            <a:pPr lvl="1"/>
+            <a:r>
+              <a:rPr lang="en-US" dirty="0"/>
+              <a:t>The design cannot support the claimed explanation.</a:t>
+            </a:r>
+          </a:p>
+          <a:p>
+            <a:endParaRPr lang="en-US" dirty="0"/>
+          </a:p>
+          <a:p>
+            <a:pPr marL="0" indent="0">
+              <a:buNone/>
+            </a:pPr>
+            <a:r>
+              <a:rPr lang="en-US" dirty="0"/>
+              <a:t>Recognizing limits is a crucial part of analytics</a:t>
+            </a:r>
+          </a:p>
+          <a:p>
+            <a:endParaRPr lang="en-US" dirty="0"/>
+          </a:p>
+        </p:txBody>
+      </p:sp>
+    </p:spTree>
+    <p:extLst>
+      <p:ext uri="{BB962C8B-B14F-4D97-AF65-F5344CB8AC3E}">
+        <p14:creationId xmlns:p14="http://schemas.microsoft.com/office/powerpoint/2010/main" val="2812596209"/>
+      </p:ext>
+    </p:extLst>
+  </p:cSld>
+  <p:clrMapOvr>
+    <a:masterClrMapping/>
+  </p:clrMapOvr>
+</p:sld>
+</file>
+
+<file path=ppt/slides/slide19.xml><?xml version="1.0" encoding="utf-8"?>
+<p:sld xmlns:a="http://schemas.openxmlformats.org/drawingml/2006/main" xmlns:r="http://schemas.openxmlformats.org/officeDocument/2006/relationships" xmlns:p="http://schemas.openxmlformats.org/presentationml/2006/main">
+  <p:cSld>
+    <p:spTree>
+      <p:nvGrpSpPr>
+        <p:cNvPr id="1" name=""/>
+        <p:cNvGrpSpPr/>
+        <p:nvPr/>
+      </p:nvGrpSpPr>
+      <p:grpSpPr>
+        <a:xfrm>
+          <a:off x="0" y="0"/>
+          <a:ext cx="0" cy="0"/>
+          <a:chOff x="0" y="0"/>
+          <a:chExt cx="0" cy="0"/>
+        </a:xfrm>
+      </p:grpSpPr>
+      <p:sp>
+        <p:nvSpPr>
+          <p:cNvPr id="2" name="Title 1">
+            <a:extLst>
+              <a:ext uri="{FF2B5EF4-FFF2-40B4-BE49-F238E27FC236}">
+                <a16:creationId xmlns:a16="http://schemas.microsoft.com/office/drawing/2014/main" id="{E24D6458-5EC0-A179-B83C-16BDA007C0F4}"/>
+              </a:ext>
+            </a:extLst>
+          </p:cNvPr>
+          <p:cNvSpPr>
+            <a:spLocks noGrp="1"/>
+          </p:cNvSpPr>
+          <p:nvPr>
+            <p:ph type="title"/>
+          </p:nvPr>
+        </p:nvSpPr>
+        <p:spPr/>
+        <p:txBody>
+          <a:bodyPr>
+            <a:normAutofit fontScale="90000"/>
+          </a:bodyPr>
+          <a:lstStyle/>
+          <a:p>
+            <a:r>
+              <a:rPr lang="en-US" dirty="0"/>
+              <a:t>Data Availability Matters but It Should Not Lead</a:t>
+            </a:r>
+          </a:p>
+        </p:txBody>
+      </p:sp>
+      <p:sp>
+        <p:nvSpPr>
+          <p:cNvPr id="3" name="Content Placeholder 2">
+            <a:extLst>
+              <a:ext uri="{FF2B5EF4-FFF2-40B4-BE49-F238E27FC236}">
+                <a16:creationId xmlns:a16="http://schemas.microsoft.com/office/drawing/2014/main" id="{3003A133-610D-D59B-4AD8-4F0FF82C568D}"/>
+              </a:ext>
+            </a:extLst>
+          </p:cNvPr>
+          <p:cNvSpPr>
+            <a:spLocks noGrp="1"/>
+          </p:cNvSpPr>
+          <p:nvPr>
+            <p:ph idx="1"/>
+          </p:nvPr>
+        </p:nvSpPr>
+        <p:spPr/>
+        <p:txBody>
+          <a:bodyPr/>
+          <a:lstStyle/>
+          <a:p>
+            <a:pPr marL="0" indent="0">
+              <a:buNone/>
+            </a:pPr>
+            <a:r>
+              <a:rPr lang="en-US" dirty="0"/>
+              <a:t>Practical Steps:</a:t>
+            </a:r>
+          </a:p>
+          <a:p>
+            <a:pPr marL="514350" lvl="0" indent="-514350">
+              <a:buFont typeface="+mj-lt"/>
+              <a:buAutoNum type="arabicPeriod"/>
+            </a:pPr>
+            <a:r>
+              <a:rPr lang="en-US" b="1" dirty="0"/>
+              <a:t>Define</a:t>
+            </a:r>
+            <a:r>
+              <a:rPr lang="en-US" dirty="0"/>
+              <a:t> the sport </a:t>
+            </a:r>
+            <a:r>
+              <a:rPr lang="en-US" b="1" dirty="0"/>
+              <a:t>concern</a:t>
+            </a:r>
+            <a:r>
+              <a:rPr lang="en-US" dirty="0"/>
+              <a:t> and </a:t>
+            </a:r>
+            <a:r>
+              <a:rPr lang="en-US" b="1" dirty="0"/>
+              <a:t>decision</a:t>
+            </a:r>
+            <a:r>
+              <a:rPr lang="en-US" dirty="0"/>
+              <a:t>.</a:t>
+            </a:r>
+          </a:p>
+          <a:p>
+            <a:pPr marL="514350" lvl="0" indent="-514350">
+              <a:buFont typeface="+mj-lt"/>
+              <a:buAutoNum type="arabicPeriod"/>
+            </a:pPr>
+            <a:r>
+              <a:rPr lang="en-US" dirty="0"/>
+              <a:t>Write the </a:t>
+            </a:r>
+            <a:r>
+              <a:rPr lang="en-US" b="1" dirty="0"/>
+              <a:t>ideal question</a:t>
+            </a:r>
+            <a:r>
+              <a:rPr lang="en-US" dirty="0"/>
+              <a:t>.</a:t>
+            </a:r>
+          </a:p>
+          <a:p>
+            <a:pPr marL="514350" lvl="0" indent="-514350">
+              <a:buFont typeface="+mj-lt"/>
+              <a:buAutoNum type="arabicPeriod"/>
+            </a:pPr>
+            <a:r>
+              <a:rPr lang="en-US" b="1" dirty="0"/>
+              <a:t>Identify the evidence </a:t>
+            </a:r>
+            <a:r>
+              <a:rPr lang="en-US" dirty="0"/>
+              <a:t>the question requires.</a:t>
+            </a:r>
+          </a:p>
+          <a:p>
+            <a:pPr marL="514350" lvl="0" indent="-514350">
+              <a:buFont typeface="+mj-lt"/>
+              <a:buAutoNum type="arabicPeriod"/>
+            </a:pPr>
+            <a:r>
+              <a:rPr lang="en-US" b="1" dirty="0"/>
+              <a:t>Inspect</a:t>
+            </a:r>
+            <a:r>
+              <a:rPr lang="en-US" dirty="0"/>
+              <a:t> what data are actually available.</a:t>
+            </a:r>
+          </a:p>
+          <a:p>
+            <a:pPr marL="514350" lvl="0" indent="-514350">
+              <a:buFont typeface="+mj-lt"/>
+              <a:buAutoNum type="arabicPeriod"/>
+            </a:pPr>
+            <a:r>
+              <a:rPr lang="en-US" dirty="0"/>
+              <a:t>Revise the </a:t>
+            </a:r>
+            <a:r>
+              <a:rPr lang="en-US" b="1" dirty="0"/>
+              <a:t>scope</a:t>
+            </a:r>
+            <a:r>
+              <a:rPr lang="en-US" dirty="0"/>
+              <a:t> without changing the question's purpose.</a:t>
+            </a:r>
+          </a:p>
+          <a:p>
+            <a:pPr marL="514350" lvl="0" indent="-514350">
+              <a:buFont typeface="+mj-lt"/>
+              <a:buAutoNum type="arabicPeriod"/>
+            </a:pPr>
+            <a:r>
+              <a:rPr lang="en-US" dirty="0"/>
+              <a:t>State what the </a:t>
+            </a:r>
+            <a:r>
+              <a:rPr lang="en-US" b="1" dirty="0"/>
+              <a:t>available data cannot establish</a:t>
+            </a:r>
+            <a:r>
+              <a:rPr lang="en-US" dirty="0"/>
+              <a:t>.</a:t>
+            </a:r>
+          </a:p>
+        </p:txBody>
+      </p:sp>
+      <p:sp>
+        <p:nvSpPr>
+          <p:cNvPr id="5" name="TextBox 4">
+            <a:extLst>
+              <a:ext uri="{FF2B5EF4-FFF2-40B4-BE49-F238E27FC236}">
+                <a16:creationId xmlns:a16="http://schemas.microsoft.com/office/drawing/2014/main" id="{79417E50-B0FC-CDF4-4710-BE6261CC59B0}"/>
+              </a:ext>
+            </a:extLst>
+          </p:cNvPr>
+          <p:cNvSpPr txBox="1"/>
+          <p:nvPr/>
+        </p:nvSpPr>
+        <p:spPr>
+          <a:xfrm>
+            <a:off x="1112520" y="5915110"/>
+            <a:ext cx="10241280" cy="415498"/>
+          </a:xfrm>
+          <a:prstGeom prst="rect">
+            <a:avLst/>
+          </a:prstGeom>
+          <a:noFill/>
+        </p:spPr>
+        <p:txBody>
+          <a:bodyPr wrap="square">
+            <a:spAutoFit/>
+          </a:bodyPr>
+          <a:lstStyle/>
+          <a:p>
+            <a:pPr algn="ctr"/>
+            <a:r>
+              <a:rPr lang="en-US" sz="2100" i="0" dirty="0">
+                <a:solidFill>
+                  <a:srgbClr val="841617"/>
+                </a:solidFill>
+                <a:effectLst/>
+                <a:latin typeface="Fira Sans" panose="020B0503050000020004" pitchFamily="34" charset="0"/>
+              </a:rPr>
+              <a:t>Step 5 should refine the question, not replace it.</a:t>
+            </a:r>
+          </a:p>
+        </p:txBody>
+      </p:sp>
+    </p:spTree>
+    <p:extLst>
+      <p:ext uri="{BB962C8B-B14F-4D97-AF65-F5344CB8AC3E}">
+        <p14:creationId xmlns:p14="http://schemas.microsoft.com/office/powerpoint/2010/main" val="4056655168"/>
+      </p:ext>
+    </p:extLst>
+  </p:cSld>
+  <p:clrMapOvr>
+    <a:masterClrMapping/>
+  </p:clrMapOvr>
+</p:sld>
+</file>
+
+<file path=ppt/slides/slide2.xml><?xml version="1.0" encoding="utf-8"?>
+<p:sld xmlns:a="http://schemas.openxmlformats.org/drawingml/2006/main" xmlns:r="http://schemas.openxmlformats.org/officeDocument/2006/relationships" xmlns:p="http://schemas.openxmlformats.org/presentationml/2006/main">
+  <p:cSld>
+    <p:spTree>
+      <p:nvGrpSpPr>
+        <p:cNvPr id="1" name=""/>
+        <p:cNvGrpSpPr/>
+        <p:nvPr/>
+      </p:nvGrpSpPr>
+      <p:grpSpPr>
+        <a:xfrm>
+          <a:off x="0" y="0"/>
+          <a:ext cx="0" cy="0"/>
+          <a:chOff x="0" y="0"/>
+          <a:chExt cx="0" cy="0"/>
+        </a:xfrm>
+      </p:grpSpPr>
+      <p:sp>
+        <p:nvSpPr>
+          <p:cNvPr id="2" name="Title 1">
+            <a:extLst>
+              <a:ext uri="{FF2B5EF4-FFF2-40B4-BE49-F238E27FC236}">
+                <a16:creationId xmlns:a16="http://schemas.microsoft.com/office/drawing/2014/main" id="{0F7F65DF-1271-C35E-9FF5-418DD75AC49D}"/>
+              </a:ext>
+            </a:extLst>
+          </p:cNvPr>
+          <p:cNvSpPr>
+            <a:spLocks noGrp="1"/>
+          </p:cNvSpPr>
+          <p:nvPr>
+            <p:ph type="title"/>
+          </p:nvPr>
+        </p:nvSpPr>
+        <p:spPr/>
+        <p:txBody>
+          <a:bodyPr>
+            <a:normAutofit/>
+          </a:bodyPr>
+          <a:lstStyle/>
+          <a:p>
+            <a:r>
+              <a:rPr lang="en-US" sz="4400" dirty="0"/>
+              <a:t>Why are we still talking about the “question”?</a:t>
+            </a:r>
+          </a:p>
+        </p:txBody>
+      </p:sp>
+      <p:sp>
+        <p:nvSpPr>
+          <p:cNvPr id="3" name="Text Placeholder 2">
+            <a:extLst>
+              <a:ext uri="{FF2B5EF4-FFF2-40B4-BE49-F238E27FC236}">
+                <a16:creationId xmlns:a16="http://schemas.microsoft.com/office/drawing/2014/main" id="{8BCE6BF1-E5A2-F810-BF8D-B6311ED9A5D4}"/>
+              </a:ext>
+            </a:extLst>
+          </p:cNvPr>
+          <p:cNvSpPr>
+            <a:spLocks noGrp="1"/>
+          </p:cNvSpPr>
+          <p:nvPr>
+            <p:ph type="body" idx="1"/>
+          </p:nvPr>
+        </p:nvSpPr>
+        <p:spPr/>
+        <p:txBody>
+          <a:bodyPr/>
+          <a:lstStyle/>
+          <a:p>
+            <a:endParaRPr lang="en-US"/>
+          </a:p>
+        </p:txBody>
+      </p:sp>
+    </p:spTree>
+    <p:extLst>
+      <p:ext uri="{BB962C8B-B14F-4D97-AF65-F5344CB8AC3E}">
+        <p14:creationId xmlns:p14="http://schemas.microsoft.com/office/powerpoint/2010/main" val="3970962554"/>
+      </p:ext>
+    </p:extLst>
+  </p:cSld>
+  <p:clrMapOvr>
+    <a:masterClrMapping/>
+  </p:clrMapOvr>
+</p:sld>
+</file>
+
+<file path=ppt/slides/slide20.xml><?xml version="1.0" encoding="utf-8"?>
+<p:sld xmlns:a="http://schemas.openxmlformats.org/drawingml/2006/main" xmlns:r="http://schemas.openxmlformats.org/officeDocument/2006/relationships" xmlns:p="http://schemas.openxmlformats.org/presentationml/2006/main">
+  <p:cSld>
+    <p:spTree>
+      <p:nvGrpSpPr>
+        <p:cNvPr id="1" name=""/>
+        <p:cNvGrpSpPr/>
+        <p:nvPr/>
+      </p:nvGrpSpPr>
+      <p:grpSpPr>
+        <a:xfrm>
+          <a:off x="0" y="0"/>
+          <a:ext cx="0" cy="0"/>
+          <a:chOff x="0" y="0"/>
+          <a:chExt cx="0" cy="0"/>
+        </a:xfrm>
+      </p:grpSpPr>
+      <p:sp>
+        <p:nvSpPr>
+          <p:cNvPr id="2" name="Title 1">
+            <a:extLst>
+              <a:ext uri="{FF2B5EF4-FFF2-40B4-BE49-F238E27FC236}">
+                <a16:creationId xmlns:a16="http://schemas.microsoft.com/office/drawing/2014/main" id="{04303C95-9B08-B230-FD40-9ADA7D3DDA60}"/>
+              </a:ext>
+            </a:extLst>
+          </p:cNvPr>
+          <p:cNvSpPr>
+            <a:spLocks noGrp="1"/>
+          </p:cNvSpPr>
+          <p:nvPr>
+            <p:ph type="title"/>
+          </p:nvPr>
+        </p:nvSpPr>
+        <p:spPr/>
+        <p:txBody>
+          <a:bodyPr>
+            <a:normAutofit/>
+          </a:bodyPr>
+          <a:lstStyle/>
+          <a:p>
+            <a:r>
+              <a:rPr lang="en-US" dirty="0"/>
+              <a:t>Exploring the data for patterns</a:t>
+            </a:r>
+          </a:p>
+        </p:txBody>
+      </p:sp>
+      <p:sp>
+        <p:nvSpPr>
+          <p:cNvPr id="3" name="Content Placeholder 2">
+            <a:extLst>
+              <a:ext uri="{FF2B5EF4-FFF2-40B4-BE49-F238E27FC236}">
+                <a16:creationId xmlns:a16="http://schemas.microsoft.com/office/drawing/2014/main" id="{F112E43C-65E3-0788-75F8-EF24FC9A3B60}"/>
+              </a:ext>
+            </a:extLst>
+          </p:cNvPr>
+          <p:cNvSpPr>
+            <a:spLocks noGrp="1"/>
+          </p:cNvSpPr>
+          <p:nvPr>
+            <p:ph idx="1"/>
+          </p:nvPr>
+        </p:nvSpPr>
+        <p:spPr/>
+        <p:txBody>
+          <a:bodyPr/>
+          <a:lstStyle/>
+          <a:p>
+            <a:r>
+              <a:rPr lang="en-US" b="1" dirty="0"/>
+              <a:t>Exploratory analysis</a:t>
+            </a:r>
+            <a:r>
+              <a:rPr lang="en-US" dirty="0"/>
+              <a:t> is a legitimate analytical approach used to identify patterns, relationships, and potential questions.</a:t>
+            </a:r>
+          </a:p>
+          <a:p>
+            <a:endParaRPr lang="en-US" dirty="0"/>
+          </a:p>
+          <a:p>
+            <a:r>
+              <a:rPr lang="en-US" dirty="0"/>
+              <a:t>Findings discovered through exploration should </a:t>
+            </a:r>
+            <a:r>
+              <a:rPr lang="en-US" b="1" dirty="0"/>
+              <a:t>tested with new data </a:t>
+            </a:r>
+            <a:r>
+              <a:rPr lang="en-US" dirty="0"/>
+              <a:t>before making stronger explanatory, predictive, or prescriptive claims.</a:t>
+            </a:r>
+          </a:p>
+        </p:txBody>
+      </p:sp>
+    </p:spTree>
+    <p:extLst>
+      <p:ext uri="{BB962C8B-B14F-4D97-AF65-F5344CB8AC3E}">
+        <p14:creationId xmlns:p14="http://schemas.microsoft.com/office/powerpoint/2010/main" val="2941368931"/>
+      </p:ext>
+    </p:extLst>
+  </p:cSld>
+  <p:clrMapOvr>
+    <a:masterClrMapping/>
+  </p:clrMapOvr>
+</p:sld>
+</file>
+
+<file path=ppt/slides/slide21.xml><?xml version="1.0" encoding="utf-8"?>
+<p:sld xmlns:a="http://schemas.openxmlformats.org/drawingml/2006/main" xmlns:r="http://schemas.openxmlformats.org/officeDocument/2006/relationships" xmlns:p="http://schemas.openxmlformats.org/presentationml/2006/main">
+  <p:cSld>
+    <p:spTree>
+      <p:nvGrpSpPr>
+        <p:cNvPr id="1" name=""/>
+        <p:cNvGrpSpPr/>
+        <p:nvPr/>
+      </p:nvGrpSpPr>
+      <p:grpSpPr>
+        <a:xfrm>
+          <a:off x="0" y="0"/>
+          <a:ext cx="0" cy="0"/>
+          <a:chOff x="0" y="0"/>
+          <a:chExt cx="0" cy="0"/>
+        </a:xfrm>
+      </p:grpSpPr>
+      <p:sp>
+        <p:nvSpPr>
+          <p:cNvPr id="2" name="Title 1">
+            <a:extLst>
+              <a:ext uri="{FF2B5EF4-FFF2-40B4-BE49-F238E27FC236}">
+                <a16:creationId xmlns:a16="http://schemas.microsoft.com/office/drawing/2014/main" id="{69CC56F3-E5F5-2C0D-E9EE-7E798A8816BF}"/>
+              </a:ext>
+            </a:extLst>
+          </p:cNvPr>
+          <p:cNvSpPr>
+            <a:spLocks noGrp="1"/>
+          </p:cNvSpPr>
+          <p:nvPr>
+            <p:ph type="title"/>
+          </p:nvPr>
+        </p:nvSpPr>
+        <p:spPr/>
+        <p:txBody>
+          <a:bodyPr/>
+          <a:lstStyle/>
+          <a:p>
+            <a:r>
+              <a:rPr lang="en-US" dirty="0"/>
+              <a:t>CS1: Establish the Project Direction</a:t>
+            </a:r>
+          </a:p>
+        </p:txBody>
+      </p:sp>
+      <p:sp>
+        <p:nvSpPr>
+          <p:cNvPr id="3" name="Content Placeholder 2">
+            <a:extLst>
+              <a:ext uri="{FF2B5EF4-FFF2-40B4-BE49-F238E27FC236}">
+                <a16:creationId xmlns:a16="http://schemas.microsoft.com/office/drawing/2014/main" id="{4D611F32-8055-42F6-D53F-1374F1587E79}"/>
+              </a:ext>
+            </a:extLst>
+          </p:cNvPr>
+          <p:cNvSpPr>
+            <a:spLocks noGrp="1"/>
+          </p:cNvSpPr>
+          <p:nvPr>
+            <p:ph idx="1"/>
+          </p:nvPr>
+        </p:nvSpPr>
+        <p:spPr/>
+        <p:txBody>
+          <a:bodyPr/>
+          <a:lstStyle/>
+          <a:p>
+            <a:pPr marL="0" indent="0">
+              <a:buNone/>
+            </a:pPr>
+            <a:r>
+              <a:rPr lang="en-US" dirty="0"/>
+              <a:t>In this you will identify:</a:t>
+            </a:r>
+          </a:p>
+          <a:p>
+            <a:pPr marL="914400" lvl="1" indent="-457200">
+              <a:buFont typeface="+mj-lt"/>
+              <a:buAutoNum type="arabicPeriod"/>
+            </a:pPr>
+            <a:r>
+              <a:rPr lang="en-US" dirty="0"/>
+              <a:t>A sport and domain that interests you</a:t>
+            </a:r>
+          </a:p>
+          <a:p>
+            <a:pPr marL="914400" lvl="1" indent="-457200">
+              <a:buFont typeface="+mj-lt"/>
+              <a:buAutoNum type="arabicPeriod"/>
+            </a:pPr>
+            <a:r>
+              <a:rPr lang="en-US" dirty="0"/>
+              <a:t>A real observation, concern, or decision</a:t>
+            </a:r>
+          </a:p>
+          <a:p>
+            <a:pPr marL="914400" lvl="1" indent="-457200">
+              <a:buFont typeface="+mj-lt"/>
+              <a:buAutoNum type="arabicPeriod"/>
+            </a:pPr>
+            <a:r>
+              <a:rPr lang="en-US" dirty="0"/>
+              <a:t>Who would use the answer</a:t>
+            </a:r>
+          </a:p>
+          <a:p>
+            <a:pPr marL="914400" lvl="1" indent="-457200">
+              <a:buFont typeface="+mj-lt"/>
+              <a:buAutoNum type="arabicPeriod"/>
+            </a:pPr>
+            <a:r>
+              <a:rPr lang="en-US" dirty="0"/>
+              <a:t>An initial analytical question</a:t>
+            </a:r>
+          </a:p>
+          <a:p>
+            <a:pPr marL="914400" lvl="1" indent="-457200">
+              <a:buFont typeface="+mj-lt"/>
+              <a:buAutoNum type="arabicPeriod"/>
+            </a:pPr>
+            <a:r>
+              <a:rPr lang="en-US" dirty="0"/>
+              <a:t>The ideal evidence needed</a:t>
+            </a:r>
+          </a:p>
+          <a:p>
+            <a:pPr marL="914400" lvl="1" indent="-457200">
+              <a:buFont typeface="+mj-lt"/>
+              <a:buAutoNum type="arabicPeriod"/>
+            </a:pPr>
+            <a:r>
+              <a:rPr lang="en-US" dirty="0"/>
+              <a:t>Data sources that may be feasible</a:t>
+            </a:r>
+          </a:p>
+          <a:p>
+            <a:pPr marL="0" indent="0">
+              <a:buNone/>
+            </a:pPr>
+            <a:endParaRPr lang="en-US" dirty="0"/>
+          </a:p>
+          <a:p>
+            <a:pPr marL="0" indent="0">
+              <a:buNone/>
+            </a:pPr>
+            <a:r>
+              <a:rPr lang="en-US" dirty="0"/>
+              <a:t>Keep the concern (step 2) and the question (step 4) separate</a:t>
+            </a:r>
+          </a:p>
+          <a:p>
+            <a:pPr marL="0" indent="0">
+              <a:buNone/>
+            </a:pPr>
+            <a:endParaRPr lang="en-US" dirty="0"/>
+          </a:p>
+          <a:p>
+            <a:endParaRPr lang="en-US" dirty="0"/>
+          </a:p>
+        </p:txBody>
+      </p:sp>
+    </p:spTree>
+    <p:extLst>
+      <p:ext uri="{BB962C8B-B14F-4D97-AF65-F5344CB8AC3E}">
+        <p14:creationId xmlns:p14="http://schemas.microsoft.com/office/powerpoint/2010/main" val="1920985699"/>
+      </p:ext>
+    </p:extLst>
+  </p:cSld>
+  <p:clrMapOvr>
+    <a:masterClrMapping/>
+  </p:clrMapOvr>
+</p:sld>
+</file>
+
+<file path=ppt/slides/slide22.xml><?xml version="1.0" encoding="utf-8"?>
+<p:sld xmlns:a="http://schemas.openxmlformats.org/drawingml/2006/main" xmlns:r="http://schemas.openxmlformats.org/officeDocument/2006/relationships" xmlns:p="http://schemas.openxmlformats.org/presentationml/2006/main">
+  <p:cSld>
+    <p:spTree>
+      <p:nvGrpSpPr>
+        <p:cNvPr id="1" name=""/>
+        <p:cNvGrpSpPr/>
+        <p:nvPr/>
+      </p:nvGrpSpPr>
+      <p:grpSpPr>
+        <a:xfrm>
+          <a:off x="0" y="0"/>
+          <a:ext cx="0" cy="0"/>
+          <a:chOff x="0" y="0"/>
+          <a:chExt cx="0" cy="0"/>
+        </a:xfrm>
+      </p:grpSpPr>
+      <p:sp>
+        <p:nvSpPr>
+          <p:cNvPr id="2" name="Title 1">
+            <a:extLst>
+              <a:ext uri="{FF2B5EF4-FFF2-40B4-BE49-F238E27FC236}">
+                <a16:creationId xmlns:a16="http://schemas.microsoft.com/office/drawing/2014/main" id="{FBFD6EB5-FEC2-47DE-01A3-F0E170543F3C}"/>
+              </a:ext>
+            </a:extLst>
+          </p:cNvPr>
+          <p:cNvSpPr>
+            <a:spLocks noGrp="1"/>
+          </p:cNvSpPr>
+          <p:nvPr>
+            <p:ph type="title"/>
+          </p:nvPr>
+        </p:nvSpPr>
+        <p:spPr/>
+        <p:txBody>
+          <a:bodyPr>
+            <a:normAutofit/>
+          </a:bodyPr>
+          <a:lstStyle/>
+          <a:p>
+            <a:r>
+              <a:rPr lang="en-GB"/>
+              <a:t>Summary &amp; Looking Ahead</a:t>
+            </a:r>
+            <a:endParaRPr lang="en-US"/>
+          </a:p>
+        </p:txBody>
+      </p:sp>
+      <p:sp>
+        <p:nvSpPr>
+          <p:cNvPr id="3" name="Content Placeholder 2">
+            <a:extLst>
+              <a:ext uri="{FF2B5EF4-FFF2-40B4-BE49-F238E27FC236}">
+                <a16:creationId xmlns:a16="http://schemas.microsoft.com/office/drawing/2014/main" id="{B7781857-C6C4-CF29-7D9F-C7FCD74ECA0D}"/>
+              </a:ext>
+            </a:extLst>
+          </p:cNvPr>
+          <p:cNvSpPr>
+            <a:spLocks noGrp="1"/>
+          </p:cNvSpPr>
+          <p:nvPr>
+            <p:ph idx="1"/>
+          </p:nvPr>
+        </p:nvSpPr>
+        <p:spPr/>
+        <p:txBody>
+          <a:bodyPr/>
+          <a:lstStyle/>
+          <a:p>
+            <a:pPr lvl="0"/>
+            <a:r>
+              <a:rPr lang="en-US" dirty="0"/>
+              <a:t>Start with a sport concern or decision.</a:t>
+            </a:r>
+          </a:p>
+          <a:p>
+            <a:pPr lvl="0"/>
+            <a:r>
+              <a:rPr lang="en-US" dirty="0"/>
+              <a:t>Define the outcome, comparison, and context.</a:t>
+            </a:r>
+          </a:p>
+          <a:p>
+            <a:pPr lvl="0"/>
+            <a:r>
+              <a:rPr lang="en-US" dirty="0"/>
+              <a:t>Use causal language only when the evidence supports it.</a:t>
+            </a:r>
+          </a:p>
+          <a:p>
+            <a:pPr lvl="0"/>
+            <a:r>
+              <a:rPr lang="en-US" dirty="0"/>
+              <a:t>Let feasibility refine the scope without replacing the purpose.</a:t>
+            </a:r>
+          </a:p>
+          <a:p>
+            <a:pPr lvl="0"/>
+            <a:r>
+              <a:rPr lang="en-US" dirty="0"/>
+              <a:t>Treat limitations as part of the answer.</a:t>
+            </a:r>
+          </a:p>
+          <a:p>
+            <a:r>
+              <a:rPr lang="en-US" dirty="0"/>
+              <a:t>Next: at-home case study (generate question and identify dataset)</a:t>
+            </a:r>
+          </a:p>
+          <a:p>
+            <a:endParaRPr lang="en-US" dirty="0"/>
+          </a:p>
+        </p:txBody>
+      </p:sp>
+    </p:spTree>
+    <p:extLst>
+      <p:ext uri="{BB962C8B-B14F-4D97-AF65-F5344CB8AC3E}">
+        <p14:creationId xmlns:p14="http://schemas.microsoft.com/office/powerpoint/2010/main" val="2206692154"/>
+      </p:ext>
+    </p:extLst>
+  </p:cSld>
+  <p:clrMapOvr>
+    <a:masterClrMapping/>
+  </p:clrMapOvr>
+</p:sld>
+</file>
+
+<file path=ppt/slides/slide3.xml><?xml version="1.0" encoding="utf-8"?>
 <p:sld xmlns:a="http://schemas.openxmlformats.org/drawingml/2006/main" xmlns:r="http://schemas.openxmlformats.org/officeDocument/2006/relationships" xmlns:p="http://schemas.openxmlformats.org/presentationml/2006/main">
   <p:cSld>
     <p:spTree>
@@ -6695,7 +8348,7 @@
 </p:sld>
 </file>
 
-<file path=ppt/slides/slide15.xml><?xml version="1.0" encoding="utf-8"?>
+<file path=ppt/slides/slide4.xml><?xml version="1.0" encoding="utf-8"?>
 <p:sld xmlns:a="http://schemas.openxmlformats.org/drawingml/2006/main" xmlns:r="http://schemas.openxmlformats.org/officeDocument/2006/relationships" xmlns:p="http://schemas.openxmlformats.org/presentationml/2006/main">
   <p:cSld>
     <p:spTree>
@@ -6717,7 +8370,7 @@
           <p:cNvPr id="2" name="Title 1">
             <a:extLst>
               <a:ext uri="{FF2B5EF4-FFF2-40B4-BE49-F238E27FC236}">
-                <a16:creationId xmlns:a16="http://schemas.microsoft.com/office/drawing/2014/main" id="{B81B6E85-EBC7-CD81-C65D-B8A10CED0D22}"/>
+                <a16:creationId xmlns:a16="http://schemas.microsoft.com/office/drawing/2014/main" id="{2B1C6E7E-C9E0-7AAB-9679-0FAEFE2E8D91}"/>
               </a:ext>
             </a:extLst>
           </p:cNvPr>
@@ -6730,14 +8383,12 @@
         </p:nvSpPr>
         <p:spPr/>
         <p:txBody>
-          <a:bodyPr>
-            <a:normAutofit/>
-          </a:bodyPr>
-          <a:lstStyle/>
-          <a:p>
-            <a:r>
-              <a:rPr lang="en-US" dirty="0"/>
-              <a:t>Available Data Can Rewrite Questions</a:t>
+          <a:bodyPr/>
+          <a:lstStyle/>
+          <a:p>
+            <a:r>
+              <a:rPr lang="en-US" dirty="0"/>
+              <a:t>The Streetlight Effect</a:t>
             </a:r>
           </a:p>
         </p:txBody>
@@ -6747,7 +8398,7 @@
           <p:cNvPr id="3" name="Content Placeholder 2">
             <a:extLst>
               <a:ext uri="{FF2B5EF4-FFF2-40B4-BE49-F238E27FC236}">
-                <a16:creationId xmlns:a16="http://schemas.microsoft.com/office/drawing/2014/main" id="{3B6E6309-FF70-EF25-84E6-99E073817CEE}"/>
+                <a16:creationId xmlns:a16="http://schemas.microsoft.com/office/drawing/2014/main" id="{9208EECE-42E6-357A-3515-C3FFC2720C33}"/>
               </a:ext>
             </a:extLst>
           </p:cNvPr>
@@ -6767,119 +8418,26 @@
               <a:buNone/>
             </a:pPr>
             <a:r>
-              <a:rPr lang="en-US" dirty="0"/>
-              <a:t>Original concern</a:t>
-            </a:r>
-          </a:p>
-          <a:p>
-            <a:pPr lvl="1"/>
-            <a:r>
-              <a:rPr lang="en-US" dirty="0"/>
-              <a:t>Why does the team struggle to create good shots against zone defense?</a:t>
-            </a:r>
-          </a:p>
-          <a:p>
-            <a:pPr lvl="1"/>
-            <a:endParaRPr lang="en-US" dirty="0"/>
-          </a:p>
-          <a:p>
-            <a:pPr marL="0" indent="0">
-              <a:buNone/>
-            </a:pPr>
-            <a:r>
-              <a:rPr lang="en-US" dirty="0"/>
-              <a:t>Available spreadsheet</a:t>
-            </a:r>
-          </a:p>
-          <a:p>
-            <a:pPr lvl="1"/>
-            <a:r>
-              <a:rPr lang="en-US" dirty="0"/>
-              <a:t>Points, rebounds, assists, and minutes</a:t>
-            </a:r>
-          </a:p>
-          <a:p>
-            <a:pPr lvl="1"/>
-            <a:endParaRPr lang="en-US" dirty="0"/>
-          </a:p>
-          <a:p>
-            <a:pPr marL="0" indent="0">
-              <a:buNone/>
-            </a:pPr>
-            <a:r>
-              <a:rPr lang="en-US" dirty="0"/>
-              <a:t>Convenient replacement question</a:t>
-            </a:r>
-          </a:p>
-          <a:p>
-            <a:pPr lvl="1"/>
-            <a:r>
-              <a:rPr lang="en-US" dirty="0"/>
-              <a:t>Who scores the fewest points?</a:t>
-            </a:r>
-          </a:p>
-          <a:p>
-            <a:endParaRPr lang="en-US" dirty="0"/>
-          </a:p>
-        </p:txBody>
-      </p:sp>
-      <p:sp>
-        <p:nvSpPr>
-          <p:cNvPr id="5" name="TextBox 4">
-            <a:extLst>
-              <a:ext uri="{FF2B5EF4-FFF2-40B4-BE49-F238E27FC236}">
-                <a16:creationId xmlns:a16="http://schemas.microsoft.com/office/drawing/2014/main" id="{A61DB93B-31A9-49F1-6EC0-14F12A4B9A4D}"/>
-              </a:ext>
-            </a:extLst>
-          </p:cNvPr>
-          <p:cNvSpPr txBox="1"/>
-          <p:nvPr/>
-        </p:nvSpPr>
-        <p:spPr>
-          <a:xfrm>
-            <a:off x="1112520" y="5529347"/>
-            <a:ext cx="10241280" cy="415498"/>
-          </a:xfrm>
-          <a:prstGeom prst="rect">
-            <a:avLst/>
-          </a:prstGeom>
-          <a:noFill/>
-        </p:spPr>
-        <p:txBody>
-          <a:bodyPr wrap="square">
-            <a:spAutoFit/>
-          </a:bodyPr>
-          <a:lstStyle/>
-          <a:p>
-            <a:r>
-              <a:rPr lang="en-US" sz="2100" i="0" dirty="0">
-                <a:solidFill>
-                  <a:srgbClr val="841617"/>
-                </a:solidFill>
-                <a:effectLst/>
-                <a:latin typeface="Fira Sans" panose="020B0503050000020004" pitchFamily="34" charset="0"/>
-              </a:rPr>
-              <a:t>The replacement is answerable, but it </a:t>
-            </a:r>
-            <a:r>
-              <a:rPr lang="en-US" sz="2100" b="1" i="0" dirty="0">
-                <a:solidFill>
-                  <a:srgbClr val="841617"/>
-                </a:solidFill>
-                <a:effectLst/>
-                <a:latin typeface="Fira Sans" panose="020B0503050000020004" pitchFamily="34" charset="0"/>
-              </a:rPr>
-              <a:t>does not answer </a:t>
-            </a:r>
-            <a:r>
-              <a:rPr lang="en-US" sz="2100" i="0" dirty="0">
-                <a:solidFill>
-                  <a:srgbClr val="841617"/>
-                </a:solidFill>
-                <a:effectLst/>
-                <a:latin typeface="Fira Sans" panose="020B0503050000020004" pitchFamily="34" charset="0"/>
-              </a:rPr>
-              <a:t>the original concern.</a:t>
+              <a:rPr lang="en-GB" dirty="0"/>
+              <a:t>When you start with the data, you may:</a:t>
+            </a:r>
+          </a:p>
+          <a:p>
+            <a:r>
+              <a:rPr lang="en-GB" dirty="0"/>
+              <a:t>Gravitate  toward variables that are already collected.</a:t>
+            </a:r>
+          </a:p>
+          <a:p>
+            <a:r>
+              <a:rPr lang="en-GB" dirty="0"/>
+              <a:t>Miss important factors outside the dataset.</a:t>
+            </a:r>
+          </a:p>
+          <a:p>
+            <a:r>
+              <a:rPr lang="en-GB" dirty="0"/>
+              <a:t>Produce technically correct analysis that does not address actual performance problems.</a:t>
             </a:r>
             <a:endParaRPr lang="en-US" dirty="0"/>
           </a:p>
@@ -6888,7 +8446,7 @@
     </p:spTree>
     <p:extLst>
       <p:ext uri="{BB962C8B-B14F-4D97-AF65-F5344CB8AC3E}">
-        <p14:creationId xmlns:p14="http://schemas.microsoft.com/office/powerpoint/2010/main" val="222991542"/>
+        <p14:creationId xmlns:p14="http://schemas.microsoft.com/office/powerpoint/2010/main" val="735909245"/>
       </p:ext>
     </p:extLst>
   </p:cSld>
@@ -6898,261 +8456,7 @@
 </p:sld>
 </file>
 
-<file path=ppt/slides/slide16.xml><?xml version="1.0" encoding="utf-8"?>
-<p:sld xmlns:a="http://schemas.openxmlformats.org/drawingml/2006/main" xmlns:r="http://schemas.openxmlformats.org/officeDocument/2006/relationships" xmlns:p="http://schemas.openxmlformats.org/presentationml/2006/main">
-  <p:cSld>
-    <p:spTree>
-      <p:nvGrpSpPr>
-        <p:cNvPr id="1" name=""/>
-        <p:cNvGrpSpPr/>
-        <p:nvPr/>
-      </p:nvGrpSpPr>
-      <p:grpSpPr>
-        <a:xfrm>
-          <a:off x="0" y="0"/>
-          <a:ext cx="0" cy="0"/>
-          <a:chOff x="0" y="0"/>
-          <a:chExt cx="0" cy="0"/>
-        </a:xfrm>
-      </p:grpSpPr>
-      <p:sp>
-        <p:nvSpPr>
-          <p:cNvPr id="2" name="Title 1">
-            <a:extLst>
-              <a:ext uri="{FF2B5EF4-FFF2-40B4-BE49-F238E27FC236}">
-                <a16:creationId xmlns:a16="http://schemas.microsoft.com/office/drawing/2014/main" id="{E24D6458-5EC0-A179-B83C-16BDA007C0F4}"/>
-              </a:ext>
-            </a:extLst>
-          </p:cNvPr>
-          <p:cNvSpPr>
-            <a:spLocks noGrp="1"/>
-          </p:cNvSpPr>
-          <p:nvPr>
-            <p:ph type="title"/>
-          </p:nvPr>
-        </p:nvSpPr>
-        <p:spPr/>
-        <p:txBody>
-          <a:bodyPr>
-            <a:normAutofit fontScale="90000"/>
-          </a:bodyPr>
-          <a:lstStyle/>
-          <a:p>
-            <a:r>
-              <a:rPr lang="en-US" dirty="0"/>
-              <a:t>Data Availability Matters (But It Should Not Lead)</a:t>
-            </a:r>
-          </a:p>
-        </p:txBody>
-      </p:sp>
-      <p:sp>
-        <p:nvSpPr>
-          <p:cNvPr id="3" name="Content Placeholder 2">
-            <a:extLst>
-              <a:ext uri="{FF2B5EF4-FFF2-40B4-BE49-F238E27FC236}">
-                <a16:creationId xmlns:a16="http://schemas.microsoft.com/office/drawing/2014/main" id="{3003A133-610D-D59B-4AD8-4F0FF82C568D}"/>
-              </a:ext>
-            </a:extLst>
-          </p:cNvPr>
-          <p:cNvSpPr>
-            <a:spLocks noGrp="1"/>
-          </p:cNvSpPr>
-          <p:nvPr>
-            <p:ph idx="1"/>
-          </p:nvPr>
-        </p:nvSpPr>
-        <p:spPr/>
-        <p:txBody>
-          <a:bodyPr/>
-          <a:lstStyle/>
-          <a:p>
-            <a:pPr marL="0" indent="0">
-              <a:buNone/>
-            </a:pPr>
-            <a:r>
-              <a:rPr lang="en-US" dirty="0"/>
-              <a:t>Practical Steps:</a:t>
-            </a:r>
-          </a:p>
-          <a:p>
-            <a:pPr marL="514350" lvl="0" indent="-514350">
-              <a:buFont typeface="+mj-lt"/>
-              <a:buAutoNum type="arabicPeriod"/>
-            </a:pPr>
-            <a:r>
-              <a:rPr lang="en-US" b="1" dirty="0"/>
-              <a:t>Define</a:t>
-            </a:r>
-            <a:r>
-              <a:rPr lang="en-US" dirty="0"/>
-              <a:t> the sport </a:t>
-            </a:r>
-            <a:r>
-              <a:rPr lang="en-US" b="1" dirty="0"/>
-              <a:t>concern</a:t>
-            </a:r>
-            <a:r>
-              <a:rPr lang="en-US" dirty="0"/>
-              <a:t> and </a:t>
-            </a:r>
-            <a:r>
-              <a:rPr lang="en-US" b="1" dirty="0"/>
-              <a:t>decision</a:t>
-            </a:r>
-            <a:r>
-              <a:rPr lang="en-US" dirty="0"/>
-              <a:t>.</a:t>
-            </a:r>
-          </a:p>
-          <a:p>
-            <a:pPr marL="514350" lvl="0" indent="-514350">
-              <a:buFont typeface="+mj-lt"/>
-              <a:buAutoNum type="arabicPeriod"/>
-            </a:pPr>
-            <a:r>
-              <a:rPr lang="en-US" dirty="0"/>
-              <a:t>Write the </a:t>
-            </a:r>
-            <a:r>
-              <a:rPr lang="en-US" b="1" dirty="0"/>
-              <a:t>ideal question</a:t>
-            </a:r>
-            <a:r>
-              <a:rPr lang="en-US" dirty="0"/>
-              <a:t>.</a:t>
-            </a:r>
-          </a:p>
-          <a:p>
-            <a:pPr marL="514350" lvl="0" indent="-514350">
-              <a:buFont typeface="+mj-lt"/>
-              <a:buAutoNum type="arabicPeriod"/>
-            </a:pPr>
-            <a:r>
-              <a:rPr lang="en-US" b="1" dirty="0"/>
-              <a:t>Identify the evidence </a:t>
-            </a:r>
-            <a:r>
-              <a:rPr lang="en-US" dirty="0"/>
-              <a:t>the question requires.</a:t>
-            </a:r>
-          </a:p>
-          <a:p>
-            <a:pPr marL="514350" lvl="0" indent="-514350">
-              <a:buFont typeface="+mj-lt"/>
-              <a:buAutoNum type="arabicPeriod"/>
-            </a:pPr>
-            <a:r>
-              <a:rPr lang="en-US" b="1" dirty="0"/>
-              <a:t>Inspect</a:t>
-            </a:r>
-            <a:r>
-              <a:rPr lang="en-US" dirty="0"/>
-              <a:t> what data are actually available.</a:t>
-            </a:r>
-          </a:p>
-          <a:p>
-            <a:pPr marL="514350" lvl="0" indent="-514350">
-              <a:buFont typeface="+mj-lt"/>
-              <a:buAutoNum type="arabicPeriod"/>
-            </a:pPr>
-            <a:r>
-              <a:rPr lang="en-US" dirty="0"/>
-              <a:t>Revise the </a:t>
-            </a:r>
-            <a:r>
-              <a:rPr lang="en-US" b="1" dirty="0"/>
-              <a:t>scope</a:t>
-            </a:r>
-            <a:r>
-              <a:rPr lang="en-US" dirty="0"/>
-              <a:t> without changing the question's purpose.</a:t>
-            </a:r>
-          </a:p>
-          <a:p>
-            <a:pPr marL="514350" lvl="0" indent="-514350">
-              <a:buFont typeface="+mj-lt"/>
-              <a:buAutoNum type="arabicPeriod"/>
-            </a:pPr>
-            <a:r>
-              <a:rPr lang="en-US" dirty="0"/>
-              <a:t>State what the </a:t>
-            </a:r>
-            <a:r>
-              <a:rPr lang="en-US" b="1" dirty="0"/>
-              <a:t>available data cannot establish</a:t>
-            </a:r>
-            <a:r>
-              <a:rPr lang="en-US" dirty="0"/>
-              <a:t>.</a:t>
-            </a:r>
-          </a:p>
-          <a:p>
-            <a:pPr marL="0" indent="0">
-              <a:buNone/>
-            </a:pPr>
-            <a:endParaRPr lang="en-US" dirty="0"/>
-          </a:p>
-          <a:p>
-            <a:endParaRPr lang="en-US" dirty="0"/>
-          </a:p>
-        </p:txBody>
-      </p:sp>
-      <p:sp>
-        <p:nvSpPr>
-          <p:cNvPr id="5" name="TextBox 4">
-            <a:extLst>
-              <a:ext uri="{FF2B5EF4-FFF2-40B4-BE49-F238E27FC236}">
-                <a16:creationId xmlns:a16="http://schemas.microsoft.com/office/drawing/2014/main" id="{79417E50-B0FC-CDF4-4710-BE6261CC59B0}"/>
-              </a:ext>
-            </a:extLst>
-          </p:cNvPr>
-          <p:cNvSpPr txBox="1"/>
-          <p:nvPr/>
-        </p:nvSpPr>
-        <p:spPr>
-          <a:xfrm>
-            <a:off x="1112520" y="5915110"/>
-            <a:ext cx="10241280" cy="415498"/>
-          </a:xfrm>
-          <a:prstGeom prst="rect">
-            <a:avLst/>
-          </a:prstGeom>
-          <a:noFill/>
-        </p:spPr>
-        <p:txBody>
-          <a:bodyPr wrap="square">
-            <a:spAutoFit/>
-          </a:bodyPr>
-          <a:lstStyle/>
-          <a:p>
-            <a:pPr algn="ctr"/>
-            <a:r>
-              <a:rPr lang="en-US" sz="2100" i="0" dirty="0">
-                <a:solidFill>
-                  <a:srgbClr val="841617"/>
-                </a:solidFill>
-                <a:effectLst/>
-                <a:latin typeface="Fira Sans" panose="020B0503050000020004" pitchFamily="34" charset="0"/>
-              </a:rPr>
-              <a:t>Step 5 should refine the question, not replace it.</a:t>
-            </a:r>
-          </a:p>
-        </p:txBody>
-      </p:sp>
-    </p:spTree>
-    <p:extLst>
-      <p:ext uri="{BB962C8B-B14F-4D97-AF65-F5344CB8AC3E}">
-        <p14:creationId xmlns:p14="http://schemas.microsoft.com/office/powerpoint/2010/main" val="4056655168"/>
-      </p:ext>
-    </p:extLst>
-  </p:cSld>
-  <p:clrMapOvr>
-    <a:masterClrMapping/>
-  </p:clrMapOvr>
-</p:sld>
-</file>
-
-<file path=ppt/slides/slide17.xml><?xml version="1.0" encoding="utf-8"?>
+<file path=ppt/slides/slide5.xml><?xml version="1.0" encoding="utf-8"?>
 <p:sld xmlns:a="http://schemas.openxmlformats.org/drawingml/2006/main" xmlns:r="http://schemas.openxmlformats.org/officeDocument/2006/relationships" xmlns:p="http://schemas.openxmlformats.org/presentationml/2006/main">
   <p:cSld>
     <p:spTree>
@@ -7280,7 +8584,7 @@
 </p:sld>
 </file>
 
-<file path=ppt/slides/slide18.xml><?xml version="1.0" encoding="utf-8"?>
+<file path=ppt/slides/slide6.xml><?xml version="1.0" encoding="utf-8"?>
 <p:sld xmlns:a="http://schemas.openxmlformats.org/drawingml/2006/main" xmlns:r="http://schemas.openxmlformats.org/officeDocument/2006/relationships" xmlns:p="http://schemas.openxmlformats.org/presentationml/2006/main">
   <p:cSld>
     <p:spTree>
@@ -7370,24 +8674,24 @@
             <a:endParaRPr lang="en-US" dirty="0"/>
           </a:p>
           <a:p>
-            <a:pPr marL="0" indent="0">
+            <a:pPr marL="0" indent="0" algn="ctr">
+              <a:buNone/>
+            </a:pPr>
+            <a:r>
+              <a:rPr lang="en-US" dirty="0"/>
+              <a:t>“We have GPS data. What relationships can we find?”</a:t>
+            </a:r>
+          </a:p>
+          <a:p>
+            <a:pPr marL="0" indent="0" algn="ctr">
               <a:buNone/>
             </a:pPr>
             <a:endParaRPr lang="en-US" dirty="0"/>
           </a:p>
           <a:p>
-            <a:pPr marL="0" indent="0" algn="ctr">
-              <a:buNone/>
-            </a:pPr>
-            <a:r>
-              <a:rPr lang="en-US" dirty="0"/>
-              <a:t>“We have GPS data. What relationships can we find?”</a:t>
-            </a:r>
-          </a:p>
-          <a:p>
-            <a:r>
-              <a:rPr lang="en-US" dirty="0"/>
-              <a:t>Statistically likely that you will find a significant relationship</a:t>
+            <a:r>
+              <a:rPr lang="en-US" dirty="0"/>
+              <a:t>If enough relationships are tested, some are likely to appear statistically significant by chance.</a:t>
             </a:r>
           </a:p>
         </p:txBody>
@@ -7396,1733 +8700,6 @@
     <p:extLst>
       <p:ext uri="{BB962C8B-B14F-4D97-AF65-F5344CB8AC3E}">
         <p14:creationId xmlns:p14="http://schemas.microsoft.com/office/powerpoint/2010/main" val="2300462859"/>
-      </p:ext>
-    </p:extLst>
-  </p:cSld>
-  <p:clrMapOvr>
-    <a:masterClrMapping/>
-  </p:clrMapOvr>
-</p:sld>
-</file>
-
-<file path=ppt/slides/slide19.xml><?xml version="1.0" encoding="utf-8"?>
-<p:sld xmlns:a="http://schemas.openxmlformats.org/drawingml/2006/main" xmlns:r="http://schemas.openxmlformats.org/officeDocument/2006/relationships" xmlns:p="http://schemas.openxmlformats.org/presentationml/2006/main">
-  <p:cSld>
-    <p:spTree>
-      <p:nvGrpSpPr>
-        <p:cNvPr id="1" name=""/>
-        <p:cNvGrpSpPr/>
-        <p:nvPr/>
-      </p:nvGrpSpPr>
-      <p:grpSpPr>
-        <a:xfrm>
-          <a:off x="0" y="0"/>
-          <a:ext cx="0" cy="0"/>
-          <a:chOff x="0" y="0"/>
-          <a:chExt cx="0" cy="0"/>
-        </a:xfrm>
-      </p:grpSpPr>
-      <p:sp>
-        <p:nvSpPr>
-          <p:cNvPr id="2" name="Title 1">
-            <a:extLst>
-              <a:ext uri="{FF2B5EF4-FFF2-40B4-BE49-F238E27FC236}">
-                <a16:creationId xmlns:a16="http://schemas.microsoft.com/office/drawing/2014/main" id="{04303C95-9B08-B230-FD40-9ADA7D3DDA60}"/>
-              </a:ext>
-            </a:extLst>
-          </p:cNvPr>
-          <p:cNvSpPr>
-            <a:spLocks noGrp="1"/>
-          </p:cNvSpPr>
-          <p:nvPr>
-            <p:ph type="title"/>
-          </p:nvPr>
-        </p:nvSpPr>
-        <p:spPr/>
-        <p:txBody>
-          <a:bodyPr/>
-          <a:lstStyle/>
-          <a:p>
-            <a:r>
-              <a:rPr lang="en-US" dirty="0"/>
-              <a:t>Exploratory Analysis</a:t>
-            </a:r>
-          </a:p>
-        </p:txBody>
-      </p:sp>
-      <p:sp>
-        <p:nvSpPr>
-          <p:cNvPr id="3" name="Content Placeholder 2">
-            <a:extLst>
-              <a:ext uri="{FF2B5EF4-FFF2-40B4-BE49-F238E27FC236}">
-                <a16:creationId xmlns:a16="http://schemas.microsoft.com/office/drawing/2014/main" id="{F112E43C-65E3-0788-75F8-EF24FC9A3B60}"/>
-              </a:ext>
-            </a:extLst>
-          </p:cNvPr>
-          <p:cNvSpPr>
-            <a:spLocks noGrp="1"/>
-          </p:cNvSpPr>
-          <p:nvPr>
-            <p:ph idx="1"/>
-          </p:nvPr>
-        </p:nvSpPr>
-        <p:spPr/>
-        <p:txBody>
-          <a:bodyPr/>
-          <a:lstStyle/>
-          <a:p>
-            <a:r>
-              <a:rPr lang="en-US" dirty="0"/>
-              <a:t>This is a legitimate analytical pursuit but stops at descriptive analytics. </a:t>
-            </a:r>
-          </a:p>
-          <a:p>
-            <a:r>
-              <a:rPr lang="en-US" dirty="0"/>
-              <a:t>Valid diagnostic, predictive and prescriptive analytics requires direction from the start.</a:t>
-            </a:r>
-          </a:p>
-        </p:txBody>
-      </p:sp>
-    </p:spTree>
-    <p:extLst>
-      <p:ext uri="{BB962C8B-B14F-4D97-AF65-F5344CB8AC3E}">
-        <p14:creationId xmlns:p14="http://schemas.microsoft.com/office/powerpoint/2010/main" val="2941368931"/>
-      </p:ext>
-    </p:extLst>
-  </p:cSld>
-  <p:clrMapOvr>
-    <a:masterClrMapping/>
-  </p:clrMapOvr>
-</p:sld>
-</file>
-
-<file path=ppt/slides/slide2.xml><?xml version="1.0" encoding="utf-8"?>
-<p:sld xmlns:a="http://schemas.openxmlformats.org/drawingml/2006/main" xmlns:r="http://schemas.openxmlformats.org/officeDocument/2006/relationships" xmlns:p="http://schemas.openxmlformats.org/presentationml/2006/main">
-  <p:cSld>
-    <p:spTree>
-      <p:nvGrpSpPr>
-        <p:cNvPr id="1" name=""/>
-        <p:cNvGrpSpPr/>
-        <p:nvPr/>
-      </p:nvGrpSpPr>
-      <p:grpSpPr>
-        <a:xfrm>
-          <a:off x="0" y="0"/>
-          <a:ext cx="0" cy="0"/>
-          <a:chOff x="0" y="0"/>
-          <a:chExt cx="0" cy="0"/>
-        </a:xfrm>
-      </p:grpSpPr>
-      <p:sp>
-        <p:nvSpPr>
-          <p:cNvPr id="2" name="Title 1">
-            <a:extLst>
-              <a:ext uri="{FF2B5EF4-FFF2-40B4-BE49-F238E27FC236}">
-                <a16:creationId xmlns:a16="http://schemas.microsoft.com/office/drawing/2014/main" id="{CA3BF30C-1D58-2C38-C8FC-75963B45E6DB}"/>
-              </a:ext>
-            </a:extLst>
-          </p:cNvPr>
-          <p:cNvSpPr>
-            <a:spLocks noGrp="1"/>
-          </p:cNvSpPr>
-          <p:nvPr>
-            <p:ph type="title"/>
-          </p:nvPr>
-        </p:nvSpPr>
-        <p:spPr/>
-        <p:txBody>
-          <a:bodyPr>
-            <a:normAutofit/>
-          </a:bodyPr>
-          <a:lstStyle/>
-          <a:p>
-            <a:r>
-              <a:rPr lang="en-US" dirty="0"/>
-              <a:t>Start With Something You Notice</a:t>
-            </a:r>
-          </a:p>
-        </p:txBody>
-      </p:sp>
-      <p:sp>
-        <p:nvSpPr>
-          <p:cNvPr id="3" name="Content Placeholder 2">
-            <a:extLst>
-              <a:ext uri="{FF2B5EF4-FFF2-40B4-BE49-F238E27FC236}">
-                <a16:creationId xmlns:a16="http://schemas.microsoft.com/office/drawing/2014/main" id="{A4082BB9-81D5-9E9D-3946-A3D4B6F265CD}"/>
-              </a:ext>
-            </a:extLst>
-          </p:cNvPr>
-          <p:cNvSpPr>
-            <a:spLocks noGrp="1"/>
-          </p:cNvSpPr>
-          <p:nvPr>
-            <p:ph idx="1"/>
-          </p:nvPr>
-        </p:nvSpPr>
-        <p:spPr/>
-        <p:txBody>
-          <a:bodyPr/>
-          <a:lstStyle/>
-          <a:p>
-            <a:pPr marL="0" indent="0">
-              <a:buNone/>
-            </a:pPr>
-            <a:r>
-              <a:rPr lang="en-US" dirty="0"/>
-              <a:t>Think of one observation, concern, or belief about sport that you would like to investigate.</a:t>
-            </a:r>
-          </a:p>
-          <a:p>
-            <a:pPr marL="0" indent="0">
-              <a:buNone/>
-            </a:pPr>
-            <a:r>
-              <a:rPr lang="en-US" dirty="0"/>
-              <a:t>Examples:</a:t>
-            </a:r>
-          </a:p>
-          <a:p>
-            <a:pPr lvl="0"/>
-            <a:r>
-              <a:rPr lang="en-US" dirty="0"/>
-              <a:t>“Our team fades late in games.”</a:t>
-            </a:r>
-          </a:p>
-          <a:p>
-            <a:pPr lvl="0"/>
-            <a:r>
-              <a:rPr lang="en-US" dirty="0"/>
-              <a:t>“This prospect looks better than the statistics suggest.”</a:t>
-            </a:r>
-          </a:p>
-          <a:p>
-            <a:pPr lvl="0"/>
-            <a:r>
-              <a:rPr lang="en-US" dirty="0"/>
-              <a:t>“Some athletes do not recover well after hard practices.”</a:t>
-            </a:r>
-          </a:p>
-          <a:p>
-            <a:pPr marL="0" indent="0">
-              <a:buNone/>
-            </a:pPr>
-            <a:endParaRPr lang="en-US" dirty="0"/>
-          </a:p>
-          <a:p>
-            <a:pPr marL="0" indent="0">
-              <a:buNone/>
-            </a:pPr>
-            <a:r>
-              <a:rPr lang="en-US" dirty="0"/>
-              <a:t>Write yours in one sentence. Does not need to be a formal question yet.</a:t>
-            </a:r>
-          </a:p>
-          <a:p>
-            <a:endParaRPr lang="en-US" dirty="0"/>
-          </a:p>
-        </p:txBody>
-      </p:sp>
-    </p:spTree>
-    <p:extLst>
-      <p:ext uri="{BB962C8B-B14F-4D97-AF65-F5344CB8AC3E}">
-        <p14:creationId xmlns:p14="http://schemas.microsoft.com/office/powerpoint/2010/main" val="1453650419"/>
-      </p:ext>
-    </p:extLst>
-  </p:cSld>
-  <p:clrMapOvr>
-    <a:masterClrMapping/>
-  </p:clrMapOvr>
-</p:sld>
-</file>
-
-<file path=ppt/slides/slide20.xml><?xml version="1.0" encoding="utf-8"?>
-<p:sld xmlns:a="http://schemas.openxmlformats.org/drawingml/2006/main" xmlns:r="http://schemas.openxmlformats.org/officeDocument/2006/relationships" xmlns:p="http://schemas.openxmlformats.org/presentationml/2006/main">
-  <p:cSld>
-    <p:spTree>
-      <p:nvGrpSpPr>
-        <p:cNvPr id="1" name=""/>
-        <p:cNvGrpSpPr/>
-        <p:nvPr/>
-      </p:nvGrpSpPr>
-      <p:grpSpPr>
-        <a:xfrm>
-          <a:off x="0" y="0"/>
-          <a:ext cx="0" cy="0"/>
-          <a:chOff x="0" y="0"/>
-          <a:chExt cx="0" cy="0"/>
-        </a:xfrm>
-      </p:grpSpPr>
-      <p:sp>
-        <p:nvSpPr>
-          <p:cNvPr id="2" name="Title 1">
-            <a:extLst>
-              <a:ext uri="{FF2B5EF4-FFF2-40B4-BE49-F238E27FC236}">
-                <a16:creationId xmlns:a16="http://schemas.microsoft.com/office/drawing/2014/main" id="{434618C8-5DDD-8308-9F68-BE35F62AD1FC}"/>
-              </a:ext>
-            </a:extLst>
-          </p:cNvPr>
-          <p:cNvSpPr>
-            <a:spLocks noGrp="1"/>
-          </p:cNvSpPr>
-          <p:nvPr>
-            <p:ph type="title"/>
-          </p:nvPr>
-        </p:nvSpPr>
-        <p:spPr/>
-        <p:txBody>
-          <a:bodyPr>
-            <a:normAutofit fontScale="90000"/>
-          </a:bodyPr>
-          <a:lstStyle/>
-          <a:p>
-            <a:r>
-              <a:rPr lang="en-US" dirty="0"/>
-              <a:t>A Question Can Be Useful Even If the Answer Is “We Cannot Tell”</a:t>
-            </a:r>
-          </a:p>
-        </p:txBody>
-      </p:sp>
-      <p:sp>
-        <p:nvSpPr>
-          <p:cNvPr id="3" name="Content Placeholder 2">
-            <a:extLst>
-              <a:ext uri="{FF2B5EF4-FFF2-40B4-BE49-F238E27FC236}">
-                <a16:creationId xmlns:a16="http://schemas.microsoft.com/office/drawing/2014/main" id="{13FC7AC4-24AA-9BBC-8F3D-7792C17C8BAE}"/>
-              </a:ext>
-            </a:extLst>
-          </p:cNvPr>
-          <p:cNvSpPr>
-            <a:spLocks noGrp="1"/>
-          </p:cNvSpPr>
-          <p:nvPr>
-            <p:ph idx="1"/>
-          </p:nvPr>
-        </p:nvSpPr>
-        <p:spPr/>
-        <p:txBody>
-          <a:bodyPr/>
-          <a:lstStyle/>
-          <a:p>
-            <a:pPr marL="0" indent="0">
-              <a:buNone/>
-            </a:pPr>
-            <a:r>
-              <a:rPr lang="en-US" dirty="0"/>
-              <a:t>Sometimes the conclusion of an investigation may be:</a:t>
-            </a:r>
-          </a:p>
-          <a:p>
-            <a:pPr lvl="1"/>
-            <a:r>
-              <a:rPr lang="en-US" dirty="0"/>
-              <a:t>The required variable was not measured.</a:t>
-            </a:r>
-          </a:p>
-          <a:p>
-            <a:pPr lvl="1"/>
-            <a:r>
-              <a:rPr lang="en-US" dirty="0"/>
-              <a:t>The comparison group is inappropriate.</a:t>
-            </a:r>
-          </a:p>
-          <a:p>
-            <a:pPr lvl="1"/>
-            <a:r>
-              <a:rPr lang="en-US" dirty="0"/>
-              <a:t>The sample is too limited.</a:t>
-            </a:r>
-          </a:p>
-          <a:p>
-            <a:pPr lvl="1"/>
-            <a:r>
-              <a:rPr lang="en-US" dirty="0"/>
-              <a:t>The measurement does not represent the intended concept.</a:t>
-            </a:r>
-          </a:p>
-          <a:p>
-            <a:pPr lvl="1"/>
-            <a:r>
-              <a:rPr lang="en-US" dirty="0"/>
-              <a:t>The design cannot support the claimed explanation.</a:t>
-            </a:r>
-          </a:p>
-          <a:p>
-            <a:endParaRPr lang="en-US" dirty="0"/>
-          </a:p>
-          <a:p>
-            <a:pPr marL="0" indent="0">
-              <a:buNone/>
-            </a:pPr>
-            <a:r>
-              <a:rPr lang="en-US" dirty="0"/>
-              <a:t>Recognizing limits is a crucial part of analytics</a:t>
-            </a:r>
-          </a:p>
-          <a:p>
-            <a:endParaRPr lang="en-US" dirty="0"/>
-          </a:p>
-        </p:txBody>
-      </p:sp>
-    </p:spTree>
-    <p:extLst>
-      <p:ext uri="{BB962C8B-B14F-4D97-AF65-F5344CB8AC3E}">
-        <p14:creationId xmlns:p14="http://schemas.microsoft.com/office/powerpoint/2010/main" val="2812596209"/>
-      </p:ext>
-    </p:extLst>
-  </p:cSld>
-  <p:clrMapOvr>
-    <a:masterClrMapping/>
-  </p:clrMapOvr>
-</p:sld>
-</file>
-
-<file path=ppt/slides/slide21.xml><?xml version="1.0" encoding="utf-8"?>
-<p:sld xmlns:a="http://schemas.openxmlformats.org/drawingml/2006/main" xmlns:r="http://schemas.openxmlformats.org/officeDocument/2006/relationships" xmlns:p="http://schemas.openxmlformats.org/presentationml/2006/main">
-  <p:cSld>
-    <p:spTree>
-      <p:nvGrpSpPr>
-        <p:cNvPr id="1" name=""/>
-        <p:cNvGrpSpPr/>
-        <p:nvPr/>
-      </p:nvGrpSpPr>
-      <p:grpSpPr>
-        <a:xfrm>
-          <a:off x="0" y="0"/>
-          <a:ext cx="0" cy="0"/>
-          <a:chOff x="0" y="0"/>
-          <a:chExt cx="0" cy="0"/>
-        </a:xfrm>
-      </p:grpSpPr>
-      <p:sp>
-        <p:nvSpPr>
-          <p:cNvPr id="2" name="Title 1">
-            <a:extLst>
-              <a:ext uri="{FF2B5EF4-FFF2-40B4-BE49-F238E27FC236}">
-                <a16:creationId xmlns:a16="http://schemas.microsoft.com/office/drawing/2014/main" id="{6D9AA13A-8725-0FA5-9556-C3B299D4E4D0}"/>
-              </a:ext>
-            </a:extLst>
-          </p:cNvPr>
-          <p:cNvSpPr>
-            <a:spLocks noGrp="1"/>
-          </p:cNvSpPr>
-          <p:nvPr>
-            <p:ph type="title"/>
-          </p:nvPr>
-        </p:nvSpPr>
-        <p:spPr/>
-        <p:txBody>
-          <a:bodyPr/>
-          <a:lstStyle/>
-          <a:p>
-            <a:r>
-              <a:rPr lang="en-US" dirty="0"/>
-              <a:t>Group Project</a:t>
-            </a:r>
-          </a:p>
-        </p:txBody>
-      </p:sp>
-      <p:sp>
-        <p:nvSpPr>
-          <p:cNvPr id="3" name="Content Placeholder 2">
-            <a:extLst>
-              <a:ext uri="{FF2B5EF4-FFF2-40B4-BE49-F238E27FC236}">
-                <a16:creationId xmlns:a16="http://schemas.microsoft.com/office/drawing/2014/main" id="{8DE7D547-D9F3-D86B-EE6A-EF3F72AEA3A9}"/>
-              </a:ext>
-            </a:extLst>
-          </p:cNvPr>
-          <p:cNvSpPr>
-            <a:spLocks noGrp="1"/>
-          </p:cNvSpPr>
-          <p:nvPr>
-            <p:ph idx="1"/>
-          </p:nvPr>
-        </p:nvSpPr>
-        <p:spPr/>
-        <p:txBody>
-          <a:bodyPr/>
-          <a:lstStyle/>
-          <a:p>
-            <a:pPr marL="0" indent="0">
-              <a:buNone/>
-            </a:pPr>
-            <a:r>
-              <a:rPr lang="en-US" dirty="0"/>
-              <a:t>Your group will develop a sport analytics project that connects:</a:t>
-            </a:r>
-          </a:p>
-          <a:p>
-            <a:pPr lvl="1"/>
-            <a:r>
-              <a:rPr lang="en-US" dirty="0"/>
-              <a:t>A sport observation, concern, or decision</a:t>
-            </a:r>
-          </a:p>
-          <a:p>
-            <a:pPr lvl="1"/>
-            <a:r>
-              <a:rPr lang="en-US" dirty="0"/>
-              <a:t>A focused analytical question</a:t>
-            </a:r>
-          </a:p>
-          <a:p>
-            <a:pPr lvl="1"/>
-            <a:r>
-              <a:rPr lang="en-US" dirty="0"/>
-              <a:t>Appropriate and obtainable data</a:t>
-            </a:r>
-          </a:p>
-          <a:p>
-            <a:pPr lvl="1"/>
-            <a:r>
-              <a:rPr lang="en-US" dirty="0"/>
-              <a:t>An analysis that matches the question</a:t>
-            </a:r>
-          </a:p>
-          <a:p>
-            <a:pPr lvl="1"/>
-            <a:r>
-              <a:rPr lang="en-US" dirty="0"/>
-              <a:t>A clear interpretation for the intended audience</a:t>
-            </a:r>
-          </a:p>
-          <a:p>
-            <a:endParaRPr lang="en-US" dirty="0"/>
-          </a:p>
-        </p:txBody>
-      </p:sp>
-      <p:sp>
-        <p:nvSpPr>
-          <p:cNvPr id="5" name="TextBox 4">
-            <a:extLst>
-              <a:ext uri="{FF2B5EF4-FFF2-40B4-BE49-F238E27FC236}">
-                <a16:creationId xmlns:a16="http://schemas.microsoft.com/office/drawing/2014/main" id="{7C146023-B62E-BE7A-6918-A69AB6BA9CA9}"/>
-              </a:ext>
-            </a:extLst>
-          </p:cNvPr>
-          <p:cNvSpPr txBox="1"/>
-          <p:nvPr/>
-        </p:nvSpPr>
-        <p:spPr>
-          <a:xfrm>
-            <a:off x="1112520" y="5000564"/>
-            <a:ext cx="9966960" cy="415498"/>
-          </a:xfrm>
-          <a:prstGeom prst="rect">
-            <a:avLst/>
-          </a:prstGeom>
-          <a:noFill/>
-        </p:spPr>
-        <p:txBody>
-          <a:bodyPr wrap="square">
-            <a:spAutoFit/>
-          </a:bodyPr>
-          <a:lstStyle/>
-          <a:p>
-            <a:r>
-              <a:rPr lang="en-US" sz="2100" i="0" dirty="0">
-                <a:solidFill>
-                  <a:srgbClr val="841617"/>
-                </a:solidFill>
-                <a:effectLst/>
-                <a:latin typeface="Fira Sans" panose="020B0503050000020004" pitchFamily="34" charset="0"/>
-              </a:rPr>
-              <a:t>Your project is not </a:t>
-            </a:r>
-            <a:r>
-              <a:rPr lang="en-US" sz="2100" b="1" i="0" dirty="0">
-                <a:solidFill>
-                  <a:srgbClr val="841617"/>
-                </a:solidFill>
-                <a:effectLst/>
-                <a:latin typeface="Fira Sans" panose="020B0503050000020004" pitchFamily="34" charset="0"/>
-              </a:rPr>
-              <a:t>“analyze a dataset”. </a:t>
-            </a:r>
-            <a:r>
-              <a:rPr lang="en-US" sz="2100" i="0" dirty="0">
-                <a:solidFill>
-                  <a:srgbClr val="841617"/>
-                </a:solidFill>
-                <a:effectLst/>
-                <a:latin typeface="Fira Sans" panose="020B0503050000020004" pitchFamily="34" charset="0"/>
-              </a:rPr>
-              <a:t>The dataset is </a:t>
-            </a:r>
-            <a:r>
-              <a:rPr lang="en-US" sz="2100" b="1" i="0" dirty="0">
-                <a:solidFill>
-                  <a:srgbClr val="841617"/>
-                </a:solidFill>
-                <a:effectLst/>
-                <a:latin typeface="Fira Sans" panose="020B0503050000020004" pitchFamily="34" charset="0"/>
-              </a:rPr>
-              <a:t>evidence</a:t>
-            </a:r>
-            <a:r>
-              <a:rPr lang="en-US" sz="2100" i="0" dirty="0">
-                <a:solidFill>
-                  <a:srgbClr val="841617"/>
-                </a:solidFill>
-                <a:effectLst/>
-                <a:latin typeface="Fira Sans" panose="020B0503050000020004" pitchFamily="34" charset="0"/>
-              </a:rPr>
-              <a:t> for a question.</a:t>
-            </a:r>
-            <a:endParaRPr lang="en-US" dirty="0"/>
-          </a:p>
-        </p:txBody>
-      </p:sp>
-    </p:spTree>
-    <p:extLst>
-      <p:ext uri="{BB962C8B-B14F-4D97-AF65-F5344CB8AC3E}">
-        <p14:creationId xmlns:p14="http://schemas.microsoft.com/office/powerpoint/2010/main" val="1832184453"/>
-      </p:ext>
-    </p:extLst>
-  </p:cSld>
-  <p:clrMapOvr>
-    <a:masterClrMapping/>
-  </p:clrMapOvr>
-</p:sld>
-</file>
-
-<file path=ppt/slides/slide22.xml><?xml version="1.0" encoding="utf-8"?>
-<p:sld xmlns:a="http://schemas.openxmlformats.org/drawingml/2006/main" xmlns:r="http://schemas.openxmlformats.org/officeDocument/2006/relationships" xmlns:p="http://schemas.openxmlformats.org/presentationml/2006/main">
-  <p:cSld>
-    <p:spTree>
-      <p:nvGrpSpPr>
-        <p:cNvPr id="1" name=""/>
-        <p:cNvGrpSpPr/>
-        <p:nvPr/>
-      </p:nvGrpSpPr>
-      <p:grpSpPr>
-        <a:xfrm>
-          <a:off x="0" y="0"/>
-          <a:ext cx="0" cy="0"/>
-          <a:chOff x="0" y="0"/>
-          <a:chExt cx="0" cy="0"/>
-        </a:xfrm>
-      </p:grpSpPr>
-      <p:sp>
-        <p:nvSpPr>
-          <p:cNvPr id="2" name="Title 1">
-            <a:extLst>
-              <a:ext uri="{FF2B5EF4-FFF2-40B4-BE49-F238E27FC236}">
-                <a16:creationId xmlns:a16="http://schemas.microsoft.com/office/drawing/2014/main" id="{69CC56F3-E5F5-2C0D-E9EE-7E798A8816BF}"/>
-              </a:ext>
-            </a:extLst>
-          </p:cNvPr>
-          <p:cNvSpPr>
-            <a:spLocks noGrp="1"/>
-          </p:cNvSpPr>
-          <p:nvPr>
-            <p:ph type="title"/>
-          </p:nvPr>
-        </p:nvSpPr>
-        <p:spPr/>
-        <p:txBody>
-          <a:bodyPr/>
-          <a:lstStyle/>
-          <a:p>
-            <a:r>
-              <a:rPr lang="en-US" dirty="0"/>
-              <a:t>CS1: Establish the Project Direction</a:t>
-            </a:r>
-          </a:p>
-        </p:txBody>
-      </p:sp>
-      <p:sp>
-        <p:nvSpPr>
-          <p:cNvPr id="3" name="Content Placeholder 2">
-            <a:extLst>
-              <a:ext uri="{FF2B5EF4-FFF2-40B4-BE49-F238E27FC236}">
-                <a16:creationId xmlns:a16="http://schemas.microsoft.com/office/drawing/2014/main" id="{4D611F32-8055-42F6-D53F-1374F1587E79}"/>
-              </a:ext>
-            </a:extLst>
-          </p:cNvPr>
-          <p:cNvSpPr>
-            <a:spLocks noGrp="1"/>
-          </p:cNvSpPr>
-          <p:nvPr>
-            <p:ph idx="1"/>
-          </p:nvPr>
-        </p:nvSpPr>
-        <p:spPr/>
-        <p:txBody>
-          <a:bodyPr/>
-          <a:lstStyle/>
-          <a:p>
-            <a:pPr marL="0" indent="0">
-              <a:buNone/>
-            </a:pPr>
-            <a:r>
-              <a:rPr lang="en-US" dirty="0"/>
-              <a:t>With your group, identify:</a:t>
-            </a:r>
-          </a:p>
-          <a:p>
-            <a:pPr marL="914400" lvl="1" indent="-457200">
-              <a:buFont typeface="+mj-lt"/>
-              <a:buAutoNum type="arabicPeriod"/>
-            </a:pPr>
-            <a:r>
-              <a:rPr lang="en-US" dirty="0"/>
-              <a:t>A sport and domain that interests you</a:t>
-            </a:r>
-          </a:p>
-          <a:p>
-            <a:pPr marL="914400" lvl="1" indent="-457200">
-              <a:buFont typeface="+mj-lt"/>
-              <a:buAutoNum type="arabicPeriod"/>
-            </a:pPr>
-            <a:r>
-              <a:rPr lang="en-US" dirty="0"/>
-              <a:t>A real observation, concern, or decision</a:t>
-            </a:r>
-          </a:p>
-          <a:p>
-            <a:pPr marL="914400" lvl="1" indent="-457200">
-              <a:buFont typeface="+mj-lt"/>
-              <a:buAutoNum type="arabicPeriod"/>
-            </a:pPr>
-            <a:r>
-              <a:rPr lang="en-US" dirty="0"/>
-              <a:t>Who would use the answer</a:t>
-            </a:r>
-          </a:p>
-          <a:p>
-            <a:pPr marL="914400" lvl="1" indent="-457200">
-              <a:buFont typeface="+mj-lt"/>
-              <a:buAutoNum type="arabicPeriod"/>
-            </a:pPr>
-            <a:r>
-              <a:rPr lang="en-US" dirty="0"/>
-              <a:t>An initial analytical question</a:t>
-            </a:r>
-          </a:p>
-          <a:p>
-            <a:pPr marL="914400" lvl="1" indent="-457200">
-              <a:buFont typeface="+mj-lt"/>
-              <a:buAutoNum type="arabicPeriod"/>
-            </a:pPr>
-            <a:r>
-              <a:rPr lang="en-US" dirty="0"/>
-              <a:t>The ideal evidence needed</a:t>
-            </a:r>
-          </a:p>
-          <a:p>
-            <a:pPr marL="914400" lvl="1" indent="-457200">
-              <a:buFont typeface="+mj-lt"/>
-              <a:buAutoNum type="arabicPeriod"/>
-            </a:pPr>
-            <a:r>
-              <a:rPr lang="en-US" dirty="0"/>
-              <a:t>Data sources that may be feasible</a:t>
-            </a:r>
-          </a:p>
-          <a:p>
-            <a:pPr marL="0" indent="0">
-              <a:buNone/>
-            </a:pPr>
-            <a:endParaRPr lang="en-US" dirty="0"/>
-          </a:p>
-          <a:p>
-            <a:pPr marL="0" indent="0">
-              <a:buNone/>
-            </a:pPr>
-            <a:r>
-              <a:rPr lang="en-US" dirty="0"/>
-              <a:t>Keep the concern (step 2) and the question (step 4) separate</a:t>
-            </a:r>
-          </a:p>
-          <a:p>
-            <a:pPr marL="0" indent="0">
-              <a:buNone/>
-            </a:pPr>
-            <a:endParaRPr lang="en-US" dirty="0"/>
-          </a:p>
-          <a:p>
-            <a:endParaRPr lang="en-US" dirty="0"/>
-          </a:p>
-        </p:txBody>
-      </p:sp>
-    </p:spTree>
-    <p:extLst>
-      <p:ext uri="{BB962C8B-B14F-4D97-AF65-F5344CB8AC3E}">
-        <p14:creationId xmlns:p14="http://schemas.microsoft.com/office/powerpoint/2010/main" val="1920985699"/>
-      </p:ext>
-    </p:extLst>
-  </p:cSld>
-  <p:clrMapOvr>
-    <a:masterClrMapping/>
-  </p:clrMapOvr>
-</p:sld>
-</file>
-
-<file path=ppt/slides/slide23.xml><?xml version="1.0" encoding="utf-8"?>
-<p:sld xmlns:a="http://schemas.openxmlformats.org/drawingml/2006/main" xmlns:r="http://schemas.openxmlformats.org/officeDocument/2006/relationships" xmlns:p="http://schemas.openxmlformats.org/presentationml/2006/main">
-  <p:cSld>
-    <p:spTree>
-      <p:nvGrpSpPr>
-        <p:cNvPr id="1" name=""/>
-        <p:cNvGrpSpPr/>
-        <p:nvPr/>
-      </p:nvGrpSpPr>
-      <p:grpSpPr>
-        <a:xfrm>
-          <a:off x="0" y="0"/>
-          <a:ext cx="0" cy="0"/>
-          <a:chOff x="0" y="0"/>
-          <a:chExt cx="0" cy="0"/>
-        </a:xfrm>
-      </p:grpSpPr>
-      <p:sp>
-        <p:nvSpPr>
-          <p:cNvPr id="2" name="Title 1">
-            <a:extLst>
-              <a:ext uri="{FF2B5EF4-FFF2-40B4-BE49-F238E27FC236}">
-                <a16:creationId xmlns:a16="http://schemas.microsoft.com/office/drawing/2014/main" id="{0B3945EA-AAB9-DD81-0331-CB10B9A0BE87}"/>
-              </a:ext>
-            </a:extLst>
-          </p:cNvPr>
-          <p:cNvSpPr>
-            <a:spLocks noGrp="1"/>
-          </p:cNvSpPr>
-          <p:nvPr>
-            <p:ph type="title"/>
-          </p:nvPr>
-        </p:nvSpPr>
-        <p:spPr/>
-        <p:txBody>
-          <a:bodyPr/>
-          <a:lstStyle/>
-          <a:p>
-            <a:r>
-              <a:rPr lang="en-US" dirty="0"/>
-              <a:t>Is the Question Ready to be Pursued?</a:t>
-            </a:r>
-          </a:p>
-        </p:txBody>
-      </p:sp>
-      <p:sp>
-        <p:nvSpPr>
-          <p:cNvPr id="3" name="Content Placeholder 2">
-            <a:extLst>
-              <a:ext uri="{FF2B5EF4-FFF2-40B4-BE49-F238E27FC236}">
-                <a16:creationId xmlns:a16="http://schemas.microsoft.com/office/drawing/2014/main" id="{DC054D87-9834-1FF4-08F4-22A3303059B8}"/>
-              </a:ext>
-            </a:extLst>
-          </p:cNvPr>
-          <p:cNvSpPr>
-            <a:spLocks noGrp="1"/>
-          </p:cNvSpPr>
-          <p:nvPr>
-            <p:ph idx="1"/>
-          </p:nvPr>
-        </p:nvSpPr>
-        <p:spPr/>
-        <p:txBody>
-          <a:bodyPr/>
-          <a:lstStyle/>
-          <a:p>
-            <a:pPr marL="0" indent="0">
-              <a:buNone/>
-            </a:pPr>
-            <a:r>
-              <a:rPr lang="en-US" dirty="0"/>
-              <a:t>Before committing, ask:</a:t>
-            </a:r>
-          </a:p>
-          <a:p>
-            <a:pPr lvl="1"/>
-            <a:r>
-              <a:rPr lang="en-US" dirty="0"/>
-              <a:t>Does the answer matter to someone?</a:t>
-            </a:r>
-          </a:p>
-          <a:p>
-            <a:pPr lvl="1"/>
-            <a:r>
-              <a:rPr lang="en-US" dirty="0"/>
-              <a:t>Is the outcome clearly defined?</a:t>
-            </a:r>
-          </a:p>
-          <a:p>
-            <a:pPr lvl="1"/>
-            <a:r>
-              <a:rPr lang="en-US" dirty="0"/>
-              <a:t>Is there a meaningful comparison?</a:t>
-            </a:r>
-          </a:p>
-          <a:p>
-            <a:pPr lvl="1"/>
-            <a:r>
-              <a:rPr lang="en-US" dirty="0"/>
-              <a:t>Is the scope realistic?</a:t>
-            </a:r>
-          </a:p>
-          <a:p>
-            <a:pPr lvl="1"/>
-            <a:r>
-              <a:rPr lang="en-US" dirty="0"/>
-              <a:t>Could evidence challenge our initial belief?</a:t>
-            </a:r>
-          </a:p>
-          <a:p>
-            <a:pPr lvl="1"/>
-            <a:r>
-              <a:rPr lang="en-US" dirty="0"/>
-              <a:t>Are we answering the concern—or merely using convenient data?</a:t>
-            </a:r>
-          </a:p>
-          <a:p>
-            <a:endParaRPr lang="en-US" dirty="0"/>
-          </a:p>
-        </p:txBody>
-      </p:sp>
-    </p:spTree>
-    <p:extLst>
-      <p:ext uri="{BB962C8B-B14F-4D97-AF65-F5344CB8AC3E}">
-        <p14:creationId xmlns:p14="http://schemas.microsoft.com/office/powerpoint/2010/main" val="1425317408"/>
-      </p:ext>
-    </p:extLst>
-  </p:cSld>
-  <p:clrMapOvr>
-    <a:masterClrMapping/>
-  </p:clrMapOvr>
-</p:sld>
-</file>
-
-<file path=ppt/slides/slide24.xml><?xml version="1.0" encoding="utf-8"?>
-<p:sld xmlns:a="http://schemas.openxmlformats.org/drawingml/2006/main" xmlns:r="http://schemas.openxmlformats.org/officeDocument/2006/relationships" xmlns:p="http://schemas.openxmlformats.org/presentationml/2006/main">
-  <p:cSld>
-    <p:spTree>
-      <p:nvGrpSpPr>
-        <p:cNvPr id="1" name=""/>
-        <p:cNvGrpSpPr/>
-        <p:nvPr/>
-      </p:nvGrpSpPr>
-      <p:grpSpPr>
-        <a:xfrm>
-          <a:off x="0" y="0"/>
-          <a:ext cx="0" cy="0"/>
-          <a:chOff x="0" y="0"/>
-          <a:chExt cx="0" cy="0"/>
-        </a:xfrm>
-      </p:grpSpPr>
-      <p:sp>
-        <p:nvSpPr>
-          <p:cNvPr id="2" name="Title 1">
-            <a:extLst>
-              <a:ext uri="{FF2B5EF4-FFF2-40B4-BE49-F238E27FC236}">
-                <a16:creationId xmlns:a16="http://schemas.microsoft.com/office/drawing/2014/main" id="{FBFD6EB5-FEC2-47DE-01A3-F0E170543F3C}"/>
-              </a:ext>
-            </a:extLst>
-          </p:cNvPr>
-          <p:cNvSpPr>
-            <a:spLocks noGrp="1"/>
-          </p:cNvSpPr>
-          <p:nvPr>
-            <p:ph type="title"/>
-          </p:nvPr>
-        </p:nvSpPr>
-        <p:spPr/>
-        <p:txBody>
-          <a:bodyPr>
-            <a:normAutofit/>
-          </a:bodyPr>
-          <a:lstStyle/>
-          <a:p>
-            <a:r>
-              <a:rPr lang="en-GB"/>
-              <a:t>Summary &amp; Looking Ahead</a:t>
-            </a:r>
-            <a:endParaRPr lang="en-US"/>
-          </a:p>
-        </p:txBody>
-      </p:sp>
-      <p:sp>
-        <p:nvSpPr>
-          <p:cNvPr id="3" name="Content Placeholder 2">
-            <a:extLst>
-              <a:ext uri="{FF2B5EF4-FFF2-40B4-BE49-F238E27FC236}">
-                <a16:creationId xmlns:a16="http://schemas.microsoft.com/office/drawing/2014/main" id="{B7781857-C6C4-CF29-7D9F-C7FCD74ECA0D}"/>
-              </a:ext>
-            </a:extLst>
-          </p:cNvPr>
-          <p:cNvSpPr>
-            <a:spLocks noGrp="1"/>
-          </p:cNvSpPr>
-          <p:nvPr>
-            <p:ph idx="1"/>
-          </p:nvPr>
-        </p:nvSpPr>
-        <p:spPr/>
-        <p:txBody>
-          <a:bodyPr/>
-          <a:lstStyle/>
-          <a:p>
-            <a:pPr lvl="0"/>
-            <a:r>
-              <a:rPr lang="en-US" dirty="0"/>
-              <a:t>Start with a sport concern or decision.</a:t>
-            </a:r>
-          </a:p>
-          <a:p>
-            <a:pPr lvl="0"/>
-            <a:r>
-              <a:rPr lang="en-US" dirty="0"/>
-              <a:t>Define the outcome, comparison, and context.</a:t>
-            </a:r>
-          </a:p>
-          <a:p>
-            <a:pPr lvl="0"/>
-            <a:r>
-              <a:rPr lang="en-US" dirty="0"/>
-              <a:t>Use causal language only when the evidence supports it.</a:t>
-            </a:r>
-          </a:p>
-          <a:p>
-            <a:pPr lvl="0"/>
-            <a:r>
-              <a:rPr lang="en-US" dirty="0"/>
-              <a:t>Let feasibility refine the scope without replacing the purpose.</a:t>
-            </a:r>
-          </a:p>
-          <a:p>
-            <a:pPr lvl="0"/>
-            <a:r>
-              <a:rPr lang="en-US" dirty="0"/>
-              <a:t>Treat limitations as part of the answer.</a:t>
-            </a:r>
-          </a:p>
-          <a:p>
-            <a:r>
-              <a:rPr lang="en-US" dirty="0"/>
-              <a:t>Next: at-home case study (generate question and identify dataset)</a:t>
-            </a:r>
-          </a:p>
-          <a:p>
-            <a:endParaRPr lang="en-US" dirty="0"/>
-          </a:p>
-        </p:txBody>
-      </p:sp>
-    </p:spTree>
-    <p:extLst>
-      <p:ext uri="{BB962C8B-B14F-4D97-AF65-F5344CB8AC3E}">
-        <p14:creationId xmlns:p14="http://schemas.microsoft.com/office/powerpoint/2010/main" val="2206692154"/>
-      </p:ext>
-    </p:extLst>
-  </p:cSld>
-  <p:clrMapOvr>
-    <a:masterClrMapping/>
-  </p:clrMapOvr>
-</p:sld>
-</file>
-
-<file path=ppt/slides/slide3.xml><?xml version="1.0" encoding="utf-8"?>
-<p:sld xmlns:a="http://schemas.openxmlformats.org/drawingml/2006/main" xmlns:r="http://schemas.openxmlformats.org/officeDocument/2006/relationships" xmlns:p="http://schemas.openxmlformats.org/presentationml/2006/main">
-  <p:cSld>
-    <p:spTree>
-      <p:nvGrpSpPr>
-        <p:cNvPr id="1" name=""/>
-        <p:cNvGrpSpPr/>
-        <p:nvPr/>
-      </p:nvGrpSpPr>
-      <p:grpSpPr>
-        <a:xfrm>
-          <a:off x="0" y="0"/>
-          <a:ext cx="0" cy="0"/>
-          <a:chOff x="0" y="0"/>
-          <a:chExt cx="0" cy="0"/>
-        </a:xfrm>
-      </p:grpSpPr>
-      <p:sp>
-        <p:nvSpPr>
-          <p:cNvPr id="2" name="Title 1">
-            <a:extLst>
-              <a:ext uri="{FF2B5EF4-FFF2-40B4-BE49-F238E27FC236}">
-                <a16:creationId xmlns:a16="http://schemas.microsoft.com/office/drawing/2014/main" id="{9F82A7AC-EBE2-88F0-2E83-12A67CAE3357}"/>
-              </a:ext>
-            </a:extLst>
-          </p:cNvPr>
-          <p:cNvSpPr>
-            <a:spLocks noGrp="1"/>
-          </p:cNvSpPr>
-          <p:nvPr>
-            <p:ph type="title"/>
-          </p:nvPr>
-        </p:nvSpPr>
-        <p:spPr/>
-        <p:txBody>
-          <a:bodyPr/>
-          <a:lstStyle/>
-          <a:p>
-            <a:r>
-              <a:rPr lang="en-US" dirty="0"/>
-              <a:t>Analysis must start with clarity</a:t>
-            </a:r>
-          </a:p>
-        </p:txBody>
-      </p:sp>
-      <p:sp>
-        <p:nvSpPr>
-          <p:cNvPr id="3" name="Content Placeholder 2">
-            <a:extLst>
-              <a:ext uri="{FF2B5EF4-FFF2-40B4-BE49-F238E27FC236}">
-                <a16:creationId xmlns:a16="http://schemas.microsoft.com/office/drawing/2014/main" id="{1FEE8646-F7D9-D9AE-45A3-05D7358A7E8C}"/>
-              </a:ext>
-            </a:extLst>
-          </p:cNvPr>
-          <p:cNvSpPr>
-            <a:spLocks noGrp="1"/>
-          </p:cNvSpPr>
-          <p:nvPr>
-            <p:ph idx="1"/>
-          </p:nvPr>
-        </p:nvSpPr>
-        <p:spPr/>
-        <p:txBody>
-          <a:bodyPr/>
-          <a:lstStyle/>
-          <a:p>
-            <a:pPr marL="0" indent="0">
-              <a:buNone/>
-            </a:pPr>
-            <a:r>
-              <a:rPr lang="en-US" dirty="0"/>
-              <a:t>“Our team fades late in games” leaves several things unresolved:</a:t>
-            </a:r>
-          </a:p>
-          <a:p>
-            <a:pPr lvl="1"/>
-            <a:r>
-              <a:rPr lang="en-US" dirty="0"/>
-              <a:t>What does </a:t>
-            </a:r>
-            <a:r>
-              <a:rPr lang="en-US" b="1" dirty="0"/>
-              <a:t>fades</a:t>
-            </a:r>
-            <a:r>
-              <a:rPr lang="en-US" dirty="0"/>
-              <a:t> mean?</a:t>
-            </a:r>
-          </a:p>
-          <a:p>
-            <a:pPr lvl="1"/>
-            <a:r>
-              <a:rPr lang="en-US" dirty="0"/>
-              <a:t>Which team, players, games, or situations?</a:t>
-            </a:r>
-          </a:p>
-          <a:p>
-            <a:pPr lvl="1"/>
-            <a:r>
-              <a:rPr lang="en-US" dirty="0"/>
-              <a:t>Compared with what?</a:t>
-            </a:r>
-          </a:p>
-          <a:p>
-            <a:pPr lvl="1"/>
-            <a:r>
-              <a:rPr lang="en-US" dirty="0"/>
-              <a:t>What evidence would support or challenge the belief?</a:t>
-            </a:r>
-          </a:p>
-          <a:p>
-            <a:pPr lvl="1"/>
-            <a:r>
-              <a:rPr lang="en-US" dirty="0"/>
-              <a:t>What decision would change if the belief were true?</a:t>
-            </a:r>
-          </a:p>
-          <a:p>
-            <a:endParaRPr lang="en-US" dirty="0"/>
-          </a:p>
-        </p:txBody>
-      </p:sp>
-      <p:sp>
-        <p:nvSpPr>
-          <p:cNvPr id="5" name="TextBox 4">
-            <a:extLst>
-              <a:ext uri="{FF2B5EF4-FFF2-40B4-BE49-F238E27FC236}">
-                <a16:creationId xmlns:a16="http://schemas.microsoft.com/office/drawing/2014/main" id="{A164F3F4-1385-3A3F-B700-AC6EAA3534C0}"/>
-              </a:ext>
-            </a:extLst>
-          </p:cNvPr>
-          <p:cNvSpPr txBox="1"/>
-          <p:nvPr/>
-        </p:nvSpPr>
-        <p:spPr>
-          <a:xfrm>
-            <a:off x="1615440" y="5000564"/>
-            <a:ext cx="8961120" cy="415498"/>
-          </a:xfrm>
-          <a:prstGeom prst="rect">
-            <a:avLst/>
-          </a:prstGeom>
-          <a:noFill/>
-        </p:spPr>
-        <p:txBody>
-          <a:bodyPr wrap="square">
-            <a:spAutoFit/>
-          </a:bodyPr>
-          <a:lstStyle/>
-          <a:p>
-            <a:r>
-              <a:rPr lang="en-US" sz="2100" i="0" dirty="0">
-                <a:solidFill>
-                  <a:srgbClr val="841617"/>
-                </a:solidFill>
-                <a:effectLst/>
-                <a:latin typeface="Fira Sans" panose="020B0503050000020004" pitchFamily="34" charset="0"/>
-              </a:rPr>
-              <a:t> The starting </a:t>
-            </a:r>
-            <a:r>
-              <a:rPr lang="en-US" sz="2100" dirty="0">
-                <a:solidFill>
-                  <a:srgbClr val="841617"/>
-                </a:solidFill>
-                <a:latin typeface="Fira Sans" panose="020B0503050000020004" pitchFamily="34" charset="0"/>
-              </a:rPr>
-              <a:t>point </a:t>
-            </a:r>
-            <a:r>
-              <a:rPr lang="en-US" sz="2100" i="0" dirty="0">
-                <a:solidFill>
-                  <a:srgbClr val="841617"/>
-                </a:solidFill>
-                <a:effectLst/>
-                <a:latin typeface="Fira Sans" panose="020B0503050000020004" pitchFamily="34" charset="0"/>
-              </a:rPr>
-              <a:t>must be observable and the purpose must be clear.</a:t>
-            </a:r>
-            <a:endParaRPr lang="en-US" dirty="0"/>
-          </a:p>
-        </p:txBody>
-      </p:sp>
-    </p:spTree>
-    <p:extLst>
-      <p:ext uri="{BB962C8B-B14F-4D97-AF65-F5344CB8AC3E}">
-        <p14:creationId xmlns:p14="http://schemas.microsoft.com/office/powerpoint/2010/main" val="1704097859"/>
-      </p:ext>
-    </p:extLst>
-  </p:cSld>
-  <p:clrMapOvr>
-    <a:masterClrMapping/>
-  </p:clrMapOvr>
-</p:sld>
-</file>
-
-<file path=ppt/slides/slide4.xml><?xml version="1.0" encoding="utf-8"?>
-<p:sld xmlns:a="http://schemas.openxmlformats.org/drawingml/2006/main" xmlns:r="http://schemas.openxmlformats.org/officeDocument/2006/relationships" xmlns:p="http://schemas.openxmlformats.org/presentationml/2006/main">
-  <p:cSld>
-    <p:spTree>
-      <p:nvGrpSpPr>
-        <p:cNvPr id="1" name=""/>
-        <p:cNvGrpSpPr/>
-        <p:nvPr/>
-      </p:nvGrpSpPr>
-      <p:grpSpPr>
-        <a:xfrm>
-          <a:off x="0" y="0"/>
-          <a:ext cx="0" cy="0"/>
-          <a:chOff x="0" y="0"/>
-          <a:chExt cx="0" cy="0"/>
-        </a:xfrm>
-      </p:grpSpPr>
-      <p:sp>
-        <p:nvSpPr>
-          <p:cNvPr id="2" name="Title 1">
-            <a:extLst>
-              <a:ext uri="{FF2B5EF4-FFF2-40B4-BE49-F238E27FC236}">
-                <a16:creationId xmlns:a16="http://schemas.microsoft.com/office/drawing/2014/main" id="{9BD22145-F8D5-2136-BED8-BC1F86BC54DC}"/>
-              </a:ext>
-            </a:extLst>
-          </p:cNvPr>
-          <p:cNvSpPr>
-            <a:spLocks noGrp="1"/>
-          </p:cNvSpPr>
-          <p:nvPr>
-            <p:ph type="title"/>
-          </p:nvPr>
-        </p:nvSpPr>
-        <p:spPr/>
-        <p:txBody>
-          <a:bodyPr>
-            <a:normAutofit fontScale="90000"/>
-          </a:bodyPr>
-          <a:lstStyle/>
-          <a:p>
-            <a:r>
-              <a:rPr lang="en-US" dirty="0"/>
-              <a:t>Good Questions Connect Curiosity to a Decision</a:t>
-            </a:r>
-          </a:p>
-        </p:txBody>
-      </p:sp>
-      <p:sp>
-        <p:nvSpPr>
-          <p:cNvPr id="3" name="Content Placeholder 2">
-            <a:extLst>
-              <a:ext uri="{FF2B5EF4-FFF2-40B4-BE49-F238E27FC236}">
-                <a16:creationId xmlns:a16="http://schemas.microsoft.com/office/drawing/2014/main" id="{A880A4C1-BEE3-46D2-3142-B0C840C0C3C9}"/>
-              </a:ext>
-            </a:extLst>
-          </p:cNvPr>
-          <p:cNvSpPr>
-            <a:spLocks noGrp="1"/>
-          </p:cNvSpPr>
-          <p:nvPr>
-            <p:ph idx="1"/>
-          </p:nvPr>
-        </p:nvSpPr>
-        <p:spPr/>
-        <p:txBody>
-          <a:bodyPr/>
-          <a:lstStyle/>
-          <a:p>
-            <a:pPr marL="0" indent="0">
-              <a:buNone/>
-            </a:pPr>
-            <a:r>
-              <a:rPr lang="en-US" dirty="0"/>
-              <a:t>A useful analytical question identifies:</a:t>
-            </a:r>
-          </a:p>
-          <a:p>
-            <a:pPr marL="914400" lvl="1" indent="-457200">
-              <a:buFont typeface="+mj-lt"/>
-              <a:buAutoNum type="arabicPeriod"/>
-            </a:pPr>
-            <a:r>
-              <a:rPr lang="en-US" b="1" dirty="0"/>
-              <a:t>The decision or purpose</a:t>
-            </a:r>
-            <a:r>
-              <a:rPr lang="en-US" dirty="0"/>
-              <a:t> : Why do we need the answer?</a:t>
-            </a:r>
-          </a:p>
-          <a:p>
-            <a:pPr marL="914400" lvl="1" indent="-457200">
-              <a:buFont typeface="+mj-lt"/>
-              <a:buAutoNum type="arabicPeriod"/>
-            </a:pPr>
-            <a:r>
-              <a:rPr lang="en-US" b="1" dirty="0"/>
-              <a:t>The outcome</a:t>
-            </a:r>
-            <a:r>
-              <a:rPr lang="en-US" dirty="0"/>
-              <a:t> : What are we trying to understand?</a:t>
-            </a:r>
-          </a:p>
-          <a:p>
-            <a:pPr marL="914400" lvl="1" indent="-457200">
-              <a:buFont typeface="+mj-lt"/>
-              <a:buAutoNum type="arabicPeriod"/>
-            </a:pPr>
-            <a:r>
-              <a:rPr lang="en-US" b="1" dirty="0"/>
-              <a:t>The comparison</a:t>
-            </a:r>
-            <a:r>
-              <a:rPr lang="en-US" dirty="0"/>
-              <a:t> : Relative to whom, what, or when?</a:t>
-            </a:r>
-          </a:p>
-          <a:p>
-            <a:pPr marL="914400" lvl="1" indent="-457200">
-              <a:buFont typeface="+mj-lt"/>
-              <a:buAutoNum type="arabicPeriod"/>
-            </a:pPr>
-            <a:r>
-              <a:rPr lang="en-US" b="1" dirty="0"/>
-              <a:t>The context</a:t>
-            </a:r>
-            <a:r>
-              <a:rPr lang="en-US" dirty="0"/>
-              <a:t> : Under which conditions?</a:t>
-            </a:r>
-          </a:p>
-          <a:p>
-            <a:pPr marL="914400" lvl="1" indent="-457200">
-              <a:buFont typeface="+mj-lt"/>
-              <a:buAutoNum type="arabicPeriod"/>
-            </a:pPr>
-            <a:r>
-              <a:rPr lang="en-US" b="1" dirty="0"/>
-              <a:t>The evidence</a:t>
-            </a:r>
-            <a:r>
-              <a:rPr lang="en-US" dirty="0"/>
-              <a:t> : What observations could answer it?</a:t>
-            </a:r>
-          </a:p>
-          <a:p>
-            <a:pPr marL="0" indent="0">
-              <a:buNone/>
-            </a:pPr>
-            <a:r>
-              <a:rPr lang="en-US" dirty="0"/>
-              <a:t>The question is the bridge between the sport problem and the analysis.</a:t>
-            </a:r>
-          </a:p>
-          <a:p>
-            <a:endParaRPr lang="en-US" dirty="0"/>
-          </a:p>
-        </p:txBody>
-      </p:sp>
-    </p:spTree>
-    <p:extLst>
-      <p:ext uri="{BB962C8B-B14F-4D97-AF65-F5344CB8AC3E}">
-        <p14:creationId xmlns:p14="http://schemas.microsoft.com/office/powerpoint/2010/main" val="4230780932"/>
-      </p:ext>
-    </p:extLst>
-  </p:cSld>
-  <p:clrMapOvr>
-    <a:masterClrMapping/>
-  </p:clrMapOvr>
-</p:sld>
-</file>
-
-<file path=ppt/slides/slide5.xml><?xml version="1.0" encoding="utf-8"?>
-<p:sld xmlns:a="http://schemas.openxmlformats.org/drawingml/2006/main" xmlns:r="http://schemas.openxmlformats.org/officeDocument/2006/relationships" xmlns:p="http://schemas.openxmlformats.org/presentationml/2006/main">
-  <p:cSld>
-    <p:spTree>
-      <p:nvGrpSpPr>
-        <p:cNvPr id="1" name=""/>
-        <p:cNvGrpSpPr/>
-        <p:nvPr/>
-      </p:nvGrpSpPr>
-      <p:grpSpPr>
-        <a:xfrm>
-          <a:off x="0" y="0"/>
-          <a:ext cx="0" cy="0"/>
-          <a:chOff x="0" y="0"/>
-          <a:chExt cx="0" cy="0"/>
-        </a:xfrm>
-      </p:grpSpPr>
-      <p:sp>
-        <p:nvSpPr>
-          <p:cNvPr id="2" name="Title 1">
-            <a:extLst>
-              <a:ext uri="{FF2B5EF4-FFF2-40B4-BE49-F238E27FC236}">
-                <a16:creationId xmlns:a16="http://schemas.microsoft.com/office/drawing/2014/main" id="{0973FFE0-3F73-4DAD-28C2-3F471720CC7C}"/>
-              </a:ext>
-            </a:extLst>
-          </p:cNvPr>
-          <p:cNvSpPr>
-            <a:spLocks noGrp="1"/>
-          </p:cNvSpPr>
-          <p:nvPr>
-            <p:ph type="title"/>
-          </p:nvPr>
-        </p:nvSpPr>
-        <p:spPr/>
-        <p:txBody>
-          <a:bodyPr>
-            <a:normAutofit/>
-          </a:bodyPr>
-          <a:lstStyle/>
-          <a:p>
-            <a:r>
-              <a:rPr lang="en-US" dirty="0"/>
-              <a:t>Begin With the </a:t>
-            </a:r>
-            <a:r>
-              <a:rPr lang="en-US" b="1" dirty="0"/>
-              <a:t>Decision</a:t>
-            </a:r>
-          </a:p>
-        </p:txBody>
-      </p:sp>
-      <p:sp>
-        <p:nvSpPr>
-          <p:cNvPr id="3" name="Content Placeholder 2">
-            <a:extLst>
-              <a:ext uri="{FF2B5EF4-FFF2-40B4-BE49-F238E27FC236}">
-                <a16:creationId xmlns:a16="http://schemas.microsoft.com/office/drawing/2014/main" id="{FE201081-4CD5-A2F9-3C62-30D07A96C2BD}"/>
-              </a:ext>
-            </a:extLst>
-          </p:cNvPr>
-          <p:cNvSpPr>
-            <a:spLocks noGrp="1"/>
-          </p:cNvSpPr>
-          <p:nvPr>
-            <p:ph idx="1"/>
-          </p:nvPr>
-        </p:nvSpPr>
-        <p:spPr/>
-        <p:txBody>
-          <a:bodyPr/>
-          <a:lstStyle/>
-          <a:p>
-            <a:pPr marL="0" indent="0" algn="ctr">
-              <a:buNone/>
-            </a:pPr>
-            <a:r>
-              <a:rPr lang="en-US" dirty="0"/>
-              <a:t>“I want to know whether our players are tired.”</a:t>
-            </a:r>
-          </a:p>
-          <a:p>
-            <a:pPr marL="0" indent="0" algn="ctr">
-              <a:buNone/>
-            </a:pPr>
-            <a:endParaRPr lang="en-US" dirty="0"/>
-          </a:p>
-          <a:p>
-            <a:pPr marL="0" indent="0">
-              <a:buNone/>
-            </a:pPr>
-            <a:r>
-              <a:rPr lang="en-US" dirty="0"/>
-              <a:t>Possible decisions include:</a:t>
-            </a:r>
-          </a:p>
-          <a:p>
-            <a:pPr lvl="1"/>
-            <a:r>
-              <a:rPr lang="en-US" dirty="0"/>
-              <a:t>Should today's practice be modified?</a:t>
-            </a:r>
-          </a:p>
-          <a:p>
-            <a:pPr lvl="1"/>
-            <a:r>
-              <a:rPr lang="en-US" dirty="0"/>
-              <a:t>Should a player's minutes be restricted tomorrow?</a:t>
-            </a:r>
-          </a:p>
-          <a:p>
-            <a:pPr lvl="1"/>
-            <a:r>
-              <a:rPr lang="en-US" dirty="0"/>
-              <a:t>Should the weekly training plan change?</a:t>
-            </a:r>
-          </a:p>
-          <a:p>
-            <a:pPr lvl="1"/>
-            <a:r>
-              <a:rPr lang="en-US" dirty="0"/>
-              <a:t>Should the team adopt a new recovery strategy?</a:t>
-            </a:r>
-          </a:p>
-          <a:p>
-            <a:endParaRPr lang="en-US" dirty="0"/>
-          </a:p>
-        </p:txBody>
-      </p:sp>
-      <p:sp>
-        <p:nvSpPr>
-          <p:cNvPr id="5" name="TextBox 4">
-            <a:extLst>
-              <a:ext uri="{FF2B5EF4-FFF2-40B4-BE49-F238E27FC236}">
-                <a16:creationId xmlns:a16="http://schemas.microsoft.com/office/drawing/2014/main" id="{2E320C23-378C-A641-D4E3-E4BBB9449F4E}"/>
-              </a:ext>
-            </a:extLst>
-          </p:cNvPr>
-          <p:cNvSpPr txBox="1"/>
-          <p:nvPr/>
-        </p:nvSpPr>
-        <p:spPr>
-          <a:xfrm>
-            <a:off x="754380" y="5046730"/>
-            <a:ext cx="10683240" cy="415498"/>
-          </a:xfrm>
-          <a:prstGeom prst="rect">
-            <a:avLst/>
-          </a:prstGeom>
-          <a:noFill/>
-        </p:spPr>
-        <p:txBody>
-          <a:bodyPr wrap="square">
-            <a:spAutoFit/>
-          </a:bodyPr>
-          <a:lstStyle/>
-          <a:p>
-            <a:r>
-              <a:rPr lang="en-US" sz="2100" i="0" dirty="0">
-                <a:solidFill>
-                  <a:srgbClr val="841617"/>
-                </a:solidFill>
-                <a:effectLst/>
-                <a:latin typeface="Fira Sans" panose="020B0503050000020004" pitchFamily="34" charset="0"/>
-              </a:rPr>
-              <a:t>The same concern can lead to different questions because the decisions are different.</a:t>
-            </a:r>
-            <a:endParaRPr lang="en-US" dirty="0"/>
-          </a:p>
-        </p:txBody>
-      </p:sp>
-    </p:spTree>
-    <p:extLst>
-      <p:ext uri="{BB962C8B-B14F-4D97-AF65-F5344CB8AC3E}">
-        <p14:creationId xmlns:p14="http://schemas.microsoft.com/office/powerpoint/2010/main" val="24542910"/>
-      </p:ext>
-    </p:extLst>
-  </p:cSld>
-  <p:clrMapOvr>
-    <a:masterClrMapping/>
-  </p:clrMapOvr>
-</p:sld>
-</file>
-
-<file path=ppt/slides/slide6.xml><?xml version="1.0" encoding="utf-8"?>
-<p:sld xmlns:a="http://schemas.openxmlformats.org/drawingml/2006/main" xmlns:r="http://schemas.openxmlformats.org/officeDocument/2006/relationships" xmlns:p="http://schemas.openxmlformats.org/presentationml/2006/main">
-  <p:cSld>
-    <p:spTree>
-      <p:nvGrpSpPr>
-        <p:cNvPr id="1" name=""/>
-        <p:cNvGrpSpPr/>
-        <p:nvPr/>
-      </p:nvGrpSpPr>
-      <p:grpSpPr>
-        <a:xfrm>
-          <a:off x="0" y="0"/>
-          <a:ext cx="0" cy="0"/>
-          <a:chOff x="0" y="0"/>
-          <a:chExt cx="0" cy="0"/>
-        </a:xfrm>
-      </p:grpSpPr>
-      <p:sp>
-        <p:nvSpPr>
-          <p:cNvPr id="2" name="Title 1">
-            <a:extLst>
-              <a:ext uri="{FF2B5EF4-FFF2-40B4-BE49-F238E27FC236}">
-                <a16:creationId xmlns:a16="http://schemas.microsoft.com/office/drawing/2014/main" id="{4D05AEA7-0403-0FF7-91A1-54F5E0B80A94}"/>
-              </a:ext>
-            </a:extLst>
-          </p:cNvPr>
-          <p:cNvSpPr>
-            <a:spLocks noGrp="1"/>
-          </p:cNvSpPr>
-          <p:nvPr>
-            <p:ph type="title"/>
-          </p:nvPr>
-        </p:nvSpPr>
-        <p:spPr/>
-        <p:txBody>
-          <a:bodyPr>
-            <a:normAutofit fontScale="90000"/>
-          </a:bodyPr>
-          <a:lstStyle/>
-          <a:p>
-            <a:r>
-              <a:rPr lang="en-US" dirty="0"/>
-              <a:t>Define the </a:t>
-            </a:r>
-            <a:r>
-              <a:rPr lang="en-US" b="1" dirty="0"/>
-              <a:t>Outcome</a:t>
-            </a:r>
-            <a:r>
-              <a:rPr lang="en-US" dirty="0"/>
-              <a:t> Before Choosing the Metric</a:t>
-            </a:r>
-          </a:p>
-        </p:txBody>
-      </p:sp>
-      <p:sp>
-        <p:nvSpPr>
-          <p:cNvPr id="3" name="Content Placeholder 2">
-            <a:extLst>
-              <a:ext uri="{FF2B5EF4-FFF2-40B4-BE49-F238E27FC236}">
-                <a16:creationId xmlns:a16="http://schemas.microsoft.com/office/drawing/2014/main" id="{4F6B34BB-FE70-8861-5C13-19E254D4CD80}"/>
-              </a:ext>
-            </a:extLst>
-          </p:cNvPr>
-          <p:cNvSpPr>
-            <a:spLocks noGrp="1"/>
-          </p:cNvSpPr>
-          <p:nvPr>
-            <p:ph idx="1"/>
-          </p:nvPr>
-        </p:nvSpPr>
-        <p:spPr/>
-        <p:txBody>
-          <a:bodyPr/>
-          <a:lstStyle/>
-          <a:p>
-            <a:pPr marL="0" indent="0">
-              <a:buNone/>
-            </a:pPr>
-            <a:r>
-              <a:rPr lang="en-US" dirty="0"/>
-              <a:t>“tired” could refer to </a:t>
-            </a:r>
-            <a:r>
-              <a:rPr lang="en-US" i="1" dirty="0"/>
-              <a:t>fatigue</a:t>
-            </a:r>
-            <a:r>
-              <a:rPr lang="en-US" dirty="0"/>
-              <a:t>, which could mean:</a:t>
-            </a:r>
-          </a:p>
-          <a:p>
-            <a:pPr lvl="1"/>
-            <a:r>
-              <a:rPr lang="en-US" dirty="0"/>
-              <a:t>Reduced physical performance</a:t>
-            </a:r>
-          </a:p>
-          <a:p>
-            <a:pPr lvl="1"/>
-            <a:r>
-              <a:rPr lang="en-US" dirty="0"/>
-              <a:t>Increased perceived effort</a:t>
-            </a:r>
-          </a:p>
-          <a:p>
-            <a:pPr lvl="1"/>
-            <a:r>
-              <a:rPr lang="en-US" dirty="0"/>
-              <a:t>Muscle soreness</a:t>
-            </a:r>
-          </a:p>
-          <a:p>
-            <a:pPr lvl="1"/>
-            <a:r>
-              <a:rPr lang="en-US" dirty="0"/>
-              <a:t>Lower motivation or alertness</a:t>
-            </a:r>
-          </a:p>
-          <a:p>
-            <a:pPr lvl="1"/>
-            <a:r>
-              <a:rPr lang="en-US" dirty="0"/>
-              <a:t>Incomplete recovery from recent training</a:t>
-            </a:r>
-          </a:p>
-          <a:p>
-            <a:pPr marL="0" indent="0">
-              <a:buNone/>
-            </a:pPr>
-            <a:endParaRPr lang="en-US" dirty="0"/>
-          </a:p>
-          <a:p>
-            <a:pPr marL="0" indent="0">
-              <a:buNone/>
-            </a:pPr>
-            <a:r>
-              <a:rPr lang="en-US" dirty="0"/>
-              <a:t>A metric represents one part of a concept; it is not automatically the concept itself.</a:t>
-            </a:r>
-          </a:p>
-          <a:p>
-            <a:endParaRPr lang="en-US" dirty="0"/>
-          </a:p>
-        </p:txBody>
-      </p:sp>
-    </p:spTree>
-    <p:extLst>
-      <p:ext uri="{BB962C8B-B14F-4D97-AF65-F5344CB8AC3E}">
-        <p14:creationId xmlns:p14="http://schemas.microsoft.com/office/powerpoint/2010/main" val="3389484207"/>
       </p:ext>
     </p:extLst>
   </p:cSld>
@@ -9154,7 +8731,7 @@
           <p:cNvPr id="2" name="Title 1">
             <a:extLst>
               <a:ext uri="{FF2B5EF4-FFF2-40B4-BE49-F238E27FC236}">
-                <a16:creationId xmlns:a16="http://schemas.microsoft.com/office/drawing/2014/main" id="{101646C3-AF44-3C6D-1692-3FAFEF5BE3B4}"/>
+                <a16:creationId xmlns:a16="http://schemas.microsoft.com/office/drawing/2014/main" id="{B81B6E85-EBC7-CD81-C65D-B8A10CED0D22}"/>
               </a:ext>
             </a:extLst>
           </p:cNvPr>
@@ -9173,12 +8750,8 @@
           <a:lstStyle/>
           <a:p>
             <a:r>
-              <a:rPr lang="en-US" b="1" dirty="0"/>
-              <a:t>Comparisons</a:t>
-            </a:r>
-            <a:r>
-              <a:rPr lang="en-US" dirty="0"/>
-              <a:t> Give Numbers Meaning</a:t>
+              <a:rPr lang="en-US" dirty="0"/>
+              <a:t>Available Data Can Rewrite Questions</a:t>
             </a:r>
           </a:p>
         </p:txBody>
@@ -9188,7 +8761,7 @@
           <p:cNvPr id="3" name="Content Placeholder 2">
             <a:extLst>
               <a:ext uri="{FF2B5EF4-FFF2-40B4-BE49-F238E27FC236}">
-                <a16:creationId xmlns:a16="http://schemas.microsoft.com/office/drawing/2014/main" id="{DCDBF179-4A40-A093-5620-24AEA1086655}"/>
+                <a16:creationId xmlns:a16="http://schemas.microsoft.com/office/drawing/2014/main" id="{3B6E6309-FF70-EF25-84E6-99E073817CEE}"/>
               </a:ext>
             </a:extLst>
           </p:cNvPr>
@@ -9209,57 +8782,58 @@
             </a:pPr>
             <a:r>
               <a:rPr lang="en-US" dirty="0"/>
-              <a:t>Consider: “Did the athlete complete a high workload?”</a:t>
-            </a:r>
+              <a:t>Original concern</a:t>
+            </a:r>
+          </a:p>
+          <a:p>
+            <a:pPr lvl="1"/>
+            <a:r>
+              <a:rPr lang="en-US" dirty="0"/>
+              <a:t>Why does the team struggle to create good shots against zone defense?</a:t>
+            </a:r>
+          </a:p>
+          <a:p>
+            <a:pPr lvl="1"/>
+            <a:endParaRPr lang="en-US" dirty="0"/>
           </a:p>
           <a:p>
             <a:pPr marL="0" indent="0">
               <a:buNone/>
             </a:pPr>
+            <a:r>
+              <a:rPr lang="en-US" dirty="0"/>
+              <a:t>Available spreadsheet</a:t>
+            </a:r>
+          </a:p>
+          <a:p>
+            <a:pPr lvl="1"/>
+            <a:r>
+              <a:rPr lang="en-US" dirty="0"/>
+              <a:t>Points, rebounds, assists, and minutes</a:t>
+            </a:r>
+          </a:p>
+          <a:p>
+            <a:pPr lvl="1"/>
             <a:endParaRPr lang="en-US" dirty="0"/>
           </a:p>
           <a:p>
+            <a:pPr lvl="1"/>
+            <a:endParaRPr lang="en-US" dirty="0"/>
+          </a:p>
+          <a:p>
             <a:pPr marL="0" indent="0">
               <a:buNone/>
             </a:pPr>
             <a:r>
               <a:rPr lang="en-US" dirty="0"/>
-              <a:t>High compared with:</a:t>
+              <a:t>Change the question</a:t>
             </a:r>
           </a:p>
           <a:p>
             <a:pPr lvl="1"/>
             <a:r>
               <a:rPr lang="en-US" dirty="0"/>
-              <a:t>The athlete's usual workload?</a:t>
-            </a:r>
-          </a:p>
-          <a:p>
-            <a:pPr lvl="1"/>
-            <a:r>
-              <a:rPr lang="en-US" dirty="0"/>
-              <a:t>The planned workload?</a:t>
-            </a:r>
-          </a:p>
-          <a:p>
-            <a:pPr lvl="1"/>
-            <a:r>
-              <a:rPr lang="en-US" dirty="0"/>
-              <a:t>Teammates at the same position?</a:t>
-            </a:r>
-          </a:p>
-          <a:p>
-            <a:pPr lvl="1"/>
-            <a:r>
-              <a:rPr lang="en-US" dirty="0"/>
-              <a:t>Competition demands?</a:t>
-            </a:r>
-          </a:p>
-          <a:p>
-            <a:pPr lvl="1"/>
-            <a:r>
-              <a:rPr lang="en-US" dirty="0"/>
-              <a:t>A threshold associated with a particular goal?</a:t>
+              <a:t>Who scores the fewest points?</a:t>
             </a:r>
           </a:p>
           <a:p>
@@ -9272,7 +8846,7 @@
           <p:cNvPr id="5" name="TextBox 4">
             <a:extLst>
               <a:ext uri="{FF2B5EF4-FFF2-40B4-BE49-F238E27FC236}">
-                <a16:creationId xmlns:a16="http://schemas.microsoft.com/office/drawing/2014/main" id="{045F6952-0339-ADBA-CB7B-070B43D34BA1}"/>
+                <a16:creationId xmlns:a16="http://schemas.microsoft.com/office/drawing/2014/main" id="{A61DB93B-31A9-49F1-6EC0-14F12A4B9A4D}"/>
               </a:ext>
             </a:extLst>
           </p:cNvPr>
@@ -9281,8 +8855,8 @@
         </p:nvSpPr>
         <p:spPr>
           <a:xfrm>
-            <a:off x="838200" y="5574268"/>
-            <a:ext cx="10835640" cy="415498"/>
+            <a:off x="1112520" y="5761465"/>
+            <a:ext cx="10241280" cy="415498"/>
           </a:xfrm>
           <a:prstGeom prst="rect">
             <a:avLst/>
@@ -9295,6 +8869,16 @@
           </a:bodyPr>
           <a:lstStyle/>
           <a:p>
+            <a:r>
+              <a:rPr lang="en-US" sz="2100" i="0" dirty="0">
+                <a:solidFill>
+                  <a:srgbClr val="841617"/>
+                </a:solidFill>
+                <a:effectLst/>
+                <a:latin typeface="Fira Sans" panose="020B0503050000020004" pitchFamily="34" charset="0"/>
+              </a:rPr>
+              <a:t>The replacement is answerable, but it </a:t>
+            </a:r>
             <a:r>
               <a:rPr lang="en-US" sz="2100" b="1" i="0" dirty="0">
                 <a:solidFill>
@@ -9303,16 +8887,74 @@
                 <a:effectLst/>
                 <a:latin typeface="Fira Sans" panose="020B0503050000020004" pitchFamily="34" charset="0"/>
               </a:rPr>
-              <a:t>Without a reference point, “high,” “low,” “good,” and “poor” are usually empty labels.</a:t>
+              <a:t>does not answer </a:t>
+            </a:r>
+            <a:r>
+              <a:rPr lang="en-US" sz="2100" i="0" dirty="0">
+                <a:solidFill>
+                  <a:srgbClr val="841617"/>
+                </a:solidFill>
+                <a:effectLst/>
+                <a:latin typeface="Fira Sans" panose="020B0503050000020004" pitchFamily="34" charset="0"/>
+              </a:rPr>
+              <a:t>the original concern.</a:t>
             </a:r>
             <a:endParaRPr lang="en-US" dirty="0"/>
+          </a:p>
+        </p:txBody>
+      </p:sp>
+      <p:sp>
+        <p:nvSpPr>
+          <p:cNvPr id="7" name="TextBox 6">
+            <a:extLst>
+              <a:ext uri="{FF2B5EF4-FFF2-40B4-BE49-F238E27FC236}">
+                <a16:creationId xmlns:a16="http://schemas.microsoft.com/office/drawing/2014/main" id="{3EF72459-72CA-56E3-A271-920241C9D516}"/>
+              </a:ext>
+            </a:extLst>
+          </p:cNvPr>
+          <p:cNvSpPr txBox="1"/>
+          <p:nvPr/>
+        </p:nvSpPr>
+        <p:spPr>
+          <a:xfrm>
+            <a:off x="6091004" y="4301694"/>
+            <a:ext cx="6100996" cy="892552"/>
+          </a:xfrm>
+          <a:prstGeom prst="rect">
+            <a:avLst/>
+          </a:prstGeom>
+          <a:noFill/>
+        </p:spPr>
+        <p:txBody>
+          <a:bodyPr wrap="square">
+            <a:spAutoFit/>
+          </a:bodyPr>
+          <a:lstStyle/>
+          <a:p>
+            <a:pPr marL="0" indent="0">
+              <a:buNone/>
+            </a:pPr>
+            <a:r>
+              <a:rPr lang="en-US" sz="2800" dirty="0"/>
+              <a:t>Collect more data</a:t>
+            </a:r>
+          </a:p>
+          <a:p>
+            <a:pPr marL="800100" lvl="1" indent="-342900">
+              <a:buFont typeface="Arial" panose="020B0604020202020204" pitchFamily="34" charset="0"/>
+              <a:buChar char="•"/>
+            </a:pPr>
+            <a:r>
+              <a:rPr lang="en-US" sz="2400" dirty="0"/>
+              <a:t>Play-by-play game data</a:t>
+            </a:r>
           </a:p>
         </p:txBody>
       </p:sp>
     </p:spTree>
     <p:extLst>
       <p:ext uri="{BB962C8B-B14F-4D97-AF65-F5344CB8AC3E}">
-        <p14:creationId xmlns:p14="http://schemas.microsoft.com/office/powerpoint/2010/main" val="2299613256"/>
+        <p14:creationId xmlns:p14="http://schemas.microsoft.com/office/powerpoint/2010/main" val="222991542"/>
       </p:ext>
     </p:extLst>
   </p:cSld>
@@ -9344,7 +8986,7 @@
           <p:cNvPr id="2" name="Title 1">
             <a:extLst>
               <a:ext uri="{FF2B5EF4-FFF2-40B4-BE49-F238E27FC236}">
-                <a16:creationId xmlns:a16="http://schemas.microsoft.com/office/drawing/2014/main" id="{DFE34839-DE9B-1266-7846-B6B88AAA034A}"/>
+                <a16:creationId xmlns:a16="http://schemas.microsoft.com/office/drawing/2014/main" id="{BCD9CF10-1CD8-034F-EF20-0B4F96D9FC95}"/>
               </a:ext>
             </a:extLst>
           </p:cNvPr>
@@ -9353,40 +8995,6 @@
           </p:cNvSpPr>
           <p:nvPr>
             <p:ph type="title"/>
-          </p:nvPr>
-        </p:nvSpPr>
-        <p:spPr/>
-        <p:txBody>
-          <a:bodyPr>
-            <a:normAutofit fontScale="90000"/>
-          </a:bodyPr>
-          <a:lstStyle/>
-          <a:p>
-            <a:r>
-              <a:rPr lang="en-US" b="1" dirty="0"/>
-              <a:t>Context</a:t>
-            </a:r>
-            <a:r>
-              <a:rPr lang="en-US" dirty="0"/>
-              <a:t> Determines What the Comparison Means</a:t>
-            </a:r>
-          </a:p>
-        </p:txBody>
-      </p:sp>
-      <p:sp>
-        <p:nvSpPr>
-          <p:cNvPr id="3" name="Content Placeholder 2">
-            <a:extLst>
-              <a:ext uri="{FF2B5EF4-FFF2-40B4-BE49-F238E27FC236}">
-                <a16:creationId xmlns:a16="http://schemas.microsoft.com/office/drawing/2014/main" id="{4CA6E9D4-BF0E-C498-64FA-DDD94CEC2325}"/>
-              </a:ext>
-            </a:extLst>
-          </p:cNvPr>
-          <p:cNvSpPr>
-            <a:spLocks noGrp="1"/>
-          </p:cNvSpPr>
-          <p:nvPr>
-            <p:ph idx="1"/>
           </p:nvPr>
         </p:nvSpPr>
         <p:spPr/>
@@ -9396,79 +9004,42 @@
           </a:bodyPr>
           <a:lstStyle/>
           <a:p>
-            <a:pPr marL="0" indent="0">
-              <a:buNone/>
-            </a:pPr>
-            <a:r>
-              <a:rPr lang="en-US" dirty="0"/>
-              <a:t>The same performance value may mean something different depending on:</a:t>
-            </a:r>
-          </a:p>
-          <a:p>
-            <a:pPr lvl="1"/>
-            <a:r>
-              <a:rPr lang="en-US" dirty="0"/>
-              <a:t>Position or role</a:t>
-            </a:r>
-          </a:p>
-          <a:p>
-            <a:pPr lvl="1"/>
-            <a:r>
-              <a:rPr lang="en-US" dirty="0"/>
-              <a:t>Opponent quality</a:t>
-            </a:r>
-          </a:p>
-          <a:p>
-            <a:pPr lvl="1"/>
-            <a:r>
-              <a:rPr lang="en-US" dirty="0"/>
-              <a:t>Game state</a:t>
-            </a:r>
-          </a:p>
-          <a:p>
-            <a:pPr lvl="1"/>
-            <a:r>
-              <a:rPr lang="en-US" dirty="0"/>
-              <a:t>Training phase</a:t>
-            </a:r>
-          </a:p>
-          <a:p>
-            <a:pPr lvl="1"/>
-            <a:r>
-              <a:rPr lang="en-US" dirty="0"/>
-              <a:t>Injury or return-to-play status</a:t>
-            </a:r>
-          </a:p>
-          <a:p>
-            <a:pPr lvl="1"/>
-            <a:r>
-              <a:rPr lang="en-US" dirty="0"/>
-              <a:t>Age and competition level</a:t>
-            </a:r>
-          </a:p>
-          <a:p>
-            <a:pPr marL="0" indent="0">
-              <a:buNone/>
-            </a:pPr>
-            <a:r>
-              <a:rPr lang="en-US" dirty="0"/>
-              <a:t>Useful questions define </a:t>
-            </a:r>
-            <a:r>
-              <a:rPr lang="en-US" u="sng" dirty="0"/>
-              <a:t>just enough</a:t>
-            </a:r>
-            <a:r>
-              <a:rPr lang="en-US" dirty="0"/>
-              <a:t> context to make the answer interpretable.</a:t>
-            </a:r>
+            <a:r>
+              <a:rPr lang="en-US" sz="4400" dirty="0"/>
+              <a:t>Building a Question That Can Guide the Analysis</a:t>
+            </a:r>
+          </a:p>
+        </p:txBody>
+      </p:sp>
+      <p:sp>
+        <p:nvSpPr>
+          <p:cNvPr id="3" name="Text Placeholder 2">
+            <a:extLst>
+              <a:ext uri="{FF2B5EF4-FFF2-40B4-BE49-F238E27FC236}">
+                <a16:creationId xmlns:a16="http://schemas.microsoft.com/office/drawing/2014/main" id="{2DF69B5E-9289-6924-3952-1DFF0177DAD0}"/>
+              </a:ext>
+            </a:extLst>
+          </p:cNvPr>
+          <p:cNvSpPr>
+            <a:spLocks noGrp="1"/>
+          </p:cNvSpPr>
+          <p:nvPr>
+            <p:ph type="body" idx="1"/>
+          </p:nvPr>
+        </p:nvSpPr>
+        <p:spPr/>
+        <p:txBody>
+          <a:bodyPr/>
+          <a:lstStyle/>
+          <a:p>
+            <a:endParaRPr lang="en-US"/>
           </a:p>
         </p:txBody>
       </p:sp>
     </p:spTree>
     <p:extLst>
       <p:ext uri="{BB962C8B-B14F-4D97-AF65-F5344CB8AC3E}">
-        <p14:creationId xmlns:p14="http://schemas.microsoft.com/office/powerpoint/2010/main" val="3385852351"/>
+        <p14:creationId xmlns:p14="http://schemas.microsoft.com/office/powerpoint/2010/main" val="386883777"/>
       </p:ext>
     </p:extLst>
   </p:cSld>
@@ -9500,7 +9071,7 @@
           <p:cNvPr id="2" name="Title 1">
             <a:extLst>
               <a:ext uri="{FF2B5EF4-FFF2-40B4-BE49-F238E27FC236}">
-                <a16:creationId xmlns:a16="http://schemas.microsoft.com/office/drawing/2014/main" id="{ABF7BC53-667C-6DE7-3C82-9D521CC74AD4}"/>
+                <a16:creationId xmlns:a16="http://schemas.microsoft.com/office/drawing/2014/main" id="{9F82A7AC-EBE2-88F0-2E83-12A67CAE3357}"/>
               </a:ext>
             </a:extLst>
           </p:cNvPr>
@@ -9518,7 +9089,7 @@
           <a:p>
             <a:r>
               <a:rPr lang="en-US" dirty="0"/>
-              <a:t>From Concern to Question</a:t>
+              <a:t>Analysis must start with clarity</a:t>
             </a:r>
           </a:p>
         </p:txBody>
@@ -9528,7 +9099,7 @@
           <p:cNvPr id="3" name="Content Placeholder 2">
             <a:extLst>
               <a:ext uri="{FF2B5EF4-FFF2-40B4-BE49-F238E27FC236}">
-                <a16:creationId xmlns:a16="http://schemas.microsoft.com/office/drawing/2014/main" id="{5F1EB17A-3D99-67B8-4BB6-BED4E2F941B6}"/>
+                <a16:creationId xmlns:a16="http://schemas.microsoft.com/office/drawing/2014/main" id="{1FEE8646-F7D9-D9AE-45A3-05D7358A7E8C}"/>
               </a:ext>
             </a:extLst>
           </p:cNvPr>
@@ -9541,12 +9112,19 @@
         </p:nvSpPr>
         <p:spPr/>
         <p:txBody>
-          <a:bodyPr>
-            <a:normAutofit/>
-          </a:bodyPr>
-          <a:lstStyle/>
-          <a:p>
-            <a:pPr marL="0" indent="0">
+          <a:bodyPr/>
+          <a:lstStyle/>
+          <a:p>
+            <a:pPr marL="0" indent="0" algn="ctr">
+              <a:buNone/>
+            </a:pPr>
+            <a:r>
+              <a:rPr lang="en-US" dirty="0"/>
+              <a:t>“Our team fades late in games” </a:t>
+            </a:r>
+          </a:p>
+          <a:p>
+            <a:pPr marL="0" indent="0" algn="ctr">
               <a:buNone/>
             </a:pPr>
             <a:endParaRPr lang="en-US" dirty="0"/>
@@ -9555,267 +9133,75 @@
             <a:pPr marL="0" indent="0">
               <a:buNone/>
             </a:pPr>
+            <a:r>
+              <a:rPr lang="en-US" dirty="0"/>
+              <a:t>Clarifying questions:</a:t>
+            </a:r>
+          </a:p>
+          <a:p>
+            <a:pPr lvl="1"/>
+            <a:r>
+              <a:rPr lang="en-US" dirty="0"/>
+              <a:t>What does </a:t>
+            </a:r>
+            <a:r>
+              <a:rPr lang="en-US" b="1" dirty="0"/>
+              <a:t>fades</a:t>
+            </a:r>
+            <a:r>
+              <a:rPr lang="en-US" dirty="0"/>
+              <a:t> mean?</a:t>
+            </a:r>
+          </a:p>
+          <a:p>
+            <a:pPr lvl="1"/>
+            <a:r>
+              <a:rPr lang="en-US" dirty="0"/>
+              <a:t>Which team, players, games, or situations?</a:t>
+            </a:r>
+          </a:p>
+          <a:p>
+            <a:pPr lvl="1"/>
+            <a:r>
+              <a:rPr lang="en-US" dirty="0"/>
+              <a:t>Compared with what?</a:t>
+            </a:r>
+          </a:p>
+          <a:p>
+            <a:pPr lvl="1"/>
+            <a:r>
+              <a:rPr lang="en-US" dirty="0"/>
+              <a:t>What evidence would support or challenge the belief?</a:t>
+            </a:r>
+          </a:p>
+          <a:p>
+            <a:pPr lvl="1"/>
+            <a:r>
+              <a:rPr lang="en-US" dirty="0"/>
+              <a:t>What decision would change if the belief were true?</a:t>
+            </a:r>
+          </a:p>
+          <a:p>
             <a:endParaRPr lang="en-US" dirty="0"/>
           </a:p>
-          <a:p>
-            <a:pPr marL="0" indent="0">
-              <a:buNone/>
-            </a:pPr>
-            <a:endParaRPr lang="en-US" dirty="0"/>
-          </a:p>
-          <a:p>
-            <a:pPr marL="0" indent="0">
-              <a:buNone/>
-            </a:pPr>
-            <a:endParaRPr lang="en-US" dirty="0"/>
-          </a:p>
-          <a:p>
-            <a:pPr marL="0" indent="0">
-              <a:buNone/>
-            </a:pPr>
-            <a:endParaRPr lang="en-US" dirty="0"/>
-          </a:p>
-          <a:p>
-            <a:pPr marL="0" indent="0">
-              <a:buNone/>
-            </a:pPr>
-            <a:r>
-              <a:rPr lang="en-US" dirty="0"/>
-              <a:t>This revision defines:</a:t>
-            </a:r>
-          </a:p>
-          <a:p>
-            <a:pPr lvl="1"/>
-            <a:r>
-              <a:rPr lang="en-US" dirty="0"/>
-              <a:t>Outcome = scoring efficiency</a:t>
-            </a:r>
-          </a:p>
-          <a:p>
-            <a:pPr lvl="1"/>
-            <a:r>
-              <a:rPr lang="en-US" dirty="0"/>
-              <a:t>Comparison = fourth quarter versus earlier quarters</a:t>
-            </a:r>
-          </a:p>
-          <a:p>
-            <a:pPr lvl="1"/>
-            <a:r>
-              <a:rPr lang="en-US" dirty="0"/>
-              <a:t>Context = conference games</a:t>
-            </a:r>
-          </a:p>
-        </p:txBody>
-      </p:sp>
-      <p:sp>
-        <p:nvSpPr>
-          <p:cNvPr id="4" name="Thought Bubble: Cloud 3">
-            <a:extLst>
-              <a:ext uri="{FF2B5EF4-FFF2-40B4-BE49-F238E27FC236}">
-                <a16:creationId xmlns:a16="http://schemas.microsoft.com/office/drawing/2014/main" id="{F92C28F5-A378-9EE0-050F-A1A4731C3553}"/>
-              </a:ext>
-            </a:extLst>
-          </p:cNvPr>
-          <p:cNvSpPr/>
+        </p:txBody>
+      </p:sp>
+      <p:sp>
+        <p:nvSpPr>
+          <p:cNvPr id="5" name="TextBox 4">
+            <a:extLst>
+              <a:ext uri="{FF2B5EF4-FFF2-40B4-BE49-F238E27FC236}">
+                <a16:creationId xmlns:a16="http://schemas.microsoft.com/office/drawing/2014/main" id="{A164F3F4-1385-3A3F-B700-AC6EAA3534C0}"/>
+              </a:ext>
+            </a:extLst>
+          </p:cNvPr>
+          <p:cNvSpPr txBox="1"/>
           <p:nvPr/>
         </p:nvSpPr>
         <p:spPr>
           <a:xfrm>
-            <a:off x="441960" y="1819457"/>
-            <a:ext cx="4023360" cy="1356361"/>
-          </a:xfrm>
-          <a:prstGeom prst="cloudCallout">
-            <a:avLst>
-              <a:gd name="adj1" fmla="val -46212"/>
-              <a:gd name="adj2" fmla="val 46770"/>
-            </a:avLst>
-          </a:prstGeom>
-        </p:spPr>
-        <p:style>
-          <a:lnRef idx="1">
-            <a:schemeClr val="accent1"/>
-          </a:lnRef>
-          <a:fillRef idx="2">
-            <a:schemeClr val="accent1"/>
-          </a:fillRef>
-          <a:effectRef idx="1">
-            <a:schemeClr val="accent1"/>
-          </a:effectRef>
-          <a:fontRef idx="minor">
-            <a:schemeClr val="dk1"/>
-          </a:fontRef>
-        </p:style>
-        <p:txBody>
-          <a:bodyPr rtlCol="0" anchor="ctr"/>
-          <a:lstStyle/>
-          <a:p>
-            <a:pPr algn="ctr"/>
-            <a:r>
-              <a:rPr lang="en-US" dirty="0"/>
-              <a:t>“Our team fades late in games.”</a:t>
-            </a:r>
-          </a:p>
-        </p:txBody>
-      </p:sp>
-      <p:sp>
-        <p:nvSpPr>
-          <p:cNvPr id="5" name="Oval 4">
-            <a:extLst>
-              <a:ext uri="{FF2B5EF4-FFF2-40B4-BE49-F238E27FC236}">
-                <a16:creationId xmlns:a16="http://schemas.microsoft.com/office/drawing/2014/main" id="{2C0324FF-737E-AC90-87B9-4D767153D842}"/>
-              </a:ext>
-            </a:extLst>
-          </p:cNvPr>
-          <p:cNvSpPr/>
-          <p:nvPr/>
-        </p:nvSpPr>
-        <p:spPr>
-          <a:xfrm>
-            <a:off x="5715002" y="1277817"/>
-            <a:ext cx="4998718" cy="2151184"/>
-          </a:xfrm>
-          <a:prstGeom prst="ellipse">
-            <a:avLst/>
-          </a:prstGeom>
-        </p:spPr>
-        <p:style>
-          <a:lnRef idx="2">
-            <a:schemeClr val="accent1"/>
-          </a:lnRef>
-          <a:fillRef idx="1">
-            <a:schemeClr val="lt1"/>
-          </a:fillRef>
-          <a:effectRef idx="0">
-            <a:schemeClr val="accent1"/>
-          </a:effectRef>
-          <a:fontRef idx="minor">
-            <a:schemeClr val="dk1"/>
-          </a:fontRef>
-        </p:style>
-        <p:txBody>
-          <a:bodyPr rtlCol="0" anchor="ctr"/>
-          <a:lstStyle/>
-          <a:p>
-            <a:pPr algn="ctr"/>
-            <a:r>
-              <a:rPr lang="en-US" dirty="0"/>
-              <a:t>During conference games this season, did our team's scoring efficiency decline in the fourth quarter compared with the first three quarters?</a:t>
-            </a:r>
-          </a:p>
-        </p:txBody>
-      </p:sp>
-      <p:sp>
-        <p:nvSpPr>
-          <p:cNvPr id="6" name="Arrow: Right 5">
-            <a:extLst>
-              <a:ext uri="{FF2B5EF4-FFF2-40B4-BE49-F238E27FC236}">
-                <a16:creationId xmlns:a16="http://schemas.microsoft.com/office/drawing/2014/main" id="{95CF244B-ED44-7D25-C303-99AFA9A11AA6}"/>
-              </a:ext>
-            </a:extLst>
-          </p:cNvPr>
-          <p:cNvSpPr/>
-          <p:nvPr/>
-        </p:nvSpPr>
-        <p:spPr>
-          <a:xfrm>
-            <a:off x="4600957" y="2255321"/>
-            <a:ext cx="978408" cy="484632"/>
-          </a:xfrm>
-          <a:prstGeom prst="rightArrow">
-            <a:avLst/>
-          </a:prstGeom>
-        </p:spPr>
-        <p:style>
-          <a:lnRef idx="2">
-            <a:schemeClr val="accent1">
-              <a:shade val="15000"/>
-            </a:schemeClr>
-          </a:lnRef>
-          <a:fillRef idx="1">
-            <a:schemeClr val="accent1"/>
-          </a:fillRef>
-          <a:effectRef idx="0">
-            <a:schemeClr val="accent1"/>
-          </a:effectRef>
-          <a:fontRef idx="minor">
-            <a:schemeClr val="lt1"/>
-          </a:fontRef>
-        </p:style>
-        <p:txBody>
-          <a:bodyPr rtlCol="0" anchor="ctr"/>
-          <a:lstStyle/>
-          <a:p>
-            <a:pPr algn="ctr"/>
-            <a:endParaRPr lang="en-US"/>
-          </a:p>
-        </p:txBody>
-      </p:sp>
-      <p:sp>
-        <p:nvSpPr>
-          <p:cNvPr id="7" name="Speech Bubble: Oval 6">
-            <a:extLst>
-              <a:ext uri="{FF2B5EF4-FFF2-40B4-BE49-F238E27FC236}">
-                <a16:creationId xmlns:a16="http://schemas.microsoft.com/office/drawing/2014/main" id="{1C754BFF-6052-9A8F-D252-D338DCB41697}"/>
-              </a:ext>
-            </a:extLst>
-          </p:cNvPr>
-          <p:cNvSpPr/>
-          <p:nvPr/>
-        </p:nvSpPr>
-        <p:spPr>
-          <a:xfrm>
-            <a:off x="9433560" y="3593122"/>
-            <a:ext cx="2606040" cy="1375118"/>
-          </a:xfrm>
-          <a:prstGeom prst="wedgeEllipseCallout">
-            <a:avLst>
-              <a:gd name="adj1" fmla="val -44210"/>
-              <a:gd name="adj2" fmla="val -58301"/>
-            </a:avLst>
-          </a:prstGeom>
-        </p:spPr>
-        <p:style>
-          <a:lnRef idx="2">
-            <a:schemeClr val="accent1"/>
-          </a:lnRef>
-          <a:fillRef idx="1">
-            <a:schemeClr val="lt1"/>
-          </a:fillRef>
-          <a:effectRef idx="0">
-            <a:schemeClr val="accent1"/>
-          </a:effectRef>
-          <a:fontRef idx="minor">
-            <a:schemeClr val="dk1"/>
-          </a:fontRef>
-        </p:style>
-        <p:txBody>
-          <a:bodyPr rtlCol="0" anchor="ctr"/>
-          <a:lstStyle/>
-          <a:p>
-            <a:pPr algn="ctr"/>
-            <a:r>
-              <a:rPr lang="en-US" dirty="0"/>
-              <a:t>and is the pattern different in close games?</a:t>
-            </a:r>
-          </a:p>
-        </p:txBody>
-      </p:sp>
-      <p:sp>
-        <p:nvSpPr>
-          <p:cNvPr id="9" name="TextBox 8">
-            <a:extLst>
-              <a:ext uri="{FF2B5EF4-FFF2-40B4-BE49-F238E27FC236}">
-                <a16:creationId xmlns:a16="http://schemas.microsoft.com/office/drawing/2014/main" id="{BEFD210B-0F34-EF90-47BA-D523E2F06334}"/>
-              </a:ext>
-            </a:extLst>
-          </p:cNvPr>
-          <p:cNvSpPr txBox="1"/>
-          <p:nvPr/>
-        </p:nvSpPr>
-        <p:spPr>
-          <a:xfrm>
-            <a:off x="571500" y="6018014"/>
-            <a:ext cx="11049000" cy="415498"/>
+            <a:off x="1615440" y="5416062"/>
+            <a:ext cx="8961120" cy="415498"/>
           </a:xfrm>
           <a:prstGeom prst="rect">
             <a:avLst/>
@@ -9828,7 +9214,6 @@
           </a:bodyPr>
           <a:lstStyle/>
           <a:p>
-            <a:pPr algn="ctr"/>
             <a:r>
               <a:rPr lang="en-US" sz="2100" i="0" dirty="0">
                 <a:solidFill>
@@ -9837,7 +9222,26 @@
                 <a:effectLst/>
                 <a:latin typeface="Fira Sans" panose="020B0503050000020004" pitchFamily="34" charset="0"/>
               </a:rPr>
-              <a:t>What else needs to be resolved?</a:t>
+              <a:t> The starting </a:t>
+            </a:r>
+            <a:r>
+              <a:rPr lang="en-US" sz="2100" dirty="0">
+                <a:solidFill>
+                  <a:srgbClr val="841617"/>
+                </a:solidFill>
+                <a:latin typeface="Fira Sans" panose="020B0503050000020004" pitchFamily="34" charset="0"/>
+              </a:rPr>
+              <a:t>point </a:t>
+            </a:r>
+            <a:r>
+              <a:rPr lang="en-US" sz="2100" i="0" dirty="0">
+                <a:solidFill>
+                  <a:srgbClr val="841617"/>
+                </a:solidFill>
+                <a:effectLst/>
+                <a:latin typeface="Fira Sans" panose="020B0503050000020004" pitchFamily="34" charset="0"/>
+              </a:rPr>
+              <a:t>must be observable and the purpose must be clear.</a:t>
             </a:r>
             <a:endParaRPr lang="en-US" dirty="0"/>
           </a:p>
@@ -9846,7 +9250,7 @@
     </p:spTree>
     <p:extLst>
       <p:ext uri="{BB962C8B-B14F-4D97-AF65-F5344CB8AC3E}">
-        <p14:creationId xmlns:p14="http://schemas.microsoft.com/office/powerpoint/2010/main" val="1760325861"/>
+        <p14:creationId xmlns:p14="http://schemas.microsoft.com/office/powerpoint/2010/main" val="1704097859"/>
       </p:ext>
     </p:extLst>
   </p:cSld>
